--- a/docs/praesentation/XRechnung_Anleitung_Anwender.pptx
+++ b/docs/praesentation/XRechnung_Anleitung_Anwender.pptx
@@ -30,6 +30,7 @@
     <p:sldId id="278" r:id="rId29"/>
     <p:sldId id="279" r:id="rId30"/>
     <p:sldId id="280" r:id="rId31"/>
+    <p:sldId id="281" r:id="rId32"/>
   </p:sldIdLst>
   <p:sldSz cx="12191695" cy="6858000" type="screen4x3"/>
   <p:notesSz cx="6858000" cy="9144000"/>
@@ -3445,7 +3446,7 @@
                 </a:solidFill>
                 <a:latin typeface="Trebuchet MS"/>
               </a:rPr>
-              <a:t>Stand 16.09.2026 · Alle Bildschirmfotos zeigen erfundene Musterdaten, keine echten Kunden oder Gäste.</a:t>
+              <a:t>Stand 30.10.2026 · Alle Bildschirmfotos zeigen erfundene Musterdaten, keine echten Kunden oder Gäste.</a:t>
             </a:r>
           </a:p>
         </p:txBody>
@@ -3677,7 +3678,7 @@
                 </a:solidFill>
                 <a:latin typeface="Trebuchet MS"/>
               </a:rPr>
-              <a:t>XRechnung · Anleitung für den Alltag · Stand 16.09.2026 · Bilder mit Musterdaten</a:t>
+              <a:t>XRechnung · Anleitung für den Alltag · Stand 30.10.2026 · Bilder mit Musterdaten</a:t>
             </a:r>
           </a:p>
         </p:txBody>
@@ -3733,7 +3734,7 @@
         <p:spPr>
           <a:xfrm>
             <a:off x="5101590" y="1398270"/>
-            <a:ext cx="5887746" cy="2415540"/>
+            <a:ext cx="5867713" cy="2415540"/>
           </a:xfrm>
           <a:prstGeom prst="rect">
             <a:avLst/>
@@ -3785,7 +3786,7 @@
         <p:spPr>
           <a:xfrm>
             <a:off x="5120640" y="1417320"/>
-            <a:ext cx="5849646" cy="2377440"/>
+            <a:ext cx="5829613" cy="2377440"/>
           </a:xfrm>
           <a:prstGeom prst="rect">
             <a:avLst/>
@@ -4835,7 +4836,7 @@
                 </a:solidFill>
                 <a:latin typeface="Trebuchet MS"/>
               </a:rPr>
-              <a:t>XRechnung · Anleitung für den Alltag · Stand 16.09.2026 · Bilder mit Musterdaten</a:t>
+              <a:t>XRechnung · Anleitung für den Alltag · Stand 30.10.2026 · Bilder mit Musterdaten</a:t>
             </a:r>
           </a:p>
         </p:txBody>
@@ -4891,7 +4892,7 @@
         <p:spPr>
           <a:xfrm>
             <a:off x="5101590" y="1398270"/>
-            <a:ext cx="6308271" cy="2964180"/>
+            <a:ext cx="6307650" cy="2964180"/>
           </a:xfrm>
           <a:prstGeom prst="rect">
             <a:avLst/>
@@ -4943,7 +4944,7 @@
         <p:spPr>
           <a:xfrm>
             <a:off x="5120640" y="1417320"/>
-            <a:ext cx="6270171" cy="2926080"/>
+            <a:ext cx="6269550" cy="2926080"/>
           </a:xfrm>
           <a:prstGeom prst="rect">
             <a:avLst/>
@@ -5897,7 +5898,7 @@
                 </a:solidFill>
                 <a:latin typeface="Trebuchet MS"/>
               </a:rPr>
-              <a:t>XRechnung · Anleitung für den Alltag · Stand 16.09.2026 · Bilder mit Musterdaten</a:t>
+              <a:t>XRechnung · Anleitung für den Alltag · Stand 30.10.2026 · Bilder mit Musterdaten</a:t>
             </a:r>
           </a:p>
         </p:txBody>
@@ -5953,7 +5954,7 @@
         <p:spPr>
           <a:xfrm>
             <a:off x="621030" y="1992630"/>
-            <a:ext cx="4448066" cy="2415540"/>
+            <a:ext cx="2938009" cy="2415540"/>
           </a:xfrm>
           <a:prstGeom prst="rect">
             <a:avLst/>
@@ -6005,7 +6006,7 @@
         <p:spPr>
           <a:xfrm>
             <a:off x="640080" y="2011680"/>
-            <a:ext cx="4409966" cy="2377440"/>
+            <a:ext cx="2899909" cy="2377440"/>
           </a:xfrm>
           <a:prstGeom prst="rect">
             <a:avLst/>
@@ -6021,7 +6022,7 @@
         <p:spPr>
           <a:xfrm>
             <a:off x="6259677" y="1398270"/>
-            <a:ext cx="3307290" cy="3604074"/>
+            <a:ext cx="2838287" cy="3878580"/>
           </a:xfrm>
           <a:prstGeom prst="rect">
             <a:avLst/>
@@ -6073,7 +6074,7 @@
         <p:spPr>
           <a:xfrm>
             <a:off x="6278727" y="1417320"/>
-            <a:ext cx="3269190" cy="3565974"/>
+            <a:ext cx="2800187" cy="3840480"/>
           </a:xfrm>
           <a:prstGeom prst="rect">
             <a:avLst/>
@@ -6870,7 +6871,7 @@
                 </a:solidFill>
                 <a:latin typeface="Trebuchet MS"/>
               </a:rPr>
-              <a:t>XRechnung · Anleitung für den Alltag · Stand 16.09.2026 · Bilder mit Musterdaten</a:t>
+              <a:t>XRechnung · Anleitung für den Alltag · Stand 30.10.2026 · Bilder mit Musterdaten</a:t>
             </a:r>
           </a:p>
         </p:txBody>
@@ -7713,7 +7714,7 @@
                 </a:solidFill>
                 <a:latin typeface="Trebuchet MS"/>
               </a:rPr>
-              <a:t>XRechnung · Anleitung für den Alltag · Stand 16.09.2026 · Bilder mit Musterdaten</a:t>
+              <a:t>XRechnung · Anleitung für den Alltag · Stand 30.10.2026 · Bilder mit Musterdaten</a:t>
             </a:r>
           </a:p>
         </p:txBody>
@@ -7769,7 +7770,7 @@
         <p:spPr>
           <a:xfrm>
             <a:off x="6015990" y="1398270"/>
-            <a:ext cx="2077242" cy="2827020"/>
+            <a:ext cx="2023639" cy="2827020"/>
           </a:xfrm>
           <a:prstGeom prst="rect">
             <a:avLst/>
@@ -7821,7 +7822,7 @@
         <p:spPr>
           <a:xfrm>
             <a:off x="6035040" y="1417320"/>
-            <a:ext cx="2039142" cy="2788920"/>
+            <a:ext cx="1985539" cy="2788920"/>
           </a:xfrm>
           <a:prstGeom prst="rect">
             <a:avLst/>
@@ -8789,7 +8790,7 @@
                 </a:solidFill>
                 <a:latin typeface="Trebuchet MS"/>
               </a:rPr>
-              <a:t>Nullbeleg / negativer Betrag</a:t>
+              <a:t>Nullbeleg</a:t>
             </a:r>
           </a:p>
         </p:txBody>
@@ -9255,7 +9256,7 @@
                 </a:solidFill>
                 <a:latin typeface="Trebuchet MS"/>
               </a:rPr>
-              <a:t>XRechnung · Anleitung für den Alltag · Stand 16.09.2026 · Bilder mit Musterdaten</a:t>
+              <a:t>XRechnung · Anleitung für den Alltag · Stand 30.10.2026 · Bilder mit Musterdaten</a:t>
             </a:r>
           </a:p>
         </p:txBody>
@@ -10271,7 +10272,7 @@
                 </a:solidFill>
                 <a:latin typeface="Trebuchet MS"/>
               </a:rPr>
-              <a:t>XRechnung · Anleitung für den Alltag · Stand 16.09.2026 · Bilder mit Musterdaten</a:t>
+              <a:t>XRechnung · Anleitung für den Alltag · Stand 30.10.2026 · Bilder mit Musterdaten</a:t>
             </a:r>
           </a:p>
         </p:txBody>
@@ -10327,7 +10328,7 @@
         <p:spPr>
           <a:xfrm>
             <a:off x="4827270" y="1398270"/>
-            <a:ext cx="3850044" cy="2735580"/>
+            <a:ext cx="3762329" cy="2735580"/>
           </a:xfrm>
           <a:prstGeom prst="rect">
             <a:avLst/>
@@ -10379,7 +10380,7 @@
         <p:spPr>
           <a:xfrm>
             <a:off x="4846320" y="1417320"/>
-            <a:ext cx="3811944" cy="2697480"/>
+            <a:ext cx="3724229" cy="2697480"/>
           </a:xfrm>
           <a:prstGeom prst="rect">
             <a:avLst/>
@@ -11639,7 +11640,7 @@
                 </a:solidFill>
                 <a:latin typeface="Trebuchet MS"/>
               </a:rPr>
-              <a:t>XRechnung · Anleitung für den Alltag · Stand 16.09.2026 · Bilder mit Musterdaten</a:t>
+              <a:t>XRechnung · Anleitung für den Alltag · Stand 30.10.2026 · Bilder mit Musterdaten</a:t>
             </a:r>
           </a:p>
         </p:txBody>
@@ -11695,7 +11696,7 @@
         <p:spPr>
           <a:xfrm>
             <a:off x="621030" y="1398270"/>
-            <a:ext cx="7733127" cy="2141220"/>
+            <a:ext cx="7727303" cy="2141220"/>
           </a:xfrm>
           <a:prstGeom prst="rect">
             <a:avLst/>
@@ -11747,7 +11748,7 @@
         <p:spPr>
           <a:xfrm>
             <a:off x="640080" y="1417320"/>
-            <a:ext cx="7695027" cy="2103120"/>
+            <a:ext cx="7689203" cy="2103120"/>
           </a:xfrm>
           <a:prstGeom prst="rect">
             <a:avLst/>
@@ -12674,7 +12675,7 @@
                 </a:solidFill>
                 <a:latin typeface="Trebuchet MS"/>
               </a:rPr>
-              <a:t>XRechnung · Anleitung für den Alltag · Stand 16.09.2026 · Bilder mit Musterdaten</a:t>
+              <a:t>XRechnung · Anleitung für den Alltag · Stand 30.10.2026 · Bilder mit Musterdaten</a:t>
             </a:r>
           </a:p>
         </p:txBody>
@@ -13528,7 +13529,7 @@
                 </a:solidFill>
                 <a:latin typeface="Trebuchet MS"/>
               </a:rPr>
-              <a:t>GUT ZU WISSEN</a:t>
+              <a:t>SONDERFALL</a:t>
             </a:r>
           </a:p>
         </p:txBody>
@@ -13570,7 +13571,7 @@
                 </a:solidFill>
                 <a:latin typeface="Georgia"/>
               </a:rPr>
-              <a:t>Eine bestimmte Rechnung finden</a:t>
+              <a:t>Eine Gutschrift verschicken</a:t>
             </a:r>
           </a:p>
         </p:txBody>
@@ -13612,7 +13613,7 @@
                 </a:solidFill>
                 <a:latin typeface="Trebuchet MS"/>
               </a:rPr>
-              <a:t>XRechnung · Anleitung für den Alltag · Stand 16.09.2026 · Bilder mit Musterdaten</a:t>
+              <a:t>XRechnung · Anleitung für den Alltag · Stand 30.10.2026 · Bilder mit Musterdaten</a:t>
             </a:r>
           </a:p>
         </p:txBody>
@@ -13668,7 +13669,7 @@
         <p:spPr>
           <a:xfrm>
             <a:off x="621030" y="1398270"/>
-            <a:ext cx="9366474" cy="2415540"/>
+            <a:ext cx="9201467" cy="2141220"/>
           </a:xfrm>
           <a:prstGeom prst="rect">
             <a:avLst/>
@@ -13705,7 +13706,7 @@
       </p:sp>
       <p:pic>
         <p:nvPicPr>
-          <p:cNvPr id="9" name="Picture 8" descr="15_suche.png"/>
+          <p:cNvPr id="9" name="Picture 8" descr="20_gutschrift.png"/>
           <p:cNvPicPr>
             <a:picLocks noChangeAspect="1"/>
           </p:cNvPicPr>
@@ -13720,7 +13721,7 @@
         <p:spPr>
           <a:xfrm>
             <a:off x="640080" y="1417320"/>
-            <a:ext cx="9328374" cy="2377440"/>
+            <a:ext cx="9163367" cy="2103120"/>
           </a:xfrm>
           <a:prstGeom prst="rect">
             <a:avLst/>
@@ -13735,7 +13736,7 @@
         </p:nvSpPr>
         <p:spPr>
           <a:xfrm>
-            <a:off x="640080" y="4050792"/>
+            <a:off x="640080" y="3685032"/>
             <a:ext cx="329184" cy="329184"/>
           </a:xfrm>
           <a:prstGeom prst="ellipse">
@@ -13795,8 +13796,8 @@
         </p:nvSpPr>
         <p:spPr>
           <a:xfrm>
-            <a:off x="1115568" y="4069080"/>
-            <a:ext cx="5193792" cy="477316"/>
+            <a:off x="1115568" y="3703320"/>
+            <a:ext cx="5285232" cy="477316"/>
           </a:xfrm>
           <a:prstGeom prst="rect">
             <a:avLst/>
@@ -13818,13 +13819,22 @@
               </a:spcAft>
             </a:pPr>
             <a:r>
+              <a:rPr sz="1450" b="0">
+                <a:solidFill>
+                  <a:srgbClr val="2A2824"/>
+                </a:solidFill>
+                <a:latin typeface="Trebuchet MS"/>
+              </a:rPr>
+              <a:t>Gutschriften kommen </a:t>
+            </a:r>
+            <a:r>
               <a:rPr sz="1450" b="1">
                 <a:solidFill>
                   <a:srgbClr val="2A2824"/>
                 </a:solidFill>
                 <a:latin typeface="Trebuchet MS"/>
               </a:rPr>
-              <a:t>Rechnungsnummer</a:t>
+              <a:t>immer in Prüfung</a:t>
             </a:r>
             <a:r>
               <a:rPr sz="1450" b="0">
@@ -13833,25 +13843,7 @@
                 </a:solidFill>
                 <a:latin typeface="Trebuchet MS"/>
               </a:rPr>
-              <a:t> in das Suchfeld eintragen und </a:t>
-            </a:r>
-            <a:r>
-              <a:rPr sz="1450" b="1">
-                <a:solidFill>
-                  <a:srgbClr val="2A2824"/>
-                </a:solidFill>
-                <a:latin typeface="Trebuchet MS"/>
-              </a:rPr>
-              <a:t>„Suchen“</a:t>
-            </a:r>
-            <a:r>
-              <a:rPr sz="1450" b="0">
-                <a:solidFill>
-                  <a:srgbClr val="2A2824"/>
-                </a:solidFill>
-                <a:latin typeface="Trebuchet MS"/>
-              </a:rPr>
-              <a:t> klicken.</a:t>
+              <a:t> — keine geht ohne Ihren Blick hinaus.</a:t>
             </a:r>
           </a:p>
         </p:txBody>
@@ -13864,7 +13856,7 @@
         </p:nvSpPr>
         <p:spPr>
           <a:xfrm>
-            <a:off x="640080" y="4692700"/>
+            <a:off x="640080" y="4326940"/>
             <a:ext cx="329184" cy="329184"/>
           </a:xfrm>
           <a:prstGeom prst="ellipse">
@@ -13924,8 +13916,8 @@
         </p:nvSpPr>
         <p:spPr>
           <a:xfrm>
-            <a:off x="1115568" y="4710988"/>
-            <a:ext cx="5193792" cy="715975"/>
+            <a:off x="1115568" y="4345228"/>
+            <a:ext cx="5285232" cy="477316"/>
           </a:xfrm>
           <a:prstGeom prst="rect">
             <a:avLst/>
@@ -13953,7 +13945,7 @@
                 </a:solidFill>
                 <a:latin typeface="Trebuchet MS"/>
               </a:rPr>
-              <a:t>Steht die Rechnung noch nicht in der Liste, zeigt das Programm sie unter </a:t>
+              <a:t>Oben steht, </a:t>
             </a:r>
             <a:r>
               <a:rPr sz="1450" b="1">
@@ -13962,7 +13954,7 @@
                 </a:solidFill>
                 <a:latin typeface="Trebuchet MS"/>
               </a:rPr>
-              <a:t>„In OPERA gefunden“</a:t>
+              <a:t>zu welcher Rechnung</a:t>
             </a:r>
             <a:r>
               <a:rPr sz="1450" b="0">
@@ -13971,7 +13963,109 @@
                 </a:solidFill>
                 <a:latin typeface="Trebuchet MS"/>
               </a:rPr>
-              <a:t>. </a:t>
+              <a:t> die Gutschrift gehört, wenn das Programm sie sicher erkennt.</a:t>
+            </a:r>
+          </a:p>
+        </p:txBody>
+      </p:sp>
+      <p:sp>
+        <p:nvSpPr>
+          <p:cNvPr id="14" name="Oval 13"/>
+          <p:cNvSpPr/>
+          <p:nvPr/>
+        </p:nvSpPr>
+        <p:spPr>
+          <a:xfrm>
+            <a:off x="640080" y="4968848"/>
+            <a:ext cx="329184" cy="329184"/>
+          </a:xfrm>
+          <a:prstGeom prst="ellipse">
+            <a:avLst/>
+          </a:prstGeom>
+          <a:solidFill>
+            <a:srgbClr val="D0021B"/>
+          </a:solidFill>
+          <a:ln>
+            <a:noFill/>
+          </a:ln>
+          <a:effectLst/>
+        </p:spPr>
+        <p:style>
+          <a:lnRef idx="1">
+            <a:schemeClr val="accent1"/>
+          </a:lnRef>
+          <a:fillRef idx="3">
+            <a:schemeClr val="accent1"/>
+          </a:fillRef>
+          <a:effectRef idx="2">
+            <a:schemeClr val="accent1"/>
+          </a:effectRef>
+          <a:fontRef idx="minor">
+            <a:schemeClr val="lt1"/>
+          </a:fontRef>
+        </p:style>
+        <p:txBody>
+          <a:bodyPr rtlCol="0" anchor="ctr" lIns="0" rIns="0" tIns="0" bIns="0"/>
+          <a:lstStyle/>
+          <a:p>
+            <a:pPr algn="ctr">
+              <a:lnSpc>
+                <a:spcPct val="120000"/>
+              </a:lnSpc>
+              <a:spcAft>
+                <a:spcPts val="0"/>
+              </a:spcAft>
+            </a:pPr>
+            <a:r>
+              <a:rPr sz="1400" b="1">
+                <a:solidFill>
+                  <a:srgbClr val="FFFFFF"/>
+                </a:solidFill>
+                <a:latin typeface="Trebuchet MS"/>
+              </a:rPr>
+              <a:t>3</a:t>
+            </a:r>
+          </a:p>
+        </p:txBody>
+      </p:sp>
+      <p:sp>
+        <p:nvSpPr>
+          <p:cNvPr id="15" name="TextBox 14"/>
+          <p:cNvSpPr txBox="1"/>
+          <p:nvPr/>
+        </p:nvSpPr>
+        <p:spPr>
+          <a:xfrm>
+            <a:off x="1115568" y="4987136"/>
+            <a:ext cx="5285232" cy="477316"/>
+          </a:xfrm>
+          <a:prstGeom prst="rect">
+            <a:avLst/>
+          </a:prstGeom>
+          <a:noFill/>
+        </p:spPr>
+        <p:txBody>
+          <a:bodyPr wrap="square" anchor="t" lIns="0" rIns="0" tIns="0" bIns="0">
+            <a:spAutoFit/>
+          </a:bodyPr>
+          <a:lstStyle/>
+          <a:p>
+            <a:pPr algn="l">
+              <a:lnSpc>
+                <a:spcPct val="120000"/>
+              </a:lnSpc>
+              <a:spcAft>
+                <a:spcPts val="400"/>
+              </a:spcAft>
+            </a:pPr>
+            <a:r>
+              <a:rPr sz="1450" b="0">
+                <a:solidFill>
+                  <a:srgbClr val="2A2824"/>
+                </a:solidFill>
+                <a:latin typeface="Trebuchet MS"/>
+              </a:rPr>
+              <a:t>Stimmt alles: Empfänger prüfen, dann </a:t>
             </a:r>
             <a:r>
               <a:rPr sz="1450" b="1">
@@ -13980,7 +14074,7 @@
                 </a:solidFill>
                 <a:latin typeface="Trebuchet MS"/>
               </a:rPr>
-              <a:t>„In die Liste holen“</a:t>
+              <a:t>„Prüfung abgeschlossen“</a:t>
             </a:r>
             <a:r>
               <a:rPr sz="1450" b="0">
@@ -13989,21 +14083,39 @@
                 </a:solidFill>
                 <a:latin typeface="Trebuchet MS"/>
               </a:rPr>
-              <a:t> nimmt sie auf.</a:t>
-            </a:r>
-          </a:p>
-        </p:txBody>
-      </p:sp>
-      <p:sp>
-        <p:nvSpPr>
-          <p:cNvPr id="14" name="Rounded Rectangle 13"/>
+              <a:t> — oder gleich </a:t>
+            </a:r>
+            <a:r>
+              <a:rPr sz="1450" b="1">
+                <a:solidFill>
+                  <a:srgbClr val="2A2824"/>
+                </a:solidFill>
+                <a:latin typeface="Trebuchet MS"/>
+              </a:rPr>
+              <a:t>„Jetzt versenden“</a:t>
+            </a:r>
+            <a:r>
+              <a:rPr sz="1450" b="0">
+                <a:solidFill>
+                  <a:srgbClr val="2A2824"/>
+                </a:solidFill>
+                <a:latin typeface="Trebuchet MS"/>
+              </a:rPr>
+              <a:t>.</a:t>
+            </a:r>
+          </a:p>
+        </p:txBody>
+      </p:sp>
+      <p:sp>
+        <p:nvSpPr>
+          <p:cNvPr id="16" name="Rounded Rectangle 15"/>
           <p:cNvSpPr/>
           <p:nvPr/>
         </p:nvSpPr>
         <p:spPr>
           <a:xfrm>
-            <a:off x="6675120" y="4023360"/>
-            <a:ext cx="4876495" cy="1143000"/>
+            <a:off x="6766560" y="3657600"/>
+            <a:ext cx="4785055" cy="1371600"/>
           </a:xfrm>
           <a:prstGeom prst="roundRect">
             <a:avLst>
@@ -14042,14 +14154,14 @@
       </p:sp>
       <p:sp>
         <p:nvSpPr>
-          <p:cNvPr id="15" name="Rectangle 14"/>
+          <p:cNvPr id="17" name="Rectangle 16"/>
           <p:cNvSpPr/>
           <p:nvPr/>
         </p:nvSpPr>
         <p:spPr>
           <a:xfrm>
-            <a:off x="6675120" y="4023360"/>
-            <a:ext cx="82296" cy="1143000"/>
+            <a:off x="6766560" y="3657600"/>
+            <a:ext cx="82296" cy="1371600"/>
           </a:xfrm>
           <a:prstGeom prst="rect">
             <a:avLst/>
@@ -14086,14 +14198,14 @@
       </p:sp>
       <p:sp>
         <p:nvSpPr>
-          <p:cNvPr id="16" name="TextBox 15"/>
+          <p:cNvPr id="18" name="TextBox 17"/>
           <p:cNvSpPr txBox="1"/>
           <p:nvPr/>
         </p:nvSpPr>
         <p:spPr>
           <a:xfrm>
-            <a:off x="6931152" y="4133088"/>
-            <a:ext cx="4510735" cy="274320"/>
+            <a:off x="7022592" y="3767328"/>
+            <a:ext cx="4419295" cy="274320"/>
           </a:xfrm>
           <a:prstGeom prst="rect">
             <a:avLst/>
@@ -14128,14 +14240,14 @@
       </p:sp>
       <p:sp>
         <p:nvSpPr>
-          <p:cNvPr id="17" name="TextBox 16"/>
+          <p:cNvPr id="19" name="TextBox 18"/>
           <p:cNvSpPr txBox="1"/>
           <p:nvPr/>
         </p:nvSpPr>
         <p:spPr>
           <a:xfrm>
-            <a:off x="6931152" y="4389120"/>
-            <a:ext cx="4465015" cy="731520"/>
+            <a:off x="7022592" y="4023360"/>
+            <a:ext cx="4373575" cy="960120"/>
           </a:xfrm>
           <a:prstGeom prst="rect">
             <a:avLst/>
@@ -14163,7 +14275,7 @@
                 </a:solidFill>
                 <a:latin typeface="Trebuchet MS"/>
               </a:rPr>
-              <a:t>In OPERA sucht das Programm </a:t>
+              <a:t>In der Gutschrift stehen die Beträge </a:t>
             </a:r>
             <a:r>
               <a:rPr sz="1350" b="1">
@@ -14172,7 +14284,7 @@
                 </a:solidFill>
                 <a:latin typeface="Trebuchet MS"/>
               </a:rPr>
-              <a:t>nur nach Nummern</a:t>
+              <a:t>ohne Minus</a:t>
             </a:r>
             <a:r>
               <a:rPr sz="1350" b="0">
@@ -14181,21 +14293,21 @@
                 </a:solidFill>
                 <a:latin typeface="Trebuchet MS"/>
               </a:rPr>
-              <a:t>, nicht nach Namen. Namen findet es in der Liste.</a:t>
-            </a:r>
-          </a:p>
-        </p:txBody>
-      </p:sp>
-      <p:sp>
-        <p:nvSpPr>
-          <p:cNvPr id="18" name="Rounded Rectangle 17"/>
+              <a:t> — das ist richtig so. Dass es eine Gutschrift ist, steht in der Datei und im Betreff der Mail.</a:t>
+            </a:r>
+          </a:p>
+        </p:txBody>
+      </p:sp>
+      <p:sp>
+        <p:nvSpPr>
+          <p:cNvPr id="20" name="Rounded Rectangle 19"/>
           <p:cNvSpPr/>
           <p:nvPr/>
         </p:nvSpPr>
         <p:spPr>
           <a:xfrm>
-            <a:off x="6675120" y="5303520"/>
-            <a:ext cx="4876495" cy="914400"/>
+            <a:off x="6766560" y="5166360"/>
+            <a:ext cx="4785055" cy="1371600"/>
           </a:xfrm>
           <a:prstGeom prst="roundRect">
             <a:avLst>
@@ -14203,7 +14315,7 @@
             </a:avLst>
           </a:prstGeom>
           <a:solidFill>
-            <a:srgbClr val="FBEFDC"/>
+            <a:srgbClr val="E3F0E8"/>
           </a:solidFill>
           <a:ln>
             <a:noFill/>
@@ -14234,20 +14346,20 @@
       </p:sp>
       <p:sp>
         <p:nvSpPr>
-          <p:cNvPr id="19" name="Rectangle 18"/>
+          <p:cNvPr id="21" name="Rectangle 20"/>
           <p:cNvSpPr/>
           <p:nvPr/>
         </p:nvSpPr>
         <p:spPr>
           <a:xfrm>
-            <a:off x="6675120" y="5303520"/>
-            <a:ext cx="82296" cy="914400"/>
+            <a:off x="6766560" y="5166360"/>
+            <a:ext cx="82296" cy="1371600"/>
           </a:xfrm>
           <a:prstGeom prst="rect">
             <a:avLst/>
           </a:prstGeom>
           <a:solidFill>
-            <a:srgbClr val="8A4B12"/>
+            <a:srgbClr val="1F5C3D"/>
           </a:solidFill>
           <a:ln>
             <a:noFill/>
@@ -14278,14 +14390,14 @@
       </p:sp>
       <p:sp>
         <p:nvSpPr>
-          <p:cNvPr id="20" name="TextBox 19"/>
+          <p:cNvPr id="22" name="TextBox 21"/>
           <p:cNvSpPr txBox="1"/>
           <p:nvPr/>
         </p:nvSpPr>
         <p:spPr>
           <a:xfrm>
-            <a:off x="6931152" y="5413248"/>
-            <a:ext cx="4510735" cy="274320"/>
+            <a:off x="7022592" y="5276088"/>
+            <a:ext cx="4419295" cy="274320"/>
           </a:xfrm>
           <a:prstGeom prst="rect">
             <a:avLst/>
@@ -14309,25 +14421,25 @@
             <a:r>
               <a:rPr sz="1100" b="1">
                 <a:solidFill>
-                  <a:srgbClr val="8A4B12"/>
-                </a:solidFill>
-                <a:latin typeface="Trebuchet MS"/>
-              </a:rPr>
-              <a:t>HINWEIS</a:t>
-            </a:r>
-          </a:p>
-        </p:txBody>
-      </p:sp>
-      <p:sp>
-        <p:nvSpPr>
-          <p:cNvPr id="21" name="TextBox 20"/>
+                  <a:srgbClr val="1F5C3D"/>
+                </a:solidFill>
+                <a:latin typeface="Trebuchet MS"/>
+              </a:rPr>
+              <a:t>TIPP</a:t>
+            </a:r>
+          </a:p>
+        </p:txBody>
+      </p:sp>
+      <p:sp>
+        <p:nvSpPr>
+          <p:cNvPr id="23" name="TextBox 22"/>
           <p:cNvSpPr txBox="1"/>
           <p:nvPr/>
         </p:nvSpPr>
         <p:spPr>
           <a:xfrm>
-            <a:off x="6931152" y="5669280"/>
-            <a:ext cx="4465015" cy="502920"/>
+            <a:off x="7022592" y="5532120"/>
+            <a:ext cx="4373575" cy="960120"/>
           </a:xfrm>
           <a:prstGeom prst="rect">
             <a:avLst/>
@@ -14355,7 +14467,7 @@
                 </a:solidFill>
                 <a:latin typeface="Trebuchet MS"/>
               </a:rPr>
-              <a:t>Eine so geholte Rechnung kommt erst in </a:t>
+              <a:t>Steht dort </a:t>
             </a:r>
             <a:r>
               <a:rPr sz="1350" b="1">
@@ -14364,7 +14476,7 @@
                 </a:solidFill>
                 <a:latin typeface="Trebuchet MS"/>
               </a:rPr>
-              <a:t>Prüfung</a:t>
+              <a:t>„ohne erkennbare Ursprungsrechnung“</a:t>
             </a:r>
             <a:r>
               <a:rPr sz="1350" b="0">
@@ -14373,7 +14485,7 @@
                 </a:solidFill>
                 <a:latin typeface="Trebuchet MS"/>
               </a:rPr>
-              <a:t> — mit dem Grund dabei.</a:t>
+              <a:t> — etwa bei einer Teilgutschrift —, fragen Sie die Buchhaltung, bevor Sie versenden.</a:t>
             </a:r>
           </a:p>
         </p:txBody>
@@ -14605,7 +14717,7 @@
                 </a:solidFill>
                 <a:latin typeface="Trebuchet MS"/>
               </a:rPr>
-              <a:t>XRechnung · Anleitung für den Alltag · Stand 16.09.2026 · Bilder mit Musterdaten</a:t>
+              <a:t>XRechnung · Anleitung für den Alltag · Stand 30.10.2026 · Bilder mit Musterdaten</a:t>
             </a:r>
           </a:p>
         </p:txBody>
@@ -15659,7 +15771,7 @@
                 </a:solidFill>
                 <a:latin typeface="Georgia"/>
               </a:rPr>
-              <a:t>Eine Rechnung ist schon verschickt</a:t>
+              <a:t>Eine bestimmte Rechnung finden</a:t>
             </a:r>
           </a:p>
         </p:txBody>
@@ -15701,7 +15813,7 @@
                 </a:solidFill>
                 <a:latin typeface="Trebuchet MS"/>
               </a:rPr>
-              <a:t>XRechnung · Anleitung für den Alltag · Stand 16.09.2026 · Bilder mit Musterdaten</a:t>
+              <a:t>XRechnung · Anleitung für den Alltag · Stand 30.10.2026 · Bilder mit Musterdaten</a:t>
             </a:r>
           </a:p>
         </p:txBody>
@@ -15757,7 +15869,7 @@
         <p:spPr>
           <a:xfrm>
             <a:off x="621030" y="1398270"/>
-            <a:ext cx="10949635" cy="1833956"/>
+            <a:ext cx="9366474" cy="2415540"/>
           </a:xfrm>
           <a:prstGeom prst="rect">
             <a:avLst/>
@@ -15794,7 +15906,7 @@
       </p:sp>
       <p:pic>
         <p:nvPicPr>
-          <p:cNvPr id="9" name="Picture 8" descr="16_versendet.png"/>
+          <p:cNvPr id="9" name="Picture 8" descr="15_suche.png"/>
           <p:cNvPicPr>
             <a:picLocks noChangeAspect="1"/>
           </p:cNvPicPr>
@@ -15809,7 +15921,7 @@
         <p:spPr>
           <a:xfrm>
             <a:off x="640080" y="1417320"/>
-            <a:ext cx="10911535" cy="1795856"/>
+            <a:ext cx="9328374" cy="2377440"/>
           </a:xfrm>
           <a:prstGeom prst="rect">
             <a:avLst/>
@@ -15824,7 +15936,7 @@
         </p:nvSpPr>
         <p:spPr>
           <a:xfrm>
-            <a:off x="640080" y="3502152"/>
+            <a:off x="640080" y="4050792"/>
             <a:ext cx="329184" cy="329184"/>
           </a:xfrm>
           <a:prstGeom prst="ellipse">
@@ -15884,8 +15996,8 @@
         </p:nvSpPr>
         <p:spPr>
           <a:xfrm>
-            <a:off x="1115568" y="3520440"/>
-            <a:ext cx="5193792" cy="715975"/>
+            <a:off x="1115568" y="4069080"/>
+            <a:ext cx="5193792" cy="477316"/>
           </a:xfrm>
           <a:prstGeom prst="rect">
             <a:avLst/>
@@ -15907,13 +16019,22 @@
               </a:spcAft>
             </a:pPr>
             <a:r>
+              <a:rPr sz="1450" b="1">
+                <a:solidFill>
+                  <a:srgbClr val="2A2824"/>
+                </a:solidFill>
+                <a:latin typeface="Trebuchet MS"/>
+              </a:rPr>
+              <a:t>Rechnungsnummer</a:t>
+            </a:r>
+            <a:r>
               <a:rPr sz="1450" b="0">
                 <a:solidFill>
                   <a:srgbClr val="2A2824"/>
                 </a:solidFill>
                 <a:latin typeface="Trebuchet MS"/>
               </a:rPr>
-              <a:t>Statt „XML erzeugen“ steht dort </a:t>
+              <a:t> in das Suchfeld eintragen und </a:t>
             </a:r>
             <a:r>
               <a:rPr sz="1450" b="1">
@@ -15922,7 +16043,7 @@
                 </a:solidFill>
                 <a:latin typeface="Trebuchet MS"/>
               </a:rPr>
-              <a:t>„Trotzdem neu erzeugen“</a:t>
+              <a:t>„Suchen“</a:t>
             </a:r>
             <a:r>
               <a:rPr sz="1450" b="0">
@@ -15931,25 +16052,7 @@
                 </a:solidFill>
                 <a:latin typeface="Trebuchet MS"/>
               </a:rPr>
-              <a:t>. </a:t>
-            </a:r>
-            <a:r>
-              <a:rPr sz="1450" b="1">
-                <a:solidFill>
-                  <a:srgbClr val="2A2824"/>
-                </a:solidFill>
-                <a:latin typeface="Trebuchet MS"/>
-              </a:rPr>
-              <a:t>Nicht drücken</a:t>
-            </a:r>
-            <a:r>
-              <a:rPr sz="1450" b="0">
-                <a:solidFill>
-                  <a:srgbClr val="2A2824"/>
-                </a:solidFill>
-                <a:latin typeface="Trebuchet MS"/>
-              </a:rPr>
-              <a:t> — außer die IT sagt es.</a:t>
+              <a:t> klicken.</a:t>
             </a:r>
           </a:p>
         </p:txBody>
@@ -15962,7 +16065,7 @@
         </p:nvSpPr>
         <p:spPr>
           <a:xfrm>
-            <a:off x="640080" y="4382719"/>
+            <a:off x="640080" y="4692700"/>
             <a:ext cx="329184" cy="329184"/>
           </a:xfrm>
           <a:prstGeom prst="ellipse">
@@ -16022,8 +16125,8 @@
         </p:nvSpPr>
         <p:spPr>
           <a:xfrm>
-            <a:off x="1115568" y="4401007"/>
-            <a:ext cx="5193792" cy="477316"/>
+            <a:off x="1115568" y="4710988"/>
+            <a:ext cx="5193792" cy="715975"/>
           </a:xfrm>
           <a:prstGeom prst="rect">
             <a:avLst/>
@@ -16045,13 +16148,22 @@
               </a:spcAft>
             </a:pPr>
             <a:r>
+              <a:rPr sz="1450" b="0">
+                <a:solidFill>
+                  <a:srgbClr val="2A2824"/>
+                </a:solidFill>
+                <a:latin typeface="Trebuchet MS"/>
+              </a:rPr>
+              <a:t>Steht die Rechnung noch nicht in der Liste, zeigt das Programm sie unter </a:t>
+            </a:r>
+            <a:r>
               <a:rPr sz="1450" b="1">
                 <a:solidFill>
                   <a:srgbClr val="2A2824"/>
                 </a:solidFill>
                 <a:latin typeface="Trebuchet MS"/>
               </a:rPr>
-              <a:t>„Jetzt versenden“</a:t>
+              <a:t>„In OPERA gefunden“</a:t>
             </a:r>
             <a:r>
               <a:rPr sz="1450" b="0">
@@ -16060,41 +16172,17 @@
                 </a:solidFill>
                 <a:latin typeface="Trebuchet MS"/>
               </a:rPr>
-              <a:t> ist grau. Eine Rechnung geht nie zweimal hinaus.</a:t>
-            </a:r>
-          </a:p>
-        </p:txBody>
-      </p:sp>
-      <p:sp>
-        <p:nvSpPr>
-          <p:cNvPr id="14" name="TextBox 13"/>
-          <p:cNvSpPr txBox="1"/>
-          <p:nvPr/>
-        </p:nvSpPr>
-        <p:spPr>
-          <a:xfrm>
-            <a:off x="1115568" y="5042915"/>
-            <a:ext cx="5193792" cy="715975"/>
-          </a:xfrm>
-          <a:prstGeom prst="rect">
-            <a:avLst/>
-          </a:prstGeom>
-          <a:noFill/>
-        </p:spPr>
-        <p:txBody>
-          <a:bodyPr wrap="square" anchor="t" lIns="0" rIns="0" tIns="0" bIns="0">
-            <a:spAutoFit/>
-          </a:bodyPr>
-          <a:lstStyle/>
-          <a:p>
-            <a:pPr algn="l">
-              <a:lnSpc>
-                <a:spcPct val="120000"/>
-              </a:lnSpc>
-              <a:spcAft>
-                <a:spcPts val="400"/>
-              </a:spcAft>
-            </a:pPr>
+              <a:t>. </a:t>
+            </a:r>
+            <a:r>
+              <a:rPr sz="1450" b="1">
+                <a:solidFill>
+                  <a:srgbClr val="2A2824"/>
+                </a:solidFill>
+                <a:latin typeface="Trebuchet MS"/>
+              </a:rPr>
+              <a:t>„In die Liste holen“</a:t>
+            </a:r>
             <a:r>
               <a:rPr sz="1450" b="0">
                 <a:solidFill>
@@ -16102,75 +16190,21 @@
                 </a:solidFill>
                 <a:latin typeface="Trebuchet MS"/>
               </a:rPr>
-              <a:t>Fragt der Kunde nach: </a:t>
-            </a:r>
-            <a:r>
-              <a:rPr sz="1450" b="1">
-                <a:solidFill>
-                  <a:srgbClr val="2A2824"/>
-                </a:solidFill>
-                <a:latin typeface="Trebuchet MS"/>
-              </a:rPr>
-              <a:t>„XML ansehen“</a:t>
-            </a:r>
-            <a:r>
-              <a:rPr sz="1450" b="0">
-                <a:solidFill>
-                  <a:srgbClr val="2A2824"/>
-                </a:solidFill>
-                <a:latin typeface="Trebuchet MS"/>
-              </a:rPr>
-              <a:t> zeigt genau die Datei, die er bekommen hat. Im Verlauf unten steht, </a:t>
-            </a:r>
-            <a:r>
-              <a:rPr sz="1450" b="1">
-                <a:solidFill>
-                  <a:srgbClr val="2A2824"/>
-                </a:solidFill>
-                <a:latin typeface="Trebuchet MS"/>
-              </a:rPr>
-              <a:t>an welche Adresse</a:t>
-            </a:r>
-            <a:r>
-              <a:rPr sz="1450" b="0">
-                <a:solidFill>
-                  <a:srgbClr val="2A2824"/>
-                </a:solidFill>
-                <a:latin typeface="Trebuchet MS"/>
-              </a:rPr>
-              <a:t> und </a:t>
-            </a:r>
-            <a:r>
-              <a:rPr sz="1450" b="1">
-                <a:solidFill>
-                  <a:srgbClr val="2A2824"/>
-                </a:solidFill>
-                <a:latin typeface="Trebuchet MS"/>
-              </a:rPr>
-              <a:t>wann</a:t>
-            </a:r>
-            <a:r>
-              <a:rPr sz="1450" b="0">
-                <a:solidFill>
-                  <a:srgbClr val="2A2824"/>
-                </a:solidFill>
-                <a:latin typeface="Trebuchet MS"/>
-              </a:rPr>
-              <a:t>.</a:t>
-            </a:r>
-          </a:p>
-        </p:txBody>
-      </p:sp>
-      <p:sp>
-        <p:nvSpPr>
-          <p:cNvPr id="15" name="Rounded Rectangle 14"/>
+              <a:t> nimmt sie auf.</a:t>
+            </a:r>
+          </a:p>
+        </p:txBody>
+      </p:sp>
+      <p:sp>
+        <p:nvSpPr>
+          <p:cNvPr id="14" name="Rounded Rectangle 13"/>
           <p:cNvSpPr/>
           <p:nvPr/>
         </p:nvSpPr>
         <p:spPr>
           <a:xfrm>
-            <a:off x="6675120" y="3474720"/>
-            <a:ext cx="4876495" cy="1371600"/>
+            <a:off x="6675120" y="4023360"/>
+            <a:ext cx="4876495" cy="1143000"/>
           </a:xfrm>
           <a:prstGeom prst="roundRect">
             <a:avLst>
@@ -16209,14 +16243,14 @@
       </p:sp>
       <p:sp>
         <p:nvSpPr>
-          <p:cNvPr id="16" name="Rectangle 15"/>
+          <p:cNvPr id="15" name="Rectangle 14"/>
           <p:cNvSpPr/>
           <p:nvPr/>
         </p:nvSpPr>
         <p:spPr>
           <a:xfrm>
-            <a:off x="6675120" y="3474720"/>
-            <a:ext cx="82296" cy="1371600"/>
+            <a:off x="6675120" y="4023360"/>
+            <a:ext cx="82296" cy="1143000"/>
           </a:xfrm>
           <a:prstGeom prst="rect">
             <a:avLst/>
@@ -16253,13 +16287,13 @@
       </p:sp>
       <p:sp>
         <p:nvSpPr>
-          <p:cNvPr id="17" name="TextBox 16"/>
+          <p:cNvPr id="16" name="TextBox 15"/>
           <p:cNvSpPr txBox="1"/>
           <p:nvPr/>
         </p:nvSpPr>
         <p:spPr>
           <a:xfrm>
-            <a:off x="6931152" y="3584448"/>
+            <a:off x="6931152" y="4133088"/>
             <a:ext cx="4510735" cy="274320"/>
           </a:xfrm>
           <a:prstGeom prst="rect">
@@ -16295,14 +16329,14 @@
       </p:sp>
       <p:sp>
         <p:nvSpPr>
-          <p:cNvPr id="18" name="TextBox 17"/>
+          <p:cNvPr id="17" name="TextBox 16"/>
           <p:cNvSpPr txBox="1"/>
           <p:nvPr/>
         </p:nvSpPr>
         <p:spPr>
           <a:xfrm>
-            <a:off x="6931152" y="3840480"/>
-            <a:ext cx="4465015" cy="960120"/>
+            <a:off x="6931152" y="4389120"/>
+            <a:ext cx="4465015" cy="731520"/>
           </a:xfrm>
           <a:prstGeom prst="rect">
             <a:avLst/>
@@ -16330,7 +16364,7 @@
                 </a:solidFill>
                 <a:latin typeface="Trebuchet MS"/>
               </a:rPr>
-              <a:t>Die Tabelle </a:t>
+              <a:t>In OPERA sucht das Programm </a:t>
             </a:r>
             <a:r>
               <a:rPr sz="1350" b="1">
@@ -16339,7 +16373,7 @@
                 </a:solidFill>
                 <a:latin typeface="Trebuchet MS"/>
               </a:rPr>
-              <a:t>„Positionen“</a:t>
+              <a:t>nur nach Nummern</a:t>
             </a:r>
             <a:r>
               <a:rPr sz="1350" b="0">
@@ -16348,7 +16382,181 @@
                 </a:solidFill>
                 <a:latin typeface="Trebuchet MS"/>
               </a:rPr>
-              <a:t> einer versendeten Rechnung wird neu berechnet und kann anders aussehen als die verschickte Datei. Maßgeblich ist, was </a:t>
+              <a:t>, nicht nach Namen. Namen findet es in der Liste.</a:t>
+            </a:r>
+          </a:p>
+        </p:txBody>
+      </p:sp>
+      <p:sp>
+        <p:nvSpPr>
+          <p:cNvPr id="18" name="Rounded Rectangle 17"/>
+          <p:cNvSpPr/>
+          <p:nvPr/>
+        </p:nvSpPr>
+        <p:spPr>
+          <a:xfrm>
+            <a:off x="6675120" y="5303520"/>
+            <a:ext cx="4876495" cy="914400"/>
+          </a:xfrm>
+          <a:prstGeom prst="roundRect">
+            <a:avLst>
+              <a:gd name="adj" fmla="val 8000"/>
+            </a:avLst>
+          </a:prstGeom>
+          <a:solidFill>
+            <a:srgbClr val="FBEFDC"/>
+          </a:solidFill>
+          <a:ln>
+            <a:noFill/>
+          </a:ln>
+          <a:effectLst/>
+        </p:spPr>
+        <p:style>
+          <a:lnRef idx="1">
+            <a:schemeClr val="accent1"/>
+          </a:lnRef>
+          <a:fillRef idx="3">
+            <a:schemeClr val="accent1"/>
+          </a:fillRef>
+          <a:effectRef idx="2">
+            <a:schemeClr val="accent1"/>
+          </a:effectRef>
+          <a:fontRef idx="minor">
+            <a:schemeClr val="lt1"/>
+          </a:fontRef>
+        </p:style>
+        <p:txBody>
+          <a:bodyPr rtlCol="0" anchor="ctr"/>
+          <a:lstStyle/>
+          <a:p>
+            <a:pPr algn="ctr"/>
+          </a:p>
+        </p:txBody>
+      </p:sp>
+      <p:sp>
+        <p:nvSpPr>
+          <p:cNvPr id="19" name="Rectangle 18"/>
+          <p:cNvSpPr/>
+          <p:nvPr/>
+        </p:nvSpPr>
+        <p:spPr>
+          <a:xfrm>
+            <a:off x="6675120" y="5303520"/>
+            <a:ext cx="82296" cy="914400"/>
+          </a:xfrm>
+          <a:prstGeom prst="rect">
+            <a:avLst/>
+          </a:prstGeom>
+          <a:solidFill>
+            <a:srgbClr val="8A4B12"/>
+          </a:solidFill>
+          <a:ln>
+            <a:noFill/>
+          </a:ln>
+          <a:effectLst/>
+        </p:spPr>
+        <p:style>
+          <a:lnRef idx="1">
+            <a:schemeClr val="accent1"/>
+          </a:lnRef>
+          <a:fillRef idx="3">
+            <a:schemeClr val="accent1"/>
+          </a:fillRef>
+          <a:effectRef idx="2">
+            <a:schemeClr val="accent1"/>
+          </a:effectRef>
+          <a:fontRef idx="minor">
+            <a:schemeClr val="lt1"/>
+          </a:fontRef>
+        </p:style>
+        <p:txBody>
+          <a:bodyPr rtlCol="0" anchor="ctr"/>
+          <a:lstStyle/>
+          <a:p>
+            <a:pPr algn="ctr"/>
+          </a:p>
+        </p:txBody>
+      </p:sp>
+      <p:sp>
+        <p:nvSpPr>
+          <p:cNvPr id="20" name="TextBox 19"/>
+          <p:cNvSpPr txBox="1"/>
+          <p:nvPr/>
+        </p:nvSpPr>
+        <p:spPr>
+          <a:xfrm>
+            <a:off x="6931152" y="5413248"/>
+            <a:ext cx="4510735" cy="274320"/>
+          </a:xfrm>
+          <a:prstGeom prst="rect">
+            <a:avLst/>
+          </a:prstGeom>
+          <a:noFill/>
+        </p:spPr>
+        <p:txBody>
+          <a:bodyPr wrap="square" anchor="t" lIns="0" rIns="0" tIns="0" bIns="0">
+            <a:spAutoFit/>
+          </a:bodyPr>
+          <a:lstStyle/>
+          <a:p>
+            <a:pPr algn="l">
+              <a:lnSpc>
+                <a:spcPct val="120000"/>
+              </a:lnSpc>
+              <a:spcAft>
+                <a:spcPts val="400"/>
+              </a:spcAft>
+            </a:pPr>
+            <a:r>
+              <a:rPr sz="1100" b="1">
+                <a:solidFill>
+                  <a:srgbClr val="8A4B12"/>
+                </a:solidFill>
+                <a:latin typeface="Trebuchet MS"/>
+              </a:rPr>
+              <a:t>HINWEIS</a:t>
+            </a:r>
+          </a:p>
+        </p:txBody>
+      </p:sp>
+      <p:sp>
+        <p:nvSpPr>
+          <p:cNvPr id="21" name="TextBox 20"/>
+          <p:cNvSpPr txBox="1"/>
+          <p:nvPr/>
+        </p:nvSpPr>
+        <p:spPr>
+          <a:xfrm>
+            <a:off x="6931152" y="5669280"/>
+            <a:ext cx="4465015" cy="502920"/>
+          </a:xfrm>
+          <a:prstGeom prst="rect">
+            <a:avLst/>
+          </a:prstGeom>
+          <a:noFill/>
+        </p:spPr>
+        <p:txBody>
+          <a:bodyPr wrap="square" anchor="t" lIns="0" rIns="0" tIns="0" bIns="0">
+            <a:spAutoFit/>
+          </a:bodyPr>
+          <a:lstStyle/>
+          <a:p>
+            <a:pPr algn="l">
+              <a:lnSpc>
+                <a:spcPct val="120000"/>
+              </a:lnSpc>
+              <a:spcAft>
+                <a:spcPts val="200"/>
+              </a:spcAft>
+            </a:pPr>
+            <a:r>
+              <a:rPr sz="1350" b="0">
+                <a:solidFill>
+                  <a:srgbClr val="2A2824"/>
+                </a:solidFill>
+                <a:latin typeface="Trebuchet MS"/>
+              </a:rPr>
+              <a:t>Eine so geholte Rechnung kommt erst in </a:t>
             </a:r>
             <a:r>
               <a:rPr sz="1350" b="1">
@@ -16357,7 +16565,7 @@
                 </a:solidFill>
                 <a:latin typeface="Trebuchet MS"/>
               </a:rPr>
-              <a:t>„XML ansehen“</a:t>
+              <a:t>Prüfung</a:t>
             </a:r>
             <a:r>
               <a:rPr sz="1350" b="0">
@@ -16366,7 +16574,7 @@
                 </a:solidFill>
                 <a:latin typeface="Trebuchet MS"/>
               </a:rPr>
-              <a:t> zeigt.</a:t>
+              <a:t> — mit dem Grund dabei.</a:t>
             </a:r>
           </a:p>
         </p:txBody>
@@ -16556,7 +16764,7 @@
                 </a:solidFill>
                 <a:latin typeface="Georgia"/>
               </a:rPr>
-              <a:t>Zurücklegen und Nachvollziehen</a:t>
+              <a:t>Eine Rechnung ist schon verschickt</a:t>
             </a:r>
           </a:p>
         </p:txBody>
@@ -16598,7 +16806,7 @@
                 </a:solidFill>
                 <a:latin typeface="Trebuchet MS"/>
               </a:rPr>
-              <a:t>XRechnung · Anleitung für den Alltag · Stand 16.09.2026 · Bilder mit Musterdaten</a:t>
+              <a:t>XRechnung · Anleitung für den Alltag · Stand 30.10.2026 · Bilder mit Musterdaten</a:t>
             </a:r>
           </a:p>
         </p:txBody>
@@ -16647,369 +16855,14 @@
       </p:sp>
       <p:sp>
         <p:nvSpPr>
-          <p:cNvPr id="8" name="TextBox 7"/>
-          <p:cNvSpPr txBox="1"/>
-          <p:nvPr/>
-        </p:nvSpPr>
-        <p:spPr>
-          <a:xfrm>
-            <a:off x="640080" y="1417320"/>
-            <a:ext cx="5120640" cy="365760"/>
-          </a:xfrm>
-          <a:prstGeom prst="rect">
-            <a:avLst/>
-          </a:prstGeom>
-          <a:noFill/>
-        </p:spPr>
-        <p:txBody>
-          <a:bodyPr wrap="square" anchor="t" lIns="0" rIns="0" tIns="0" bIns="0">
-            <a:spAutoFit/>
-          </a:bodyPr>
-          <a:lstStyle/>
-          <a:p>
-            <a:pPr algn="l">
-              <a:lnSpc>
-                <a:spcPct val="120000"/>
-              </a:lnSpc>
-              <a:spcAft>
-                <a:spcPts val="400"/>
-              </a:spcAft>
-            </a:pPr>
-            <a:r>
-              <a:rPr sz="2000" b="0">
-                <a:solidFill>
-                  <a:srgbClr val="1A1A1A"/>
-                </a:solidFill>
-                <a:latin typeface="Georgia"/>
-              </a:rPr>
-              <a:t>Zurücklegen</a:t>
-            </a:r>
-          </a:p>
-        </p:txBody>
-      </p:sp>
-      <p:sp>
-        <p:nvSpPr>
-          <p:cNvPr id="9" name="TextBox 8"/>
-          <p:cNvSpPr txBox="1"/>
-          <p:nvPr/>
-        </p:nvSpPr>
-        <p:spPr>
-          <a:xfrm>
-            <a:off x="640080" y="1874520"/>
-            <a:ext cx="5120640" cy="1463040"/>
-          </a:xfrm>
-          <a:prstGeom prst="rect">
-            <a:avLst/>
-          </a:prstGeom>
-          <a:noFill/>
-        </p:spPr>
-        <p:txBody>
-          <a:bodyPr wrap="square" anchor="t" lIns="0" rIns="0" tIns="0" bIns="0">
-            <a:spAutoFit/>
-          </a:bodyPr>
-          <a:lstStyle/>
-          <a:p>
-            <a:pPr algn="l">
-              <a:lnSpc>
-                <a:spcPct val="120000"/>
-              </a:lnSpc>
-              <a:spcAft>
-                <a:spcPts val="400"/>
-              </a:spcAft>
-            </a:pPr>
-            <a:r>
-              <a:rPr sz="1450" b="0">
-                <a:solidFill>
-                  <a:srgbClr val="2A2824"/>
-                </a:solidFill>
-                <a:latin typeface="Trebuchet MS"/>
-              </a:rPr>
-              <a:t>Nimmt eine Rechnung aus dem Lauf. Sie wird </a:t>
-            </a:r>
-            <a:r>
-              <a:rPr sz="1450" b="1">
-                <a:solidFill>
-                  <a:srgbClr val="2A2824"/>
-                </a:solidFill>
-                <a:latin typeface="Trebuchet MS"/>
-              </a:rPr>
-              <a:t>nicht</a:t>
-            </a:r>
-            <a:r>
-              <a:rPr sz="1450" b="0">
-                <a:solidFill>
-                  <a:srgbClr val="2A2824"/>
-                </a:solidFill>
-                <a:latin typeface="Trebuchet MS"/>
-              </a:rPr>
-              <a:t> verschickt, weder von Hand noch automatisch.</a:t>
-            </a:r>
-          </a:p>
-          <a:p>
-            <a:pPr algn="l">
-              <a:lnSpc>
-                <a:spcPct val="120000"/>
-              </a:lnSpc>
-              <a:spcAft>
-                <a:spcPts val="400"/>
-              </a:spcAft>
-            </a:pPr>
-            <a:r>
-              <a:rPr sz="1450" b="0">
-                <a:solidFill>
-                  <a:srgbClr val="2A2824"/>
-                </a:solidFill>
-                <a:latin typeface="Trebuchet MS"/>
-              </a:rPr>
-              <a:t>Sinnvoll, wenn der Gast selbst bezahlt hat oder die Rechnung gar keine Firmenrechnung ist.</a:t>
-            </a:r>
-          </a:p>
-        </p:txBody>
-      </p:sp>
-      <p:sp>
-        <p:nvSpPr>
-          <p:cNvPr id="10" name="Rounded Rectangle 9"/>
+          <p:cNvPr id="8" name="Rectangle 7"/>
           <p:cNvSpPr/>
           <p:nvPr/>
         </p:nvSpPr>
         <p:spPr>
           <a:xfrm>
-            <a:off x="640080" y="3337560"/>
-            <a:ext cx="5120640" cy="1143000"/>
-          </a:xfrm>
-          <a:prstGeom prst="roundRect">
-            <a:avLst>
-              <a:gd name="adj" fmla="val 8000"/>
-            </a:avLst>
-          </a:prstGeom>
-          <a:solidFill>
-            <a:srgbClr val="F8E1DE"/>
-          </a:solidFill>
-          <a:ln>
-            <a:noFill/>
-          </a:ln>
-          <a:effectLst/>
-        </p:spPr>
-        <p:style>
-          <a:lnRef idx="1">
-            <a:schemeClr val="accent1"/>
-          </a:lnRef>
-          <a:fillRef idx="3">
-            <a:schemeClr val="accent1"/>
-          </a:fillRef>
-          <a:effectRef idx="2">
-            <a:schemeClr val="accent1"/>
-          </a:effectRef>
-          <a:fontRef idx="minor">
-            <a:schemeClr val="lt1"/>
-          </a:fontRef>
-        </p:style>
-        <p:txBody>
-          <a:bodyPr rtlCol="0" anchor="ctr"/>
-          <a:lstStyle/>
-          <a:p>
-            <a:pPr algn="ctr"/>
-          </a:p>
-        </p:txBody>
-      </p:sp>
-      <p:sp>
-        <p:nvSpPr>
-          <p:cNvPr id="11" name="Rectangle 10"/>
-          <p:cNvSpPr/>
-          <p:nvPr/>
-        </p:nvSpPr>
-        <p:spPr>
-          <a:xfrm>
-            <a:off x="640080" y="3337560"/>
-            <a:ext cx="82296" cy="1143000"/>
-          </a:xfrm>
-          <a:prstGeom prst="rect">
-            <a:avLst/>
-          </a:prstGeom>
-          <a:solidFill>
-            <a:srgbClr val="A02020"/>
-          </a:solidFill>
-          <a:ln>
-            <a:noFill/>
-          </a:ln>
-          <a:effectLst/>
-        </p:spPr>
-        <p:style>
-          <a:lnRef idx="1">
-            <a:schemeClr val="accent1"/>
-          </a:lnRef>
-          <a:fillRef idx="3">
-            <a:schemeClr val="accent1"/>
-          </a:fillRef>
-          <a:effectRef idx="2">
-            <a:schemeClr val="accent1"/>
-          </a:effectRef>
-          <a:fontRef idx="minor">
-            <a:schemeClr val="lt1"/>
-          </a:fontRef>
-        </p:style>
-        <p:txBody>
-          <a:bodyPr rtlCol="0" anchor="ctr"/>
-          <a:lstStyle/>
-          <a:p>
-            <a:pPr algn="ctr"/>
-          </a:p>
-        </p:txBody>
-      </p:sp>
-      <p:sp>
-        <p:nvSpPr>
-          <p:cNvPr id="12" name="TextBox 11"/>
-          <p:cNvSpPr txBox="1"/>
-          <p:nvPr/>
-        </p:nvSpPr>
-        <p:spPr>
-          <a:xfrm>
-            <a:off x="896112" y="3447288"/>
-            <a:ext cx="4754880" cy="274320"/>
-          </a:xfrm>
-          <a:prstGeom prst="rect">
-            <a:avLst/>
-          </a:prstGeom>
-          <a:noFill/>
-        </p:spPr>
-        <p:txBody>
-          <a:bodyPr wrap="square" anchor="t" lIns="0" rIns="0" tIns="0" bIns="0">
-            <a:spAutoFit/>
-          </a:bodyPr>
-          <a:lstStyle/>
-          <a:p>
-            <a:pPr algn="l">
-              <a:lnSpc>
-                <a:spcPct val="120000"/>
-              </a:lnSpc>
-              <a:spcAft>
-                <a:spcPts val="400"/>
-              </a:spcAft>
-            </a:pPr>
-            <a:r>
-              <a:rPr sz="1100" b="1">
-                <a:solidFill>
-                  <a:srgbClr val="A02020"/>
-                </a:solidFill>
-                <a:latin typeface="Trebuchet MS"/>
-              </a:rPr>
-              <a:t>ACHTUNG</a:t>
-            </a:r>
-          </a:p>
-        </p:txBody>
-      </p:sp>
-      <p:sp>
-        <p:nvSpPr>
-          <p:cNvPr id="13" name="TextBox 12"/>
-          <p:cNvSpPr txBox="1"/>
-          <p:nvPr/>
-        </p:nvSpPr>
-        <p:spPr>
-          <a:xfrm>
-            <a:off x="896112" y="3703320"/>
-            <a:ext cx="4709160" cy="731520"/>
-          </a:xfrm>
-          <a:prstGeom prst="rect">
-            <a:avLst/>
-          </a:prstGeom>
-          <a:noFill/>
-        </p:spPr>
-        <p:txBody>
-          <a:bodyPr wrap="square" anchor="t" lIns="0" rIns="0" tIns="0" bIns="0">
-            <a:spAutoFit/>
-          </a:bodyPr>
-          <a:lstStyle/>
-          <a:p>
-            <a:pPr algn="l">
-              <a:lnSpc>
-                <a:spcPct val="120000"/>
-              </a:lnSpc>
-              <a:spcAft>
-                <a:spcPts val="200"/>
-              </a:spcAft>
-            </a:pPr>
-            <a:r>
-              <a:rPr sz="1350" b="0">
-                <a:solidFill>
-                  <a:srgbClr val="2A2824"/>
-                </a:solidFill>
-                <a:latin typeface="Trebuchet MS"/>
-              </a:rPr>
-              <a:t>Aus Versehen zurückgelegt? </a:t>
-            </a:r>
-            <a:r>
-              <a:rPr sz="1350" b="1">
-                <a:solidFill>
-                  <a:srgbClr val="2A2824"/>
-                </a:solidFill>
-                <a:latin typeface="Trebuchet MS"/>
-              </a:rPr>
-              <a:t>„Wieder aufnehmen“</a:t>
-            </a:r>
-            <a:r>
-              <a:rPr sz="1350" b="0">
-                <a:solidFill>
-                  <a:srgbClr val="2A2824"/>
-                </a:solidFill>
-                <a:latin typeface="Trebuchet MS"/>
-              </a:rPr>
-              <a:t> holt die Rechnung zurück — sie landet dann in der Prüfung, nicht im Versand.</a:t>
-            </a:r>
-          </a:p>
-        </p:txBody>
-      </p:sp>
-      <p:sp>
-        <p:nvSpPr>
-          <p:cNvPr id="14" name="TextBox 13"/>
-          <p:cNvSpPr txBox="1"/>
-          <p:nvPr/>
-        </p:nvSpPr>
-        <p:spPr>
-          <a:xfrm>
-            <a:off x="6126480" y="1417320"/>
-            <a:ext cx="5425135" cy="365760"/>
-          </a:xfrm>
-          <a:prstGeom prst="rect">
-            <a:avLst/>
-          </a:prstGeom>
-          <a:noFill/>
-        </p:spPr>
-        <p:txBody>
-          <a:bodyPr wrap="square" anchor="t" lIns="0" rIns="0" tIns="0" bIns="0">
-            <a:spAutoFit/>
-          </a:bodyPr>
-          <a:lstStyle/>
-          <a:p>
-            <a:pPr algn="l">
-              <a:lnSpc>
-                <a:spcPct val="120000"/>
-              </a:lnSpc>
-              <a:spcAft>
-                <a:spcPts val="400"/>
-              </a:spcAft>
-            </a:pPr>
-            <a:r>
-              <a:rPr sz="2000" b="0">
-                <a:solidFill>
-                  <a:srgbClr val="1A1A1A"/>
-                </a:solidFill>
-                <a:latin typeface="Georgia"/>
-              </a:rPr>
-              <a:t>Wer hat was gemacht?</a:t>
-            </a:r>
-          </a:p>
-        </p:txBody>
-      </p:sp>
-      <p:sp>
-        <p:nvSpPr>
-          <p:cNvPr id="15" name="Rectangle 14"/>
-          <p:cNvSpPr/>
-          <p:nvPr/>
-        </p:nvSpPr>
-        <p:spPr>
-          <a:xfrm>
-            <a:off x="6107430" y="1901190"/>
-            <a:ext cx="5463235" cy="1620431"/>
+            <a:off x="621030" y="1398270"/>
+            <a:ext cx="10949635" cy="1841534"/>
           </a:xfrm>
           <a:prstGeom prst="rect">
             <a:avLst/>
@@ -17046,7 +16899,7 @@
       </p:sp>
       <p:pic>
         <p:nvPicPr>
-          <p:cNvPr id="16" name="Picture 15" descr="17_protokoll.png"/>
+          <p:cNvPr id="9" name="Picture 8" descr="16_versendet.png"/>
           <p:cNvPicPr>
             <a:picLocks noChangeAspect="1"/>
           </p:cNvPicPr>
@@ -17060,8 +16913,8 @@
         </p:blipFill>
         <p:spPr>
           <a:xfrm>
-            <a:off x="6126480" y="1920240"/>
-            <a:ext cx="5425135" cy="1582331"/>
+            <a:off x="640080" y="1417320"/>
+            <a:ext cx="10911535" cy="1803434"/>
           </a:xfrm>
           <a:prstGeom prst="rect">
             <a:avLst/>
@@ -17070,14 +16923,74 @@
       </p:pic>
       <p:sp>
         <p:nvSpPr>
-          <p:cNvPr id="17" name="TextBox 16"/>
+          <p:cNvPr id="10" name="Oval 9"/>
+          <p:cNvSpPr/>
+          <p:nvPr/>
+        </p:nvSpPr>
+        <p:spPr>
+          <a:xfrm>
+            <a:off x="640080" y="3502152"/>
+            <a:ext cx="329184" cy="329184"/>
+          </a:xfrm>
+          <a:prstGeom prst="ellipse">
+            <a:avLst/>
+          </a:prstGeom>
+          <a:solidFill>
+            <a:srgbClr val="D0021B"/>
+          </a:solidFill>
+          <a:ln>
+            <a:noFill/>
+          </a:ln>
+          <a:effectLst/>
+        </p:spPr>
+        <p:style>
+          <a:lnRef idx="1">
+            <a:schemeClr val="accent1"/>
+          </a:lnRef>
+          <a:fillRef idx="3">
+            <a:schemeClr val="accent1"/>
+          </a:fillRef>
+          <a:effectRef idx="2">
+            <a:schemeClr val="accent1"/>
+          </a:effectRef>
+          <a:fontRef idx="minor">
+            <a:schemeClr val="lt1"/>
+          </a:fontRef>
+        </p:style>
+        <p:txBody>
+          <a:bodyPr rtlCol="0" anchor="ctr" lIns="0" rIns="0" tIns="0" bIns="0"/>
+          <a:lstStyle/>
+          <a:p>
+            <a:pPr algn="ctr">
+              <a:lnSpc>
+                <a:spcPct val="120000"/>
+              </a:lnSpc>
+              <a:spcAft>
+                <a:spcPts val="0"/>
+              </a:spcAft>
+            </a:pPr>
+            <a:r>
+              <a:rPr sz="1400" b="1">
+                <a:solidFill>
+                  <a:srgbClr val="FFFFFF"/>
+                </a:solidFill>
+                <a:latin typeface="Trebuchet MS"/>
+              </a:rPr>
+              <a:t>1</a:t>
+            </a:r>
+          </a:p>
+        </p:txBody>
+      </p:sp>
+      <p:sp>
+        <p:nvSpPr>
+          <p:cNvPr id="11" name="TextBox 10"/>
           <p:cNvSpPr txBox="1"/>
           <p:nvPr/>
         </p:nvSpPr>
         <p:spPr>
           <a:xfrm>
-            <a:off x="6126480" y="4480560"/>
-            <a:ext cx="5425135" cy="1097280"/>
+            <a:off x="1115568" y="3520440"/>
+            <a:ext cx="5193792" cy="715975"/>
           </a:xfrm>
           <a:prstGeom prst="rect">
             <a:avLst/>
@@ -17099,49 +17012,466 @@
               </a:spcAft>
             </a:pPr>
             <a:r>
-              <a:rPr sz="1400" b="0">
-                <a:solidFill>
-                  <a:srgbClr val="2A2824"/>
-                </a:solidFill>
-                <a:latin typeface="Trebuchet MS"/>
-              </a:rPr>
-              <a:t>Oben im Menü unter </a:t>
-            </a:r>
+              <a:rPr sz="1450" b="0">
+                <a:solidFill>
+                  <a:srgbClr val="2A2824"/>
+                </a:solidFill>
+                <a:latin typeface="Trebuchet MS"/>
+              </a:rPr>
+              <a:t>Statt „XML erzeugen“ steht dort </a:t>
+            </a:r>
+            <a:r>
+              <a:rPr sz="1450" b="1">
+                <a:solidFill>
+                  <a:srgbClr val="2A2824"/>
+                </a:solidFill>
+                <a:latin typeface="Trebuchet MS"/>
+              </a:rPr>
+              <a:t>„Trotzdem neu erzeugen“</a:t>
+            </a:r>
+            <a:r>
+              <a:rPr sz="1450" b="0">
+                <a:solidFill>
+                  <a:srgbClr val="2A2824"/>
+                </a:solidFill>
+                <a:latin typeface="Trebuchet MS"/>
+              </a:rPr>
+              <a:t>. </a:t>
+            </a:r>
+            <a:r>
+              <a:rPr sz="1450" b="1">
+                <a:solidFill>
+                  <a:srgbClr val="2A2824"/>
+                </a:solidFill>
+                <a:latin typeface="Trebuchet MS"/>
+              </a:rPr>
+              <a:t>Nicht drücken</a:t>
+            </a:r>
+            <a:r>
+              <a:rPr sz="1450" b="0">
+                <a:solidFill>
+                  <a:srgbClr val="2A2824"/>
+                </a:solidFill>
+                <a:latin typeface="Trebuchet MS"/>
+              </a:rPr>
+              <a:t> — außer die IT sagt es.</a:t>
+            </a:r>
+          </a:p>
+        </p:txBody>
+      </p:sp>
+      <p:sp>
+        <p:nvSpPr>
+          <p:cNvPr id="12" name="Oval 11"/>
+          <p:cNvSpPr/>
+          <p:nvPr/>
+        </p:nvSpPr>
+        <p:spPr>
+          <a:xfrm>
+            <a:off x="640080" y="4382719"/>
+            <a:ext cx="329184" cy="329184"/>
+          </a:xfrm>
+          <a:prstGeom prst="ellipse">
+            <a:avLst/>
+          </a:prstGeom>
+          <a:solidFill>
+            <a:srgbClr val="D0021B"/>
+          </a:solidFill>
+          <a:ln>
+            <a:noFill/>
+          </a:ln>
+          <a:effectLst/>
+        </p:spPr>
+        <p:style>
+          <a:lnRef idx="1">
+            <a:schemeClr val="accent1"/>
+          </a:lnRef>
+          <a:fillRef idx="3">
+            <a:schemeClr val="accent1"/>
+          </a:fillRef>
+          <a:effectRef idx="2">
+            <a:schemeClr val="accent1"/>
+          </a:effectRef>
+          <a:fontRef idx="minor">
+            <a:schemeClr val="lt1"/>
+          </a:fontRef>
+        </p:style>
+        <p:txBody>
+          <a:bodyPr rtlCol="0" anchor="ctr" lIns="0" rIns="0" tIns="0" bIns="0"/>
+          <a:lstStyle/>
+          <a:p>
+            <a:pPr algn="ctr">
+              <a:lnSpc>
+                <a:spcPct val="120000"/>
+              </a:lnSpc>
+              <a:spcAft>
+                <a:spcPts val="0"/>
+              </a:spcAft>
+            </a:pPr>
             <a:r>
               <a:rPr sz="1400" b="1">
                 <a:solidFill>
-                  <a:srgbClr val="2A2824"/>
-                </a:solidFill>
-                <a:latin typeface="Trebuchet MS"/>
-              </a:rPr>
-              <a:t>„Protokoll“</a:t>
-            </a:r>
-            <a:r>
-              <a:rPr sz="1400" b="0">
-                <a:solidFill>
-                  <a:srgbClr val="2A2824"/>
-                </a:solidFill>
-                <a:latin typeface="Trebuchet MS"/>
-              </a:rPr>
-              <a:t> (1) steht jede Aktion mit Zeit und Benutzer — auch, an welche Adresse verschickt wurde. In jeder Rechnung steht unten derselbe </a:t>
-            </a:r>
-            <a:r>
-              <a:rPr sz="1400" b="1">
-                <a:solidFill>
-                  <a:srgbClr val="2A2824"/>
-                </a:solidFill>
-                <a:latin typeface="Trebuchet MS"/>
-              </a:rPr>
-              <a:t>Verlauf</a:t>
-            </a:r>
-            <a:r>
-              <a:rPr sz="1400" b="0">
-                <a:solidFill>
-                  <a:srgbClr val="2A2824"/>
-                </a:solidFill>
-                <a:latin typeface="Trebuchet MS"/>
-              </a:rPr>
-              <a:t> nur für diese Rechnung.</a:t>
+                  <a:srgbClr val="FFFFFF"/>
+                </a:solidFill>
+                <a:latin typeface="Trebuchet MS"/>
+              </a:rPr>
+              <a:t>2</a:t>
+            </a:r>
+          </a:p>
+        </p:txBody>
+      </p:sp>
+      <p:sp>
+        <p:nvSpPr>
+          <p:cNvPr id="13" name="TextBox 12"/>
+          <p:cNvSpPr txBox="1"/>
+          <p:nvPr/>
+        </p:nvSpPr>
+        <p:spPr>
+          <a:xfrm>
+            <a:off x="1115568" y="4401007"/>
+            <a:ext cx="5193792" cy="477316"/>
+          </a:xfrm>
+          <a:prstGeom prst="rect">
+            <a:avLst/>
+          </a:prstGeom>
+          <a:noFill/>
+        </p:spPr>
+        <p:txBody>
+          <a:bodyPr wrap="square" anchor="t" lIns="0" rIns="0" tIns="0" bIns="0">
+            <a:spAutoFit/>
+          </a:bodyPr>
+          <a:lstStyle/>
+          <a:p>
+            <a:pPr algn="l">
+              <a:lnSpc>
+                <a:spcPct val="120000"/>
+              </a:lnSpc>
+              <a:spcAft>
+                <a:spcPts val="400"/>
+              </a:spcAft>
+            </a:pPr>
+            <a:r>
+              <a:rPr sz="1450" b="1">
+                <a:solidFill>
+                  <a:srgbClr val="2A2824"/>
+                </a:solidFill>
+                <a:latin typeface="Trebuchet MS"/>
+              </a:rPr>
+              <a:t>„Jetzt versenden“</a:t>
+            </a:r>
+            <a:r>
+              <a:rPr sz="1450" b="0">
+                <a:solidFill>
+                  <a:srgbClr val="2A2824"/>
+                </a:solidFill>
+                <a:latin typeface="Trebuchet MS"/>
+              </a:rPr>
+              <a:t> ist grau. Eine Rechnung geht nie zweimal hinaus.</a:t>
+            </a:r>
+          </a:p>
+        </p:txBody>
+      </p:sp>
+      <p:sp>
+        <p:nvSpPr>
+          <p:cNvPr id="14" name="TextBox 13"/>
+          <p:cNvSpPr txBox="1"/>
+          <p:nvPr/>
+        </p:nvSpPr>
+        <p:spPr>
+          <a:xfrm>
+            <a:off x="1115568" y="5042915"/>
+            <a:ext cx="5193792" cy="715975"/>
+          </a:xfrm>
+          <a:prstGeom prst="rect">
+            <a:avLst/>
+          </a:prstGeom>
+          <a:noFill/>
+        </p:spPr>
+        <p:txBody>
+          <a:bodyPr wrap="square" anchor="t" lIns="0" rIns="0" tIns="0" bIns="0">
+            <a:spAutoFit/>
+          </a:bodyPr>
+          <a:lstStyle/>
+          <a:p>
+            <a:pPr algn="l">
+              <a:lnSpc>
+                <a:spcPct val="120000"/>
+              </a:lnSpc>
+              <a:spcAft>
+                <a:spcPts val="400"/>
+              </a:spcAft>
+            </a:pPr>
+            <a:r>
+              <a:rPr sz="1450" b="0">
+                <a:solidFill>
+                  <a:srgbClr val="2A2824"/>
+                </a:solidFill>
+                <a:latin typeface="Trebuchet MS"/>
+              </a:rPr>
+              <a:t>Fragt der Kunde nach: </a:t>
+            </a:r>
+            <a:r>
+              <a:rPr sz="1450" b="1">
+                <a:solidFill>
+                  <a:srgbClr val="2A2824"/>
+                </a:solidFill>
+                <a:latin typeface="Trebuchet MS"/>
+              </a:rPr>
+              <a:t>„XML ansehen“</a:t>
+            </a:r>
+            <a:r>
+              <a:rPr sz="1450" b="0">
+                <a:solidFill>
+                  <a:srgbClr val="2A2824"/>
+                </a:solidFill>
+                <a:latin typeface="Trebuchet MS"/>
+              </a:rPr>
+              <a:t> zeigt genau die Datei, die er bekommen hat. Im Verlauf unten steht, </a:t>
+            </a:r>
+            <a:r>
+              <a:rPr sz="1450" b="1">
+                <a:solidFill>
+                  <a:srgbClr val="2A2824"/>
+                </a:solidFill>
+                <a:latin typeface="Trebuchet MS"/>
+              </a:rPr>
+              <a:t>an welche Adresse</a:t>
+            </a:r>
+            <a:r>
+              <a:rPr sz="1450" b="0">
+                <a:solidFill>
+                  <a:srgbClr val="2A2824"/>
+                </a:solidFill>
+                <a:latin typeface="Trebuchet MS"/>
+              </a:rPr>
+              <a:t> und </a:t>
+            </a:r>
+            <a:r>
+              <a:rPr sz="1450" b="1">
+                <a:solidFill>
+                  <a:srgbClr val="2A2824"/>
+                </a:solidFill>
+                <a:latin typeface="Trebuchet MS"/>
+              </a:rPr>
+              <a:t>wann</a:t>
+            </a:r>
+            <a:r>
+              <a:rPr sz="1450" b="0">
+                <a:solidFill>
+                  <a:srgbClr val="2A2824"/>
+                </a:solidFill>
+                <a:latin typeface="Trebuchet MS"/>
+              </a:rPr>
+              <a:t>.</a:t>
+            </a:r>
+          </a:p>
+        </p:txBody>
+      </p:sp>
+      <p:sp>
+        <p:nvSpPr>
+          <p:cNvPr id="15" name="Rounded Rectangle 14"/>
+          <p:cNvSpPr/>
+          <p:nvPr/>
+        </p:nvSpPr>
+        <p:spPr>
+          <a:xfrm>
+            <a:off x="6675120" y="3474720"/>
+            <a:ext cx="4876495" cy="1371600"/>
+          </a:xfrm>
+          <a:prstGeom prst="roundRect">
+            <a:avLst>
+              <a:gd name="adj" fmla="val 8000"/>
+            </a:avLst>
+          </a:prstGeom>
+          <a:solidFill>
+            <a:srgbClr val="FBEFDC"/>
+          </a:solidFill>
+          <a:ln>
+            <a:noFill/>
+          </a:ln>
+          <a:effectLst/>
+        </p:spPr>
+        <p:style>
+          <a:lnRef idx="1">
+            <a:schemeClr val="accent1"/>
+          </a:lnRef>
+          <a:fillRef idx="3">
+            <a:schemeClr val="accent1"/>
+          </a:fillRef>
+          <a:effectRef idx="2">
+            <a:schemeClr val="accent1"/>
+          </a:effectRef>
+          <a:fontRef idx="minor">
+            <a:schemeClr val="lt1"/>
+          </a:fontRef>
+        </p:style>
+        <p:txBody>
+          <a:bodyPr rtlCol="0" anchor="ctr"/>
+          <a:lstStyle/>
+          <a:p>
+            <a:pPr algn="ctr"/>
+          </a:p>
+        </p:txBody>
+      </p:sp>
+      <p:sp>
+        <p:nvSpPr>
+          <p:cNvPr id="16" name="Rectangle 15"/>
+          <p:cNvSpPr/>
+          <p:nvPr/>
+        </p:nvSpPr>
+        <p:spPr>
+          <a:xfrm>
+            <a:off x="6675120" y="3474720"/>
+            <a:ext cx="82296" cy="1371600"/>
+          </a:xfrm>
+          <a:prstGeom prst="rect">
+            <a:avLst/>
+          </a:prstGeom>
+          <a:solidFill>
+            <a:srgbClr val="8A4B12"/>
+          </a:solidFill>
+          <a:ln>
+            <a:noFill/>
+          </a:ln>
+          <a:effectLst/>
+        </p:spPr>
+        <p:style>
+          <a:lnRef idx="1">
+            <a:schemeClr val="accent1"/>
+          </a:lnRef>
+          <a:fillRef idx="3">
+            <a:schemeClr val="accent1"/>
+          </a:fillRef>
+          <a:effectRef idx="2">
+            <a:schemeClr val="accent1"/>
+          </a:effectRef>
+          <a:fontRef idx="minor">
+            <a:schemeClr val="lt1"/>
+          </a:fontRef>
+        </p:style>
+        <p:txBody>
+          <a:bodyPr rtlCol="0" anchor="ctr"/>
+          <a:lstStyle/>
+          <a:p>
+            <a:pPr algn="ctr"/>
+          </a:p>
+        </p:txBody>
+      </p:sp>
+      <p:sp>
+        <p:nvSpPr>
+          <p:cNvPr id="17" name="TextBox 16"/>
+          <p:cNvSpPr txBox="1"/>
+          <p:nvPr/>
+        </p:nvSpPr>
+        <p:spPr>
+          <a:xfrm>
+            <a:off x="6931152" y="3584448"/>
+            <a:ext cx="4510735" cy="274320"/>
+          </a:xfrm>
+          <a:prstGeom prst="rect">
+            <a:avLst/>
+          </a:prstGeom>
+          <a:noFill/>
+        </p:spPr>
+        <p:txBody>
+          <a:bodyPr wrap="square" anchor="t" lIns="0" rIns="0" tIns="0" bIns="0">
+            <a:spAutoFit/>
+          </a:bodyPr>
+          <a:lstStyle/>
+          <a:p>
+            <a:pPr algn="l">
+              <a:lnSpc>
+                <a:spcPct val="120000"/>
+              </a:lnSpc>
+              <a:spcAft>
+                <a:spcPts val="400"/>
+              </a:spcAft>
+            </a:pPr>
+            <a:r>
+              <a:rPr sz="1100" b="1">
+                <a:solidFill>
+                  <a:srgbClr val="8A4B12"/>
+                </a:solidFill>
+                <a:latin typeface="Trebuchet MS"/>
+              </a:rPr>
+              <a:t>HINWEIS</a:t>
+            </a:r>
+          </a:p>
+        </p:txBody>
+      </p:sp>
+      <p:sp>
+        <p:nvSpPr>
+          <p:cNvPr id="18" name="TextBox 17"/>
+          <p:cNvSpPr txBox="1"/>
+          <p:nvPr/>
+        </p:nvSpPr>
+        <p:spPr>
+          <a:xfrm>
+            <a:off x="6931152" y="3840480"/>
+            <a:ext cx="4465015" cy="960120"/>
+          </a:xfrm>
+          <a:prstGeom prst="rect">
+            <a:avLst/>
+          </a:prstGeom>
+          <a:noFill/>
+        </p:spPr>
+        <p:txBody>
+          <a:bodyPr wrap="square" anchor="t" lIns="0" rIns="0" tIns="0" bIns="0">
+            <a:spAutoFit/>
+          </a:bodyPr>
+          <a:lstStyle/>
+          <a:p>
+            <a:pPr algn="l">
+              <a:lnSpc>
+                <a:spcPct val="120000"/>
+              </a:lnSpc>
+              <a:spcAft>
+                <a:spcPts val="200"/>
+              </a:spcAft>
+            </a:pPr>
+            <a:r>
+              <a:rPr sz="1350" b="0">
+                <a:solidFill>
+                  <a:srgbClr val="2A2824"/>
+                </a:solidFill>
+                <a:latin typeface="Trebuchet MS"/>
+              </a:rPr>
+              <a:t>Die Tabelle </a:t>
+            </a:r>
+            <a:r>
+              <a:rPr sz="1350" b="1">
+                <a:solidFill>
+                  <a:srgbClr val="2A2824"/>
+                </a:solidFill>
+                <a:latin typeface="Trebuchet MS"/>
+              </a:rPr>
+              <a:t>„Positionen“</a:t>
+            </a:r>
+            <a:r>
+              <a:rPr sz="1350" b="0">
+                <a:solidFill>
+                  <a:srgbClr val="2A2824"/>
+                </a:solidFill>
+                <a:latin typeface="Trebuchet MS"/>
+              </a:rPr>
+              <a:t> einer versendeten Rechnung wird neu berechnet und kann anders aussehen als die verschickte Datei. Maßgeblich ist, was </a:t>
+            </a:r>
+            <a:r>
+              <a:rPr sz="1350" b="1">
+                <a:solidFill>
+                  <a:srgbClr val="2A2824"/>
+                </a:solidFill>
+                <a:latin typeface="Trebuchet MS"/>
+              </a:rPr>
+              <a:t>„XML ansehen“</a:t>
+            </a:r>
+            <a:r>
+              <a:rPr sz="1350" b="0">
+                <a:solidFill>
+                  <a:srgbClr val="2A2824"/>
+                </a:solidFill>
+                <a:latin typeface="Trebuchet MS"/>
+              </a:rPr>
+              <a:t> zeigt.</a:t>
             </a:r>
           </a:p>
         </p:txBody>
@@ -17289,7 +17619,7 @@
                 </a:solidFill>
                 <a:latin typeface="Trebuchet MS"/>
               </a:rPr>
-              <a:t>HÄUFIGE FRAGEN</a:t>
+              <a:t>GUT ZU WISSEN</a:t>
             </a:r>
           </a:p>
         </p:txBody>
@@ -17331,7 +17661,7 @@
                 </a:solidFill>
                 <a:latin typeface="Georgia"/>
               </a:rPr>
-              <a:t>Fragen, die oft kommen (1/3)</a:t>
+              <a:t>Zurücklegen und Nachvollziehen</a:t>
             </a:r>
           </a:p>
         </p:txBody>
@@ -17373,7 +17703,7 @@
                 </a:solidFill>
                 <a:latin typeface="Trebuchet MS"/>
               </a:rPr>
-              <a:t>XRechnung · Anleitung für den Alltag · Stand 16.09.2026 · Bilder mit Musterdaten</a:t>
+              <a:t>XRechnung · Anleitung für den Alltag · Stand 30.10.2026 · Bilder mit Musterdaten</a:t>
             </a:r>
           </a:p>
         </p:txBody>
@@ -17422,14 +17752,135 @@
       </p:sp>
       <p:sp>
         <p:nvSpPr>
-          <p:cNvPr id="8" name="Rounded Rectangle 7"/>
+          <p:cNvPr id="8" name="TextBox 7"/>
+          <p:cNvSpPr txBox="1"/>
+          <p:nvPr/>
+        </p:nvSpPr>
+        <p:spPr>
+          <a:xfrm>
+            <a:off x="640080" y="1417320"/>
+            <a:ext cx="5120640" cy="365760"/>
+          </a:xfrm>
+          <a:prstGeom prst="rect">
+            <a:avLst/>
+          </a:prstGeom>
+          <a:noFill/>
+        </p:spPr>
+        <p:txBody>
+          <a:bodyPr wrap="square" anchor="t" lIns="0" rIns="0" tIns="0" bIns="0">
+            <a:spAutoFit/>
+          </a:bodyPr>
+          <a:lstStyle/>
+          <a:p>
+            <a:pPr algn="l">
+              <a:lnSpc>
+                <a:spcPct val="120000"/>
+              </a:lnSpc>
+              <a:spcAft>
+                <a:spcPts val="400"/>
+              </a:spcAft>
+            </a:pPr>
+            <a:r>
+              <a:rPr sz="2000" b="0">
+                <a:solidFill>
+                  <a:srgbClr val="1A1A1A"/>
+                </a:solidFill>
+                <a:latin typeface="Georgia"/>
+              </a:rPr>
+              <a:t>Zurücklegen</a:t>
+            </a:r>
+          </a:p>
+        </p:txBody>
+      </p:sp>
+      <p:sp>
+        <p:nvSpPr>
+          <p:cNvPr id="9" name="TextBox 8"/>
+          <p:cNvSpPr txBox="1"/>
+          <p:nvPr/>
+        </p:nvSpPr>
+        <p:spPr>
+          <a:xfrm>
+            <a:off x="640080" y="1874520"/>
+            <a:ext cx="5120640" cy="1463040"/>
+          </a:xfrm>
+          <a:prstGeom prst="rect">
+            <a:avLst/>
+          </a:prstGeom>
+          <a:noFill/>
+        </p:spPr>
+        <p:txBody>
+          <a:bodyPr wrap="square" anchor="t" lIns="0" rIns="0" tIns="0" bIns="0">
+            <a:spAutoFit/>
+          </a:bodyPr>
+          <a:lstStyle/>
+          <a:p>
+            <a:pPr algn="l">
+              <a:lnSpc>
+                <a:spcPct val="120000"/>
+              </a:lnSpc>
+              <a:spcAft>
+                <a:spcPts val="400"/>
+              </a:spcAft>
+            </a:pPr>
+            <a:r>
+              <a:rPr sz="1450" b="0">
+                <a:solidFill>
+                  <a:srgbClr val="2A2824"/>
+                </a:solidFill>
+                <a:latin typeface="Trebuchet MS"/>
+              </a:rPr>
+              <a:t>Nimmt eine Rechnung aus dem Lauf. Sie wird </a:t>
+            </a:r>
+            <a:r>
+              <a:rPr sz="1450" b="1">
+                <a:solidFill>
+                  <a:srgbClr val="2A2824"/>
+                </a:solidFill>
+                <a:latin typeface="Trebuchet MS"/>
+              </a:rPr>
+              <a:t>nicht</a:t>
+            </a:r>
+            <a:r>
+              <a:rPr sz="1450" b="0">
+                <a:solidFill>
+                  <a:srgbClr val="2A2824"/>
+                </a:solidFill>
+                <a:latin typeface="Trebuchet MS"/>
+              </a:rPr>
+              <a:t> verschickt, weder von Hand noch automatisch.</a:t>
+            </a:r>
+          </a:p>
+          <a:p>
+            <a:pPr algn="l">
+              <a:lnSpc>
+                <a:spcPct val="120000"/>
+              </a:lnSpc>
+              <a:spcAft>
+                <a:spcPts val="400"/>
+              </a:spcAft>
+            </a:pPr>
+            <a:r>
+              <a:rPr sz="1450" b="0">
+                <a:solidFill>
+                  <a:srgbClr val="2A2824"/>
+                </a:solidFill>
+                <a:latin typeface="Trebuchet MS"/>
+              </a:rPr>
+              <a:t>Sinnvoll, wenn der Gast selbst bezahlt hat oder die Rechnung gar keine Firmenrechnung ist.</a:t>
+            </a:r>
+          </a:p>
+        </p:txBody>
+      </p:sp>
+      <p:sp>
+        <p:nvSpPr>
+          <p:cNvPr id="10" name="Rounded Rectangle 9"/>
           <p:cNvSpPr/>
           <p:nvPr/>
         </p:nvSpPr>
         <p:spPr>
           <a:xfrm>
-            <a:off x="640080" y="1417320"/>
-            <a:ext cx="5295747" cy="1609344"/>
+            <a:off x="640080" y="3337560"/>
+            <a:ext cx="5120640" cy="1143000"/>
           </a:xfrm>
           <a:prstGeom prst="roundRect">
             <a:avLst>
@@ -17437,7 +17888,7 @@
             </a:avLst>
           </a:prstGeom>
           <a:solidFill>
-            <a:srgbClr val="E2EAF4"/>
+            <a:srgbClr val="F8E1DE"/>
           </a:solidFill>
           <a:ln>
             <a:noFill/>
@@ -17468,20 +17919,20 @@
       </p:sp>
       <p:sp>
         <p:nvSpPr>
-          <p:cNvPr id="9" name="Rectangle 8"/>
+          <p:cNvPr id="11" name="Rectangle 10"/>
           <p:cNvSpPr/>
           <p:nvPr/>
         </p:nvSpPr>
         <p:spPr>
           <a:xfrm>
-            <a:off x="640080" y="1417320"/>
-            <a:ext cx="82296" cy="1609344"/>
+            <a:off x="640080" y="3337560"/>
+            <a:ext cx="82296" cy="1143000"/>
           </a:xfrm>
           <a:prstGeom prst="rect">
             <a:avLst/>
           </a:prstGeom>
           <a:solidFill>
-            <a:srgbClr val="2E4F7A"/>
+            <a:srgbClr val="A02020"/>
           </a:solidFill>
           <a:ln>
             <a:noFill/>
@@ -17512,14 +17963,14 @@
       </p:sp>
       <p:sp>
         <p:nvSpPr>
-          <p:cNvPr id="10" name="TextBox 9"/>
+          <p:cNvPr id="12" name="TextBox 11"/>
           <p:cNvSpPr txBox="1"/>
           <p:nvPr/>
         </p:nvSpPr>
         <p:spPr>
           <a:xfrm>
-            <a:off x="896112" y="1527048"/>
-            <a:ext cx="4911699" cy="274320"/>
+            <a:off x="896112" y="3447288"/>
+            <a:ext cx="4754880" cy="274320"/>
           </a:xfrm>
           <a:prstGeom prst="rect">
             <a:avLst/>
@@ -17537,31 +17988,31 @@
                 <a:spcPct val="120000"/>
               </a:lnSpc>
               <a:spcAft>
-                <a:spcPts val="0"/>
-              </a:spcAft>
-            </a:pPr>
-            <a:r>
-              <a:rPr sz="1350" b="1">
-                <a:solidFill>
-                  <a:srgbClr val="2E4F7A"/>
-                </a:solidFill>
-                <a:latin typeface="Trebuchet MS"/>
-              </a:rPr>
-              <a:t>? Warum steht eine Rechnung nicht in der Liste?</a:t>
-            </a:r>
-          </a:p>
-        </p:txBody>
-      </p:sp>
-      <p:sp>
-        <p:nvSpPr>
-          <p:cNvPr id="11" name="TextBox 10"/>
+                <a:spcPts val="400"/>
+              </a:spcAft>
+            </a:pPr>
+            <a:r>
+              <a:rPr sz="1100" b="1">
+                <a:solidFill>
+                  <a:srgbClr val="A02020"/>
+                </a:solidFill>
+                <a:latin typeface="Trebuchet MS"/>
+              </a:rPr>
+              <a:t>ACHTUNG</a:t>
+            </a:r>
+          </a:p>
+        </p:txBody>
+      </p:sp>
+      <p:sp>
+        <p:nvSpPr>
+          <p:cNvPr id="13" name="TextBox 12"/>
           <p:cNvSpPr txBox="1"/>
           <p:nvPr/>
         </p:nvSpPr>
         <p:spPr>
           <a:xfrm>
-            <a:off x="896112" y="1828800"/>
-            <a:ext cx="4911699" cy="1143000"/>
+            <a:off x="896112" y="3703320"/>
+            <a:ext cx="4709160" cy="731520"/>
           </a:xfrm>
           <a:prstGeom prst="rect">
             <a:avLst/>
@@ -17579,75 +18030,97 @@
                 <a:spcPct val="120000"/>
               </a:lnSpc>
               <a:spcAft>
-                <a:spcPts val="100"/>
-              </a:spcAft>
-            </a:pPr>
-            <a:r>
-              <a:rPr sz="1300" b="0">
-                <a:solidFill>
-                  <a:srgbClr val="2A2824"/>
-                </a:solidFill>
-                <a:latin typeface="Trebuchet MS"/>
-              </a:rPr>
-              <a:t>Aufgenommen werden nur </a:t>
-            </a:r>
-            <a:r>
-              <a:rPr sz="1300" b="1">
-                <a:solidFill>
-                  <a:srgbClr val="2A2824"/>
-                </a:solidFill>
-                <a:latin typeface="Trebuchet MS"/>
-              </a:rPr>
-              <a:t>abgeschlossene Firmenrechnungen an Kunden in Deutschland</a:t>
-            </a:r>
-            <a:r>
-              <a:rPr sz="1300" b="0">
-                <a:solidFill>
-                  <a:srgbClr val="2A2824"/>
-                </a:solidFill>
-                <a:latin typeface="Trebuchet MS"/>
-              </a:rPr>
-              <a:t> aus dem eingestellten Zeitraum. Suchen Sie nach der </a:t>
-            </a:r>
-            <a:r>
-              <a:rPr sz="1300" b="1">
-                <a:solidFill>
-                  <a:srgbClr val="2A2824"/>
-                </a:solidFill>
-                <a:latin typeface="Trebuchet MS"/>
-              </a:rPr>
-              <a:t>Rechnungsnummer</a:t>
-            </a:r>
-            <a:r>
-              <a:rPr sz="1300" b="0">
-                <a:solidFill>
-                  <a:srgbClr val="2A2824"/>
-                </a:solidFill>
-                <a:latin typeface="Trebuchet MS"/>
-              </a:rPr>
-              <a:t> — findet das Programm sie in OPERA, holen Sie sie mit „In die Liste holen“.</a:t>
-            </a:r>
-          </a:p>
-        </p:txBody>
-      </p:sp>
-      <p:sp>
-        <p:nvSpPr>
-          <p:cNvPr id="12" name="Rounded Rectangle 11"/>
+                <a:spcPts val="200"/>
+              </a:spcAft>
+            </a:pPr>
+            <a:r>
+              <a:rPr sz="1350" b="0">
+                <a:solidFill>
+                  <a:srgbClr val="2A2824"/>
+                </a:solidFill>
+                <a:latin typeface="Trebuchet MS"/>
+              </a:rPr>
+              <a:t>Aus Versehen zurückgelegt? </a:t>
+            </a:r>
+            <a:r>
+              <a:rPr sz="1350" b="1">
+                <a:solidFill>
+                  <a:srgbClr val="2A2824"/>
+                </a:solidFill>
+                <a:latin typeface="Trebuchet MS"/>
+              </a:rPr>
+              <a:t>„Wieder aufnehmen“</a:t>
+            </a:r>
+            <a:r>
+              <a:rPr sz="1350" b="0">
+                <a:solidFill>
+                  <a:srgbClr val="2A2824"/>
+                </a:solidFill>
+                <a:latin typeface="Trebuchet MS"/>
+              </a:rPr>
+              <a:t> holt die Rechnung zurück — sie landet dann in der Prüfung, nicht im Versand.</a:t>
+            </a:r>
+          </a:p>
+        </p:txBody>
+      </p:sp>
+      <p:sp>
+        <p:nvSpPr>
+          <p:cNvPr id="14" name="TextBox 13"/>
+          <p:cNvSpPr txBox="1"/>
+          <p:nvPr/>
+        </p:nvSpPr>
+        <p:spPr>
+          <a:xfrm>
+            <a:off x="6126480" y="1417320"/>
+            <a:ext cx="5425135" cy="365760"/>
+          </a:xfrm>
+          <a:prstGeom prst="rect">
+            <a:avLst/>
+          </a:prstGeom>
+          <a:noFill/>
+        </p:spPr>
+        <p:txBody>
+          <a:bodyPr wrap="square" anchor="t" lIns="0" rIns="0" tIns="0" bIns="0">
+            <a:spAutoFit/>
+          </a:bodyPr>
+          <a:lstStyle/>
+          <a:p>
+            <a:pPr algn="l">
+              <a:lnSpc>
+                <a:spcPct val="120000"/>
+              </a:lnSpc>
+              <a:spcAft>
+                <a:spcPts val="400"/>
+              </a:spcAft>
+            </a:pPr>
+            <a:r>
+              <a:rPr sz="2000" b="0">
+                <a:solidFill>
+                  <a:srgbClr val="1A1A1A"/>
+                </a:solidFill>
+                <a:latin typeface="Georgia"/>
+              </a:rPr>
+              <a:t>Wer hat was gemacht?</a:t>
+            </a:r>
+          </a:p>
+        </p:txBody>
+      </p:sp>
+      <p:sp>
+        <p:nvSpPr>
+          <p:cNvPr id="15" name="Rectangle 14"/>
           <p:cNvSpPr/>
           <p:nvPr/>
         </p:nvSpPr>
         <p:spPr>
           <a:xfrm>
-            <a:off x="6255867" y="1417320"/>
-            <a:ext cx="5295747" cy="1837943"/>
-          </a:xfrm>
-          <a:prstGeom prst="roundRect">
-            <a:avLst>
-              <a:gd name="adj" fmla="val 8000"/>
-            </a:avLst>
+            <a:off x="6107430" y="1901190"/>
+            <a:ext cx="5463235" cy="1620431"/>
+          </a:xfrm>
+          <a:prstGeom prst="rect">
+            <a:avLst/>
           </a:prstGeom>
           <a:solidFill>
-            <a:srgbClr val="E2EAF4"/>
+            <a:srgbClr val="D8D2C6"/>
           </a:solidFill>
           <a:ln>
             <a:noFill/>
@@ -17676,60 +18149,40 @@
           </a:p>
         </p:txBody>
       </p:sp>
-      <p:sp>
-        <p:nvSpPr>
-          <p:cNvPr id="13" name="Rectangle 12"/>
-          <p:cNvSpPr/>
-          <p:nvPr/>
-        </p:nvSpPr>
-        <p:spPr>
-          <a:xfrm>
-            <a:off x="6255867" y="1417320"/>
-            <a:ext cx="82296" cy="1837943"/>
-          </a:xfrm>
-          <a:prstGeom prst="rect">
-            <a:avLst/>
-          </a:prstGeom>
-          <a:solidFill>
-            <a:srgbClr val="2E4F7A"/>
-          </a:solidFill>
-          <a:ln>
-            <a:noFill/>
-          </a:ln>
-          <a:effectLst/>
-        </p:spPr>
-        <p:style>
-          <a:lnRef idx="1">
-            <a:schemeClr val="accent1"/>
-          </a:lnRef>
-          <a:fillRef idx="3">
-            <a:schemeClr val="accent1"/>
-          </a:fillRef>
-          <a:effectRef idx="2">
-            <a:schemeClr val="accent1"/>
-          </a:effectRef>
-          <a:fontRef idx="minor">
-            <a:schemeClr val="lt1"/>
-          </a:fontRef>
-        </p:style>
-        <p:txBody>
-          <a:bodyPr rtlCol="0" anchor="ctr"/>
-          <a:lstStyle/>
-          <a:p>
-            <a:pPr algn="ctr"/>
-          </a:p>
-        </p:txBody>
-      </p:sp>
-      <p:sp>
-        <p:nvSpPr>
-          <p:cNvPr id="14" name="TextBox 13"/>
+      <p:pic>
+        <p:nvPicPr>
+          <p:cNvPr id="16" name="Picture 15" descr="17_protokoll.png"/>
+          <p:cNvPicPr>
+            <a:picLocks noChangeAspect="1"/>
+          </p:cNvPicPr>
+          <p:nvPr/>
+        </p:nvPicPr>
+        <p:blipFill>
+          <a:blip r:embed="rId2"/>
+          <a:stretch>
+            <a:fillRect/>
+          </a:stretch>
+        </p:blipFill>
+        <p:spPr>
+          <a:xfrm>
+            <a:off x="6126480" y="1920240"/>
+            <a:ext cx="5425135" cy="1582331"/>
+          </a:xfrm>
+          <a:prstGeom prst="rect">
+            <a:avLst/>
+          </a:prstGeom>
+        </p:spPr>
+      </p:pic>
+      <p:sp>
+        <p:nvSpPr>
+          <p:cNvPr id="17" name="TextBox 16"/>
           <p:cNvSpPr txBox="1"/>
           <p:nvPr/>
         </p:nvSpPr>
         <p:spPr>
           <a:xfrm>
-            <a:off x="6511899" y="1527048"/>
-            <a:ext cx="4911699" cy="548640"/>
+            <a:off x="6126480" y="4480560"/>
+            <a:ext cx="5425135" cy="1097280"/>
           </a:xfrm>
           <a:prstGeom prst="rect">
             <a:avLst/>
@@ -17747,590 +18200,38 @@
                 <a:spcPct val="120000"/>
               </a:lnSpc>
               <a:spcAft>
-                <a:spcPts val="0"/>
-              </a:spcAft>
-            </a:pPr>
-            <a:r>
-              <a:rPr sz="1350" b="1">
-                <a:solidFill>
-                  <a:srgbClr val="2E4F7A"/>
-                </a:solidFill>
-                <a:latin typeface="Trebuchet MS"/>
-              </a:rPr>
-              <a:t>? Warum wurde eine Rechnung nicht automatisch verschickt?</a:t>
-            </a:r>
-          </a:p>
-        </p:txBody>
-      </p:sp>
-      <p:sp>
-        <p:nvSpPr>
-          <p:cNvPr id="15" name="TextBox 14"/>
-          <p:cNvSpPr txBox="1"/>
-          <p:nvPr/>
-        </p:nvSpPr>
-        <p:spPr>
-          <a:xfrm>
-            <a:off x="6511899" y="2057400"/>
-            <a:ext cx="4911699" cy="1143000"/>
-          </a:xfrm>
-          <a:prstGeom prst="rect">
-            <a:avLst/>
-          </a:prstGeom>
-          <a:noFill/>
-        </p:spPr>
-        <p:txBody>
-          <a:bodyPr wrap="square" anchor="t" lIns="0" rIns="0" tIns="0" bIns="0">
-            <a:spAutoFit/>
-          </a:bodyPr>
-          <a:lstStyle/>
-          <a:p>
-            <a:pPr algn="l">
-              <a:lnSpc>
-                <a:spcPct val="120000"/>
-              </a:lnSpc>
-              <a:spcAft>
-                <a:spcPts val="100"/>
-              </a:spcAft>
-            </a:pPr>
-            <a:r>
-              <a:rPr sz="1300" b="0">
-                <a:solidFill>
-                  <a:srgbClr val="2A2824"/>
-                </a:solidFill>
-                <a:latin typeface="Trebuchet MS"/>
-              </a:rPr>
-              <a:t>Mögliche Gründe: Status </a:t>
-            </a:r>
-            <a:r>
-              <a:rPr sz="1300" b="1">
-                <a:solidFill>
-                  <a:srgbClr val="2A2824"/>
-                </a:solidFill>
-                <a:latin typeface="Trebuchet MS"/>
-              </a:rPr>
-              <a:t>Prüfung</a:t>
-            </a:r>
-            <a:r>
-              <a:rPr sz="1300" b="0">
-                <a:solidFill>
-                  <a:srgbClr val="2A2824"/>
-                </a:solidFill>
-                <a:latin typeface="Trebuchet MS"/>
-              </a:rPr>
-              <a:t> oder </a:t>
-            </a:r>
-            <a:r>
-              <a:rPr sz="1300" b="1">
-                <a:solidFill>
-                  <a:srgbClr val="2A2824"/>
-                </a:solidFill>
-                <a:latin typeface="Trebuchet MS"/>
-              </a:rPr>
-              <a:t>Fehler</a:t>
-            </a:r>
-            <a:r>
-              <a:rPr sz="1300" b="0">
-                <a:solidFill>
-                  <a:srgbClr val="2A2824"/>
-                </a:solidFill>
-                <a:latin typeface="Trebuchet MS"/>
-              </a:rPr>
-              <a:t> · </a:t>
-            </a:r>
-            <a:r>
-              <a:rPr sz="1300" b="1">
-                <a:solidFill>
-                  <a:srgbClr val="2A2824"/>
-                </a:solidFill>
-                <a:latin typeface="Trebuchet MS"/>
-              </a:rPr>
-              <a:t>kein Empfänger</a:t>
-            </a:r>
-            <a:r>
-              <a:rPr sz="1300" b="0">
-                <a:solidFill>
-                  <a:srgbClr val="2A2824"/>
-                </a:solidFill>
-                <a:latin typeface="Trebuchet MS"/>
-              </a:rPr>
-              <a:t> gewählt · die </a:t>
-            </a:r>
-            <a:r>
-              <a:rPr sz="1300" b="1">
-                <a:solidFill>
-                  <a:srgbClr val="2A2824"/>
-                </a:solidFill>
-                <a:latin typeface="Trebuchet MS"/>
-              </a:rPr>
-              <a:t>Wartezeit</a:t>
-            </a:r>
-            <a:r>
-              <a:rPr sz="1300" b="0">
-                <a:solidFill>
-                  <a:srgbClr val="2A2824"/>
-                </a:solidFill>
-                <a:latin typeface="Trebuchet MS"/>
-              </a:rPr>
-              <a:t> läuft noch · Automatik ist </a:t>
-            </a:r>
-            <a:r>
-              <a:rPr sz="1300" b="1">
-                <a:solidFill>
-                  <a:srgbClr val="2A2824"/>
-                </a:solidFill>
-                <a:latin typeface="Trebuchet MS"/>
-              </a:rPr>
-              <a:t>aus</a:t>
-            </a:r>
-            <a:r>
-              <a:rPr sz="1300" b="0">
-                <a:solidFill>
-                  <a:srgbClr val="2A2824"/>
-                </a:solidFill>
-                <a:latin typeface="Trebuchet MS"/>
-              </a:rPr>
-              <a:t> oder im </a:t>
-            </a:r>
-            <a:r>
-              <a:rPr sz="1300" b="1">
-                <a:solidFill>
-                  <a:srgbClr val="2A2824"/>
-                </a:solidFill>
-                <a:latin typeface="Trebuchet MS"/>
-              </a:rPr>
-              <a:t>Testlauf</a:t>
-            </a:r>
-            <a:r>
-              <a:rPr sz="1300" b="0">
-                <a:solidFill>
-                  <a:srgbClr val="2A2824"/>
-                </a:solidFill>
-                <a:latin typeface="Trebuchet MS"/>
-              </a:rPr>
-              <a:t> · Rechnungen über das </a:t>
-            </a:r>
-            <a:r>
-              <a:rPr sz="1300" b="1">
-                <a:solidFill>
-                  <a:srgbClr val="2A2824"/>
-                </a:solidFill>
-                <a:latin typeface="Trebuchet MS"/>
-              </a:rPr>
-              <a:t>Debitorenkonto</a:t>
-            </a:r>
-            <a:r>
-              <a:rPr sz="1300" b="0">
-                <a:solidFill>
-                  <a:srgbClr val="2A2824"/>
-                </a:solidFill>
-                <a:latin typeface="Trebuchet MS"/>
-              </a:rPr>
-              <a:t> gehen in der Grundeinstellung nur von Hand hinaus.</a:t>
-            </a:r>
-          </a:p>
-        </p:txBody>
-      </p:sp>
-      <p:sp>
-        <p:nvSpPr>
-          <p:cNvPr id="16" name="Rounded Rectangle 15"/>
-          <p:cNvSpPr/>
-          <p:nvPr/>
-        </p:nvSpPr>
-        <p:spPr>
-          <a:xfrm>
-            <a:off x="640080" y="3154680"/>
-            <a:ext cx="5295747" cy="1380744"/>
-          </a:xfrm>
-          <a:prstGeom prst="roundRect">
-            <a:avLst>
-              <a:gd name="adj" fmla="val 8000"/>
-            </a:avLst>
-          </a:prstGeom>
-          <a:solidFill>
-            <a:srgbClr val="E2EAF4"/>
-          </a:solidFill>
-          <a:ln>
-            <a:noFill/>
-          </a:ln>
-          <a:effectLst/>
-        </p:spPr>
-        <p:style>
-          <a:lnRef idx="1">
-            <a:schemeClr val="accent1"/>
-          </a:lnRef>
-          <a:fillRef idx="3">
-            <a:schemeClr val="accent1"/>
-          </a:fillRef>
-          <a:effectRef idx="2">
-            <a:schemeClr val="accent1"/>
-          </a:effectRef>
-          <a:fontRef idx="minor">
-            <a:schemeClr val="lt1"/>
-          </a:fontRef>
-        </p:style>
-        <p:txBody>
-          <a:bodyPr rtlCol="0" anchor="ctr"/>
-          <a:lstStyle/>
-          <a:p>
-            <a:pPr algn="ctr"/>
-          </a:p>
-        </p:txBody>
-      </p:sp>
-      <p:sp>
-        <p:nvSpPr>
-          <p:cNvPr id="17" name="Rectangle 16"/>
-          <p:cNvSpPr/>
-          <p:nvPr/>
-        </p:nvSpPr>
-        <p:spPr>
-          <a:xfrm>
-            <a:off x="640080" y="3154680"/>
-            <a:ext cx="82296" cy="1380744"/>
-          </a:xfrm>
-          <a:prstGeom prst="rect">
-            <a:avLst/>
-          </a:prstGeom>
-          <a:solidFill>
-            <a:srgbClr val="2E4F7A"/>
-          </a:solidFill>
-          <a:ln>
-            <a:noFill/>
-          </a:ln>
-          <a:effectLst/>
-        </p:spPr>
-        <p:style>
-          <a:lnRef idx="1">
-            <a:schemeClr val="accent1"/>
-          </a:lnRef>
-          <a:fillRef idx="3">
-            <a:schemeClr val="accent1"/>
-          </a:fillRef>
-          <a:effectRef idx="2">
-            <a:schemeClr val="accent1"/>
-          </a:effectRef>
-          <a:fontRef idx="minor">
-            <a:schemeClr val="lt1"/>
-          </a:fontRef>
-        </p:style>
-        <p:txBody>
-          <a:bodyPr rtlCol="0" anchor="ctr"/>
-          <a:lstStyle/>
-          <a:p>
-            <a:pPr algn="ctr"/>
-          </a:p>
-        </p:txBody>
-      </p:sp>
-      <p:sp>
-        <p:nvSpPr>
-          <p:cNvPr id="18" name="TextBox 17"/>
-          <p:cNvSpPr txBox="1"/>
-          <p:nvPr/>
-        </p:nvSpPr>
-        <p:spPr>
-          <a:xfrm>
-            <a:off x="896112" y="3264408"/>
-            <a:ext cx="4911699" cy="274320"/>
-          </a:xfrm>
-          <a:prstGeom prst="rect">
-            <a:avLst/>
-          </a:prstGeom>
-          <a:noFill/>
-        </p:spPr>
-        <p:txBody>
-          <a:bodyPr wrap="square" anchor="t" lIns="0" rIns="0" tIns="0" bIns="0">
-            <a:spAutoFit/>
-          </a:bodyPr>
-          <a:lstStyle/>
-          <a:p>
-            <a:pPr algn="l">
-              <a:lnSpc>
-                <a:spcPct val="120000"/>
-              </a:lnSpc>
-              <a:spcAft>
-                <a:spcPts val="0"/>
-              </a:spcAft>
-            </a:pPr>
-            <a:r>
-              <a:rPr sz="1350" b="1">
-                <a:solidFill>
-                  <a:srgbClr val="2E4F7A"/>
-                </a:solidFill>
-                <a:latin typeface="Trebuchet MS"/>
-              </a:rPr>
-              <a:t>? Ich kann nicht auf „Jetzt versenden“ klicken.</a:t>
-            </a:r>
-          </a:p>
-        </p:txBody>
-      </p:sp>
-      <p:sp>
-        <p:nvSpPr>
-          <p:cNvPr id="19" name="TextBox 18"/>
-          <p:cNvSpPr txBox="1"/>
-          <p:nvPr/>
-        </p:nvSpPr>
-        <p:spPr>
-          <a:xfrm>
-            <a:off x="896112" y="3566160"/>
-            <a:ext cx="4911699" cy="914400"/>
-          </a:xfrm>
-          <a:prstGeom prst="rect">
-            <a:avLst/>
-          </a:prstGeom>
-          <a:noFill/>
-        </p:spPr>
-        <p:txBody>
-          <a:bodyPr wrap="square" anchor="t" lIns="0" rIns="0" tIns="0" bIns="0">
-            <a:spAutoFit/>
-          </a:bodyPr>
-          <a:lstStyle/>
-          <a:p>
-            <a:pPr algn="l">
-              <a:lnSpc>
-                <a:spcPct val="120000"/>
-              </a:lnSpc>
-              <a:spcAft>
-                <a:spcPts val="100"/>
-              </a:spcAft>
-            </a:pPr>
-            <a:r>
-              <a:rPr sz="1300" b="0">
-                <a:solidFill>
-                  <a:srgbClr val="2A2824"/>
-                </a:solidFill>
-                <a:latin typeface="Trebuchet MS"/>
-              </a:rPr>
-              <a:t>Der Knopf ist </a:t>
-            </a:r>
-            <a:r>
-              <a:rPr sz="1300" b="1">
-                <a:solidFill>
-                  <a:srgbClr val="2A2824"/>
-                </a:solidFill>
-                <a:latin typeface="Trebuchet MS"/>
-              </a:rPr>
-              <a:t>grau</a:t>
-            </a:r>
-            <a:r>
-              <a:rPr sz="1300" b="0">
-                <a:solidFill>
-                  <a:srgbClr val="2A2824"/>
-                </a:solidFill>
-                <a:latin typeface="Trebuchet MS"/>
-              </a:rPr>
-              <a:t>, wenn kein Empfänger gewählt ist, die Prüfung rot ist oder die Rechnung schon verschickt oder zurückgelegt wurde. </a:t>
-            </a:r>
-            <a:r>
-              <a:rPr sz="1300" b="1">
-                <a:solidFill>
-                  <a:srgbClr val="2A2824"/>
-                </a:solidFill>
-                <a:latin typeface="Trebuchet MS"/>
-              </a:rPr>
-              <a:t>Fehlt</a:t>
-            </a:r>
-            <a:r>
-              <a:rPr sz="1300" b="0">
-                <a:solidFill>
-                  <a:srgbClr val="2A2824"/>
-                </a:solidFill>
-                <a:latin typeface="Trebuchet MS"/>
-              </a:rPr>
-              <a:t> der Knopf ganz, hat Ihr Zugang die Rolle „ansehen“ — fragen Sie die IT.</a:t>
-            </a:r>
-          </a:p>
-        </p:txBody>
-      </p:sp>
-      <p:sp>
-        <p:nvSpPr>
-          <p:cNvPr id="20" name="Rounded Rectangle 19"/>
-          <p:cNvSpPr/>
-          <p:nvPr/>
-        </p:nvSpPr>
-        <p:spPr>
-          <a:xfrm>
-            <a:off x="6255867" y="3383279"/>
-            <a:ext cx="5295747" cy="1380744"/>
-          </a:xfrm>
-          <a:prstGeom prst="roundRect">
-            <a:avLst>
-              <a:gd name="adj" fmla="val 8000"/>
-            </a:avLst>
-          </a:prstGeom>
-          <a:solidFill>
-            <a:srgbClr val="E2EAF4"/>
-          </a:solidFill>
-          <a:ln>
-            <a:noFill/>
-          </a:ln>
-          <a:effectLst/>
-        </p:spPr>
-        <p:style>
-          <a:lnRef idx="1">
-            <a:schemeClr val="accent1"/>
-          </a:lnRef>
-          <a:fillRef idx="3">
-            <a:schemeClr val="accent1"/>
-          </a:fillRef>
-          <a:effectRef idx="2">
-            <a:schemeClr val="accent1"/>
-          </a:effectRef>
-          <a:fontRef idx="minor">
-            <a:schemeClr val="lt1"/>
-          </a:fontRef>
-        </p:style>
-        <p:txBody>
-          <a:bodyPr rtlCol="0" anchor="ctr"/>
-          <a:lstStyle/>
-          <a:p>
-            <a:pPr algn="ctr"/>
-          </a:p>
-        </p:txBody>
-      </p:sp>
-      <p:sp>
-        <p:nvSpPr>
-          <p:cNvPr id="21" name="Rectangle 20"/>
-          <p:cNvSpPr/>
-          <p:nvPr/>
-        </p:nvSpPr>
-        <p:spPr>
-          <a:xfrm>
-            <a:off x="6255867" y="3383279"/>
-            <a:ext cx="82296" cy="1380744"/>
-          </a:xfrm>
-          <a:prstGeom prst="rect">
-            <a:avLst/>
-          </a:prstGeom>
-          <a:solidFill>
-            <a:srgbClr val="2E4F7A"/>
-          </a:solidFill>
-          <a:ln>
-            <a:noFill/>
-          </a:ln>
-          <a:effectLst/>
-        </p:spPr>
-        <p:style>
-          <a:lnRef idx="1">
-            <a:schemeClr val="accent1"/>
-          </a:lnRef>
-          <a:fillRef idx="3">
-            <a:schemeClr val="accent1"/>
-          </a:fillRef>
-          <a:effectRef idx="2">
-            <a:schemeClr val="accent1"/>
-          </a:effectRef>
-          <a:fontRef idx="minor">
-            <a:schemeClr val="lt1"/>
-          </a:fontRef>
-        </p:style>
-        <p:txBody>
-          <a:bodyPr rtlCol="0" anchor="ctr"/>
-          <a:lstStyle/>
-          <a:p>
-            <a:pPr algn="ctr"/>
-          </a:p>
-        </p:txBody>
-      </p:sp>
-      <p:sp>
-        <p:nvSpPr>
-          <p:cNvPr id="22" name="TextBox 21"/>
-          <p:cNvSpPr txBox="1"/>
-          <p:nvPr/>
-        </p:nvSpPr>
-        <p:spPr>
-          <a:xfrm>
-            <a:off x="6511899" y="3493007"/>
-            <a:ext cx="4911699" cy="274320"/>
-          </a:xfrm>
-          <a:prstGeom prst="rect">
-            <a:avLst/>
-          </a:prstGeom>
-          <a:noFill/>
-        </p:spPr>
-        <p:txBody>
-          <a:bodyPr wrap="square" anchor="t" lIns="0" rIns="0" tIns="0" bIns="0">
-            <a:spAutoFit/>
-          </a:bodyPr>
-          <a:lstStyle/>
-          <a:p>
-            <a:pPr algn="l">
-              <a:lnSpc>
-                <a:spcPct val="120000"/>
-              </a:lnSpc>
-              <a:spcAft>
-                <a:spcPts val="0"/>
-              </a:spcAft>
-            </a:pPr>
-            <a:r>
-              <a:rPr sz="1350" b="1">
-                <a:solidFill>
-                  <a:srgbClr val="2E4F7A"/>
-                </a:solidFill>
-                <a:latin typeface="Trebuchet MS"/>
-              </a:rPr>
-              <a:t>? Der Kunde sagt, er hat nichts bekommen.</a:t>
-            </a:r>
-          </a:p>
-        </p:txBody>
-      </p:sp>
-      <p:sp>
-        <p:nvSpPr>
-          <p:cNvPr id="23" name="TextBox 22"/>
-          <p:cNvSpPr txBox="1"/>
-          <p:nvPr/>
-        </p:nvSpPr>
-        <p:spPr>
-          <a:xfrm>
-            <a:off x="6511899" y="3794759"/>
-            <a:ext cx="4911699" cy="914400"/>
-          </a:xfrm>
-          <a:prstGeom prst="rect">
-            <a:avLst/>
-          </a:prstGeom>
-          <a:noFill/>
-        </p:spPr>
-        <p:txBody>
-          <a:bodyPr wrap="square" anchor="t" lIns="0" rIns="0" tIns="0" bIns="0">
-            <a:spAutoFit/>
-          </a:bodyPr>
-          <a:lstStyle/>
-          <a:p>
-            <a:pPr algn="l">
-              <a:lnSpc>
-                <a:spcPct val="120000"/>
-              </a:lnSpc>
-              <a:spcAft>
-                <a:spcPts val="100"/>
-              </a:spcAft>
-            </a:pPr>
-            <a:r>
-              <a:rPr sz="1300" b="0">
-                <a:solidFill>
-                  <a:srgbClr val="2A2824"/>
-                </a:solidFill>
-                <a:latin typeface="Trebuchet MS"/>
-              </a:rPr>
-              <a:t>Rechnung öffnen: Steht der Status auf </a:t>
-            </a:r>
-            <a:r>
-              <a:rPr sz="1300" b="1">
-                <a:solidFill>
-                  <a:srgbClr val="2A2824"/>
-                </a:solidFill>
-                <a:latin typeface="Trebuchet MS"/>
-              </a:rPr>
-              <a:t>Gesendet</a:t>
-            </a:r>
-            <a:r>
-              <a:rPr sz="1300" b="0">
-                <a:solidFill>
-                  <a:srgbClr val="2A2824"/>
-                </a:solidFill>
-                <a:latin typeface="Trebuchet MS"/>
-              </a:rPr>
-              <a:t>? Der </a:t>
-            </a:r>
-            <a:r>
-              <a:rPr sz="1300" b="1">
+                <a:spcPts val="400"/>
+              </a:spcAft>
+            </a:pPr>
+            <a:r>
+              <a:rPr sz="1400" b="0">
+                <a:solidFill>
+                  <a:srgbClr val="2A2824"/>
+                </a:solidFill>
+                <a:latin typeface="Trebuchet MS"/>
+              </a:rPr>
+              <a:t>Oben im Menü unter </a:t>
+            </a:r>
+            <a:r>
+              <a:rPr sz="1400" b="1">
+                <a:solidFill>
+                  <a:srgbClr val="2A2824"/>
+                </a:solidFill>
+                <a:latin typeface="Trebuchet MS"/>
+              </a:rPr>
+              <a:t>„Protokoll“</a:t>
+            </a:r>
+            <a:r>
+              <a:rPr sz="1400" b="0">
+                <a:solidFill>
+                  <a:srgbClr val="2A2824"/>
+                </a:solidFill>
+                <a:latin typeface="Trebuchet MS"/>
+              </a:rPr>
+              <a:t> (1) steht jede Aktion mit Zeit und Benutzer — auch, an welche Adresse verschickt wurde. In jeder Rechnung steht unten derselbe </a:t>
+            </a:r>
+            <a:r>
+              <a:rPr sz="1400" b="1">
                 <a:solidFill>
                   <a:srgbClr val="2A2824"/>
                 </a:solidFill>
@@ -18339,223 +18240,13 @@
               <a:t>Verlauf</a:t>
             </a:r>
             <a:r>
-              <a:rPr sz="1300" b="0">
-                <a:solidFill>
-                  <a:srgbClr val="2A2824"/>
-                </a:solidFill>
-                <a:latin typeface="Trebuchet MS"/>
-              </a:rPr>
-              <a:t> zeigt Adresse und Uhrzeit. Bitten Sie den Kunden, im </a:t>
-            </a:r>
-            <a:r>
-              <a:rPr sz="1300" b="1">
-                <a:solidFill>
-                  <a:srgbClr val="2A2824"/>
-                </a:solidFill>
-                <a:latin typeface="Trebuchet MS"/>
-              </a:rPr>
-              <a:t>Spam-Ordner</a:t>
-            </a:r>
-            <a:r>
-              <a:rPr sz="1300" b="0">
-                <a:solidFill>
-                  <a:srgbClr val="2A2824"/>
-                </a:solidFill>
-                <a:latin typeface="Trebuchet MS"/>
-              </a:rPr>
-              <a:t> nachzusehen. Stand oben „Testlauf“, ging nichts hinaus. Sonst: Rechnungsnummer an die IT.</a:t>
-            </a:r>
-          </a:p>
-        </p:txBody>
-      </p:sp>
-      <p:sp>
-        <p:nvSpPr>
-          <p:cNvPr id="24" name="Rounded Rectangle 23"/>
-          <p:cNvSpPr/>
-          <p:nvPr/>
-        </p:nvSpPr>
-        <p:spPr>
-          <a:xfrm>
-            <a:off x="640080" y="4663440"/>
-            <a:ext cx="5295747" cy="1152144"/>
-          </a:xfrm>
-          <a:prstGeom prst="roundRect">
-            <a:avLst>
-              <a:gd name="adj" fmla="val 8000"/>
-            </a:avLst>
-          </a:prstGeom>
-          <a:solidFill>
-            <a:srgbClr val="E2EAF4"/>
-          </a:solidFill>
-          <a:ln>
-            <a:noFill/>
-          </a:ln>
-          <a:effectLst/>
-        </p:spPr>
-        <p:style>
-          <a:lnRef idx="1">
-            <a:schemeClr val="accent1"/>
-          </a:lnRef>
-          <a:fillRef idx="3">
-            <a:schemeClr val="accent1"/>
-          </a:fillRef>
-          <a:effectRef idx="2">
-            <a:schemeClr val="accent1"/>
-          </a:effectRef>
-          <a:fontRef idx="minor">
-            <a:schemeClr val="lt1"/>
-          </a:fontRef>
-        </p:style>
-        <p:txBody>
-          <a:bodyPr rtlCol="0" anchor="ctr"/>
-          <a:lstStyle/>
-          <a:p>
-            <a:pPr algn="ctr"/>
-          </a:p>
-        </p:txBody>
-      </p:sp>
-      <p:sp>
-        <p:nvSpPr>
-          <p:cNvPr id="25" name="Rectangle 24"/>
-          <p:cNvSpPr/>
-          <p:nvPr/>
-        </p:nvSpPr>
-        <p:spPr>
-          <a:xfrm>
-            <a:off x="640080" y="4663440"/>
-            <a:ext cx="82296" cy="1152144"/>
-          </a:xfrm>
-          <a:prstGeom prst="rect">
-            <a:avLst/>
-          </a:prstGeom>
-          <a:solidFill>
-            <a:srgbClr val="2E4F7A"/>
-          </a:solidFill>
-          <a:ln>
-            <a:noFill/>
-          </a:ln>
-          <a:effectLst/>
-        </p:spPr>
-        <p:style>
-          <a:lnRef idx="1">
-            <a:schemeClr val="accent1"/>
-          </a:lnRef>
-          <a:fillRef idx="3">
-            <a:schemeClr val="accent1"/>
-          </a:fillRef>
-          <a:effectRef idx="2">
-            <a:schemeClr val="accent1"/>
-          </a:effectRef>
-          <a:fontRef idx="minor">
-            <a:schemeClr val="lt1"/>
-          </a:fontRef>
-        </p:style>
-        <p:txBody>
-          <a:bodyPr rtlCol="0" anchor="ctr"/>
-          <a:lstStyle/>
-          <a:p>
-            <a:pPr algn="ctr"/>
-          </a:p>
-        </p:txBody>
-      </p:sp>
-      <p:sp>
-        <p:nvSpPr>
-          <p:cNvPr id="26" name="TextBox 25"/>
-          <p:cNvSpPr txBox="1"/>
-          <p:nvPr/>
-        </p:nvSpPr>
-        <p:spPr>
-          <a:xfrm>
-            <a:off x="896112" y="4773168"/>
-            <a:ext cx="4911699" cy="274320"/>
-          </a:xfrm>
-          <a:prstGeom prst="rect">
-            <a:avLst/>
-          </a:prstGeom>
-          <a:noFill/>
-        </p:spPr>
-        <p:txBody>
-          <a:bodyPr wrap="square" anchor="t" lIns="0" rIns="0" tIns="0" bIns="0">
-            <a:spAutoFit/>
-          </a:bodyPr>
-          <a:lstStyle/>
-          <a:p>
-            <a:pPr algn="l">
-              <a:lnSpc>
-                <a:spcPct val="120000"/>
-              </a:lnSpc>
-              <a:spcAft>
-                <a:spcPts val="0"/>
-              </a:spcAft>
-            </a:pPr>
-            <a:r>
-              <a:rPr sz="1350" b="1">
-                <a:solidFill>
-                  <a:srgbClr val="2E4F7A"/>
-                </a:solidFill>
-                <a:latin typeface="Trebuchet MS"/>
-              </a:rPr>
-              <a:t>? Ich habe an die falsche Adresse verschickt.</a:t>
-            </a:r>
-          </a:p>
-        </p:txBody>
-      </p:sp>
-      <p:sp>
-        <p:nvSpPr>
-          <p:cNvPr id="27" name="TextBox 26"/>
-          <p:cNvSpPr txBox="1"/>
-          <p:nvPr/>
-        </p:nvSpPr>
-        <p:spPr>
-          <a:xfrm>
-            <a:off x="896112" y="5074920"/>
-            <a:ext cx="4911699" cy="685800"/>
-          </a:xfrm>
-          <a:prstGeom prst="rect">
-            <a:avLst/>
-          </a:prstGeom>
-          <a:noFill/>
-        </p:spPr>
-        <p:txBody>
-          <a:bodyPr wrap="square" anchor="t" lIns="0" rIns="0" tIns="0" bIns="0">
-            <a:spAutoFit/>
-          </a:bodyPr>
-          <a:lstStyle/>
-          <a:p>
-            <a:pPr algn="l">
-              <a:lnSpc>
-                <a:spcPct val="120000"/>
-              </a:lnSpc>
-              <a:spcAft>
-                <a:spcPts val="100"/>
-              </a:spcAft>
-            </a:pPr>
-            <a:r>
-              <a:rPr sz="1300" b="0">
-                <a:solidFill>
-                  <a:srgbClr val="2A2824"/>
-                </a:solidFill>
-                <a:latin typeface="Trebuchet MS"/>
-              </a:rPr>
-              <a:t>Im Programm lässt sich das nicht rückgängig machen oder neu verschicken. Geben Sie </a:t>
-            </a:r>
-            <a:r>
-              <a:rPr sz="1300" b="1">
-                <a:solidFill>
-                  <a:srgbClr val="2A2824"/>
-                </a:solidFill>
-                <a:latin typeface="Trebuchet MS"/>
-              </a:rPr>
-              <a:t>sofort</a:t>
-            </a:r>
-            <a:r>
-              <a:rPr sz="1300" b="0">
-                <a:solidFill>
-                  <a:srgbClr val="2A2824"/>
-                </a:solidFill>
-                <a:latin typeface="Trebuchet MS"/>
-              </a:rPr>
-              <a:t> Rechnungsnummer und die richtige Adresse an die IT.</a:t>
+              <a:rPr sz="1400" b="0">
+                <a:solidFill>
+                  <a:srgbClr val="2A2824"/>
+                </a:solidFill>
+                <a:latin typeface="Trebuchet MS"/>
+              </a:rPr>
+              <a:t> nur für diese Rechnung.</a:t>
             </a:r>
           </a:p>
         </p:txBody>
@@ -18745,7 +18436,7 @@
                 </a:solidFill>
                 <a:latin typeface="Georgia"/>
               </a:rPr>
-              <a:t>Fragen, die oft kommen (2/3)</a:t>
+              <a:t>Fragen, die oft kommen (1/3)</a:t>
             </a:r>
           </a:p>
         </p:txBody>
@@ -18787,7 +18478,7 @@
                 </a:solidFill>
                 <a:latin typeface="Trebuchet MS"/>
               </a:rPr>
-              <a:t>XRechnung · Anleitung für den Alltag · Stand 16.09.2026 · Bilder mit Musterdaten</a:t>
+              <a:t>XRechnung · Anleitung für den Alltag · Stand 30.10.2026 · Bilder mit Musterdaten</a:t>
             </a:r>
           </a:p>
         </p:txBody>
@@ -18933,7 +18624,7 @@
         <p:spPr>
           <a:xfrm>
             <a:off x="896112" y="1527048"/>
-            <a:ext cx="4911699" cy="548640"/>
+            <a:ext cx="4911699" cy="274320"/>
           </a:xfrm>
           <a:prstGeom prst="rect">
             <a:avLst/>
@@ -18961,7 +18652,7 @@
                 </a:solidFill>
                 <a:latin typeface="Trebuchet MS"/>
               </a:rPr>
-              <a:t>? Der Kunde möchte seine Bestellnummer auf der Rechnung.</a:t>
+              <a:t>? Warum steht eine Rechnung nicht in der Liste?</a:t>
             </a:r>
           </a:p>
         </p:txBody>
@@ -18974,8 +18665,8 @@
         </p:nvSpPr>
         <p:spPr>
           <a:xfrm>
-            <a:off x="896112" y="2057400"/>
-            <a:ext cx="4911699" cy="914400"/>
+            <a:off x="896112" y="1828800"/>
+            <a:ext cx="4911699" cy="1143000"/>
           </a:xfrm>
           <a:prstGeom prst="rect">
             <a:avLst/>
@@ -19003,7 +18694,7 @@
                 </a:solidFill>
                 <a:latin typeface="Trebuchet MS"/>
               </a:rPr>
-              <a:t>Noch nicht verschickt: in der Rechnung unter </a:t>
+              <a:t>Aufgenommen werden nur </a:t>
             </a:r>
             <a:r>
               <a:rPr sz="1300" b="1">
@@ -19012,7 +18703,7 @@
                 </a:solidFill>
                 <a:latin typeface="Trebuchet MS"/>
               </a:rPr>
-              <a:t>Käuferreferenz</a:t>
+              <a:t>abgeschlossene Firmenrechnungen an Kunden in Deutschland</a:t>
             </a:r>
             <a:r>
               <a:rPr sz="1300" b="0">
@@ -19021,7 +18712,7 @@
                 </a:solidFill>
                 <a:latin typeface="Trebuchet MS"/>
               </a:rPr>
-              <a:t> eintragen. Schon verschickt: an die IT. Für die Zukunft: Empfang trägt sie </a:t>
+              <a:t> aus dem eingestellten Zeitraum. Suchen Sie nach der </a:t>
             </a:r>
             <a:r>
               <a:rPr sz="1300" b="1">
@@ -19030,7 +18721,7 @@
                 </a:solidFill>
                 <a:latin typeface="Trebuchet MS"/>
               </a:rPr>
-              <a:t>vor dem Check-out</a:t>
+              <a:t>Rechnungsnummer</a:t>
             </a:r>
             <a:r>
               <a:rPr sz="1300" b="0">
@@ -19039,7 +18730,7 @@
                 </a:solidFill>
                 <a:latin typeface="Trebuchet MS"/>
               </a:rPr>
-              <a:t> in „Buyer Reference1“ ein.</a:t>
+              <a:t> — findet das Programm sie in OPERA, holen Sie sie mit „In die Liste holen“.</a:t>
             </a:r>
           </a:p>
         </p:txBody>
@@ -19053,7 +18744,7 @@
         <p:spPr>
           <a:xfrm>
             <a:off x="6255867" y="1417320"/>
-            <a:ext cx="5295747" cy="1152144"/>
+            <a:ext cx="5295747" cy="1837943"/>
           </a:xfrm>
           <a:prstGeom prst="roundRect">
             <a:avLst>
@@ -19099,7 +18790,7 @@
         <p:spPr>
           <a:xfrm>
             <a:off x="6255867" y="1417320"/>
-            <a:ext cx="82296" cy="1152144"/>
+            <a:ext cx="82296" cy="1837943"/>
           </a:xfrm>
           <a:prstGeom prst="rect">
             <a:avLst/>
@@ -19143,7 +18834,7 @@
         <p:spPr>
           <a:xfrm>
             <a:off x="6511899" y="1527048"/>
-            <a:ext cx="4911699" cy="274320"/>
+            <a:ext cx="4911699" cy="548640"/>
           </a:xfrm>
           <a:prstGeom prst="rect">
             <a:avLst/>
@@ -19171,7 +18862,7 @@
                 </a:solidFill>
                 <a:latin typeface="Trebuchet MS"/>
               </a:rPr>
-              <a:t>? Der Betrag stimmt nicht.</a:t>
+              <a:t>? Warum wurde eine Rechnung nicht automatisch verschickt?</a:t>
             </a:r>
           </a:p>
         </p:txBody>
@@ -19184,8 +18875,8 @@
         </p:nvSpPr>
         <p:spPr>
           <a:xfrm>
-            <a:off x="6511899" y="1828800"/>
-            <a:ext cx="4911699" cy="685800"/>
+            <a:off x="6511899" y="2057400"/>
+            <a:ext cx="4911699" cy="1143000"/>
           </a:xfrm>
           <a:prstGeom prst="rect">
             <a:avLst/>
@@ -19213,7 +18904,7 @@
                 </a:solidFill>
                 <a:latin typeface="Trebuchet MS"/>
               </a:rPr>
-              <a:t>Das Programm übernimmt die Beträge aus OPERA, es rechnet nichts um. Die Rechnung </a:t>
+              <a:t>Mögliche Gründe: Status </a:t>
             </a:r>
             <a:r>
               <a:rPr sz="1300" b="1">
@@ -19222,7 +18913,7 @@
                 </a:solidFill>
                 <a:latin typeface="Trebuchet MS"/>
               </a:rPr>
-              <a:t>in OPERA</a:t>
+              <a:t>Prüfung</a:t>
             </a:r>
             <a:r>
               <a:rPr sz="1300" b="0">
@@ -19231,7 +18922,7 @@
                 </a:solidFill>
                 <a:latin typeface="Trebuchet MS"/>
               </a:rPr>
-              <a:t> korrigieren lassen. Die falsche </a:t>
+              <a:t> oder </a:t>
             </a:r>
             <a:r>
               <a:rPr sz="1300" b="1">
@@ -19240,7 +18931,7 @@
                 </a:solidFill>
                 <a:latin typeface="Trebuchet MS"/>
               </a:rPr>
-              <a:t>nicht</a:t>
+              <a:t>Fehler</a:t>
             </a:r>
             <a:r>
               <a:rPr sz="1300" b="0">
@@ -19249,7 +18940,97 @@
                 </a:solidFill>
                 <a:latin typeface="Trebuchet MS"/>
               </a:rPr>
-              <a:t> versenden, sondern zurücklegen.</a:t>
+              <a:t> · </a:t>
+            </a:r>
+            <a:r>
+              <a:rPr sz="1300" b="1">
+                <a:solidFill>
+                  <a:srgbClr val="2A2824"/>
+                </a:solidFill>
+                <a:latin typeface="Trebuchet MS"/>
+              </a:rPr>
+              <a:t>kein Empfänger</a:t>
+            </a:r>
+            <a:r>
+              <a:rPr sz="1300" b="0">
+                <a:solidFill>
+                  <a:srgbClr val="2A2824"/>
+                </a:solidFill>
+                <a:latin typeface="Trebuchet MS"/>
+              </a:rPr>
+              <a:t> gewählt · die </a:t>
+            </a:r>
+            <a:r>
+              <a:rPr sz="1300" b="1">
+                <a:solidFill>
+                  <a:srgbClr val="2A2824"/>
+                </a:solidFill>
+                <a:latin typeface="Trebuchet MS"/>
+              </a:rPr>
+              <a:t>Wartezeit</a:t>
+            </a:r>
+            <a:r>
+              <a:rPr sz="1300" b="0">
+                <a:solidFill>
+                  <a:srgbClr val="2A2824"/>
+                </a:solidFill>
+                <a:latin typeface="Trebuchet MS"/>
+              </a:rPr>
+              <a:t> läuft noch · Automatik ist </a:t>
+            </a:r>
+            <a:r>
+              <a:rPr sz="1300" b="1">
+                <a:solidFill>
+                  <a:srgbClr val="2A2824"/>
+                </a:solidFill>
+                <a:latin typeface="Trebuchet MS"/>
+              </a:rPr>
+              <a:t>aus</a:t>
+            </a:r>
+            <a:r>
+              <a:rPr sz="1300" b="0">
+                <a:solidFill>
+                  <a:srgbClr val="2A2824"/>
+                </a:solidFill>
+                <a:latin typeface="Trebuchet MS"/>
+              </a:rPr>
+              <a:t> oder im </a:t>
+            </a:r>
+            <a:r>
+              <a:rPr sz="1300" b="1">
+                <a:solidFill>
+                  <a:srgbClr val="2A2824"/>
+                </a:solidFill>
+                <a:latin typeface="Trebuchet MS"/>
+              </a:rPr>
+              <a:t>Testlauf</a:t>
+            </a:r>
+            <a:r>
+              <a:rPr sz="1300" b="0">
+                <a:solidFill>
+                  <a:srgbClr val="2A2824"/>
+                </a:solidFill>
+                <a:latin typeface="Trebuchet MS"/>
+              </a:rPr>
+              <a:t> · Rechnungen über das </a:t>
+            </a:r>
+            <a:r>
+              <a:rPr sz="1300" b="1">
+                <a:solidFill>
+                  <a:srgbClr val="2A2824"/>
+                </a:solidFill>
+                <a:latin typeface="Trebuchet MS"/>
+              </a:rPr>
+              <a:t>Debitorenkonto</a:t>
+            </a:r>
+            <a:r>
+              <a:rPr sz="1300" b="0">
+                <a:solidFill>
+                  <a:srgbClr val="2A2824"/>
+                </a:solidFill>
+                <a:latin typeface="Trebuchet MS"/>
+              </a:rPr>
+              <a:t> gehen in der Grundeinstellung nur von Hand hinaus.</a:t>
             </a:r>
           </a:p>
         </p:txBody>
@@ -19262,7 +19043,7 @@
         </p:nvSpPr>
         <p:spPr>
           <a:xfrm>
-            <a:off x="6255867" y="2697480"/>
+            <a:off x="640080" y="3154680"/>
             <a:ext cx="5295747" cy="1380744"/>
           </a:xfrm>
           <a:prstGeom prst="roundRect">
@@ -19308,7 +19089,7 @@
         </p:nvSpPr>
         <p:spPr>
           <a:xfrm>
-            <a:off x="6255867" y="2697480"/>
+            <a:off x="640080" y="3154680"/>
             <a:ext cx="82296" cy="1380744"/>
           </a:xfrm>
           <a:prstGeom prst="rect">
@@ -19352,7 +19133,7 @@
         </p:nvSpPr>
         <p:spPr>
           <a:xfrm>
-            <a:off x="6511899" y="2807208"/>
+            <a:off x="896112" y="3264408"/>
             <a:ext cx="4911699" cy="274320"/>
           </a:xfrm>
           <a:prstGeom prst="rect">
@@ -19381,7 +19162,7 @@
                 </a:solidFill>
                 <a:latin typeface="Trebuchet MS"/>
               </a:rPr>
-              <a:t>? Bei einer Gruppe fehlen die Namen der Gäste.</a:t>
+              <a:t>? Ich kann nicht auf „Jetzt versenden“ klicken.</a:t>
             </a:r>
           </a:p>
         </p:txBody>
@@ -19394,7 +19175,7 @@
         </p:nvSpPr>
         <p:spPr>
           <a:xfrm>
-            <a:off x="6511899" y="3108960"/>
+            <a:off x="896112" y="3566160"/>
             <a:ext cx="4911699" cy="914400"/>
           </a:xfrm>
           <a:prstGeom prst="rect">
@@ -19423,7 +19204,7 @@
                 </a:solidFill>
                 <a:latin typeface="Trebuchet MS"/>
               </a:rPr>
-              <a:t>Unter </a:t>
+              <a:t>Der Knopf ist </a:t>
             </a:r>
             <a:r>
               <a:rPr sz="1300" b="1">
@@ -19432,7 +19213,7 @@
                 </a:solidFill>
                 <a:latin typeface="Trebuchet MS"/>
               </a:rPr>
-              <a:t>„Positionen“</a:t>
+              <a:t>grau</a:t>
             </a:r>
             <a:r>
               <a:rPr sz="1300" b="0">
@@ -19441,7 +19222,7 @@
                 </a:solidFill>
                 <a:latin typeface="Trebuchet MS"/>
               </a:rPr>
-              <a:t> die Art </a:t>
+              <a:t>, wenn kein Empfänger gewählt ist, die Prüfung rot ist oder die Rechnung schon verschickt oder zurückgelegt wurde. </a:t>
             </a:r>
             <a:r>
               <a:rPr sz="1300" b="1">
@@ -19450,7 +19231,7 @@
                 </a:solidFill>
                 <a:latin typeface="Trebuchet MS"/>
               </a:rPr>
-              <a:t>„Je Gast und Zimmer“</a:t>
+              <a:t>Fehlt</a:t>
             </a:r>
             <a:r>
               <a:rPr sz="1300" b="0">
@@ -19459,7 +19240,7 @@
                 </a:solidFill>
                 <a:latin typeface="Trebuchet MS"/>
               </a:rPr>
-              <a:t> wählen und „Übernehmen“. Das Programm wählt sie normalerweise selbst, sobald mehrere Reservierungen auf der Rechnung sind.</a:t>
+              <a:t> der Knopf ganz, hat Ihr Zugang die Rolle „ansehen“ — fragen Sie die IT.</a:t>
             </a:r>
           </a:p>
         </p:txBody>
@@ -19472,8 +19253,8 @@
         </p:nvSpPr>
         <p:spPr>
           <a:xfrm>
-            <a:off x="640080" y="3154680"/>
-            <a:ext cx="5295747" cy="1152144"/>
+            <a:off x="6255867" y="3383279"/>
+            <a:ext cx="5295747" cy="1380744"/>
           </a:xfrm>
           <a:prstGeom prst="roundRect">
             <a:avLst>
@@ -19518,8 +19299,8 @@
         </p:nvSpPr>
         <p:spPr>
           <a:xfrm>
-            <a:off x="640080" y="3154680"/>
-            <a:ext cx="82296" cy="1152144"/>
+            <a:off x="6255867" y="3383279"/>
+            <a:ext cx="82296" cy="1380744"/>
           </a:xfrm>
           <a:prstGeom prst="rect">
             <a:avLst/>
@@ -19562,7 +19343,7 @@
         </p:nvSpPr>
         <p:spPr>
           <a:xfrm>
-            <a:off x="896112" y="3264408"/>
+            <a:off x="6511899" y="3493007"/>
             <a:ext cx="4911699" cy="274320"/>
           </a:xfrm>
           <a:prstGeom prst="rect">
@@ -19591,7 +19372,7 @@
                 </a:solidFill>
                 <a:latin typeface="Trebuchet MS"/>
               </a:rPr>
-              <a:t>? Muss ich zusätzlich ein PDF schicken?</a:t>
+              <a:t>? Der Kunde sagt, er hat nichts bekommen.</a:t>
             </a:r>
           </a:p>
         </p:txBody>
@@ -19604,8 +19385,8 @@
         </p:nvSpPr>
         <p:spPr>
           <a:xfrm>
-            <a:off x="896112" y="3566160"/>
-            <a:ext cx="4911699" cy="685800"/>
+            <a:off x="6511899" y="3794759"/>
+            <a:ext cx="4911699" cy="914400"/>
           </a:xfrm>
           <a:prstGeom prst="rect">
             <a:avLst/>
@@ -19633,7 +19414,7 @@
                 </a:solidFill>
                 <a:latin typeface="Trebuchet MS"/>
               </a:rPr>
-              <a:t>Die E-Mail enthält die </a:t>
+              <a:t>Rechnung öffnen: Steht der Status auf </a:t>
             </a:r>
             <a:r>
               <a:rPr sz="1300" b="1">
@@ -19642,7 +19423,7 @@
                 </a:solidFill>
                 <a:latin typeface="Trebuchet MS"/>
               </a:rPr>
-              <a:t>XML-Datei</a:t>
+              <a:t>Gesendet</a:t>
             </a:r>
             <a:r>
               <a:rPr sz="1300" b="0">
@@ -19651,7 +19432,7 @@
                 </a:solidFill>
                 <a:latin typeface="Trebuchet MS"/>
               </a:rPr>
-              <a:t> — das ist die Rechnung. Ein PDF hängt derzeit </a:t>
+              <a:t>? Der </a:t>
             </a:r>
             <a:r>
               <a:rPr sz="1300" b="1">
@@ -19660,7 +19441,7 @@
                 </a:solidFill>
                 <a:latin typeface="Trebuchet MS"/>
               </a:rPr>
-              <a:t>nicht</a:t>
+              <a:t>Verlauf</a:t>
             </a:r>
             <a:r>
               <a:rPr sz="1300" b="0">
@@ -19669,7 +19450,25 @@
                 </a:solidFill>
                 <a:latin typeface="Trebuchet MS"/>
               </a:rPr>
-              <a:t> mit. Möchte der Kunde eines, schicken Sie es wie gewohnt aus OPERA.</a:t>
+              <a:t> zeigt Adresse und Uhrzeit. Bitten Sie den Kunden, im </a:t>
+            </a:r>
+            <a:r>
+              <a:rPr sz="1300" b="1">
+                <a:solidFill>
+                  <a:srgbClr val="2A2824"/>
+                </a:solidFill>
+                <a:latin typeface="Trebuchet MS"/>
+              </a:rPr>
+              <a:t>Spam-Ordner</a:t>
+            </a:r>
+            <a:r>
+              <a:rPr sz="1300" b="0">
+                <a:solidFill>
+                  <a:srgbClr val="2A2824"/>
+                </a:solidFill>
+                <a:latin typeface="Trebuchet MS"/>
+              </a:rPr>
+              <a:t> nachzusehen. Stand oben „Testlauf“, ging nichts hinaus. Sonst: Rechnungsnummer an die IT.</a:t>
             </a:r>
           </a:p>
         </p:txBody>
@@ -19682,8 +19481,8 @@
         </p:nvSpPr>
         <p:spPr>
           <a:xfrm>
-            <a:off x="6255867" y="4206240"/>
-            <a:ext cx="5295747" cy="1380744"/>
+            <a:off x="640080" y="4663440"/>
+            <a:ext cx="5295747" cy="1152144"/>
           </a:xfrm>
           <a:prstGeom prst="roundRect">
             <a:avLst>
@@ -19728,8 +19527,8 @@
         </p:nvSpPr>
         <p:spPr>
           <a:xfrm>
-            <a:off x="6255867" y="4206240"/>
-            <a:ext cx="82296" cy="1380744"/>
+            <a:off x="640080" y="4663440"/>
+            <a:ext cx="82296" cy="1152144"/>
           </a:xfrm>
           <a:prstGeom prst="rect">
             <a:avLst/>
@@ -19772,8 +19571,8 @@
         </p:nvSpPr>
         <p:spPr>
           <a:xfrm>
-            <a:off x="6511899" y="4315968"/>
-            <a:ext cx="4911699" cy="548640"/>
+            <a:off x="896112" y="4773168"/>
+            <a:ext cx="4911699" cy="274320"/>
           </a:xfrm>
           <a:prstGeom prst="rect">
             <a:avLst/>
@@ -19801,7 +19600,7 @@
                 </a:solidFill>
                 <a:latin typeface="Trebuchet MS"/>
               </a:rPr>
-              <a:t>? Oben steht „Automatik arbeitet“, die Knöpfe sind grau.</a:t>
+              <a:t>? Ich habe an die falsche Adresse verschickt.</a:t>
             </a:r>
           </a:p>
         </p:txBody>
@@ -19814,7 +19613,7 @@
         </p:nvSpPr>
         <p:spPr>
           <a:xfrm>
-            <a:off x="6511899" y="4846320"/>
+            <a:off x="896112" y="5074920"/>
             <a:ext cx="4911699" cy="685800"/>
           </a:xfrm>
           <a:prstGeom prst="rect">
@@ -19843,7 +19642,25 @@
                 </a:solidFill>
                 <a:latin typeface="Trebuchet MS"/>
               </a:rPr>
-              <a:t>Dann läuft gerade ein automatischer Durchlauf; er dauert meist Sekunden. Kurz warten und die Seite neu laden — danach sind Einlesen und Versenden wieder frei.</a:t>
+              <a:t>Im Programm lässt sich das nicht rückgängig machen oder neu verschicken. Geben Sie </a:t>
+            </a:r>
+            <a:r>
+              <a:rPr sz="1300" b="1">
+                <a:solidFill>
+                  <a:srgbClr val="2A2824"/>
+                </a:solidFill>
+                <a:latin typeface="Trebuchet MS"/>
+              </a:rPr>
+              <a:t>sofort</a:t>
+            </a:r>
+            <a:r>
+              <a:rPr sz="1300" b="0">
+                <a:solidFill>
+                  <a:srgbClr val="2A2824"/>
+                </a:solidFill>
+                <a:latin typeface="Trebuchet MS"/>
+              </a:rPr>
+              <a:t> Rechnungsnummer und die richtige Adresse an die IT.</a:t>
             </a:r>
           </a:p>
         </p:txBody>
@@ -20033,7 +19850,7 @@
                 </a:solidFill>
                 <a:latin typeface="Georgia"/>
               </a:rPr>
-              <a:t>Fragen, die oft kommen (3/3)</a:t>
+              <a:t>Fragen, die oft kommen (2/3)</a:t>
             </a:r>
           </a:p>
         </p:txBody>
@@ -20075,7 +19892,7 @@
                 </a:solidFill>
                 <a:latin typeface="Trebuchet MS"/>
               </a:rPr>
-              <a:t>XRechnung · Anleitung für den Alltag · Stand 16.09.2026 · Bilder mit Musterdaten</a:t>
+              <a:t>XRechnung · Anleitung für den Alltag · Stand 30.10.2026 · Bilder mit Musterdaten</a:t>
             </a:r>
           </a:p>
         </p:txBody>
@@ -20131,7 +19948,7 @@
         <p:spPr>
           <a:xfrm>
             <a:off x="640080" y="1417320"/>
-            <a:ext cx="5295747" cy="1380744"/>
+            <a:ext cx="5295747" cy="1609344"/>
           </a:xfrm>
           <a:prstGeom prst="roundRect">
             <a:avLst>
@@ -20177,7 +19994,7 @@
         <p:spPr>
           <a:xfrm>
             <a:off x="640080" y="1417320"/>
-            <a:ext cx="82296" cy="1380744"/>
+            <a:ext cx="82296" cy="1609344"/>
           </a:xfrm>
           <a:prstGeom prst="rect">
             <a:avLst/>
@@ -20221,7 +20038,7 @@
         <p:spPr>
           <a:xfrm>
             <a:off x="896112" y="1527048"/>
-            <a:ext cx="4911699" cy="274320"/>
+            <a:ext cx="4911699" cy="548640"/>
           </a:xfrm>
           <a:prstGeom prst="rect">
             <a:avLst/>
@@ -20249,7 +20066,7 @@
                 </a:solidFill>
                 <a:latin typeface="Trebuchet MS"/>
               </a:rPr>
-              <a:t>? Was heißt „Ersatzwert“ bei der Käuferreferenz?</a:t>
+              <a:t>? Der Kunde möchte seine Bestellnummer auf der Rechnung.</a:t>
             </a:r>
           </a:p>
         </p:txBody>
@@ -20262,7 +20079,7 @@
         </p:nvSpPr>
         <p:spPr>
           <a:xfrm>
-            <a:off x="896112" y="1828800"/>
+            <a:off x="896112" y="2057400"/>
             <a:ext cx="4911699" cy="914400"/>
           </a:xfrm>
           <a:prstGeom prst="rect">
@@ -20291,7 +20108,7 @@
                 </a:solidFill>
                 <a:latin typeface="Trebuchet MS"/>
               </a:rPr>
-              <a:t>Der Kunde hat keine Bestellnummer hinterlegt, deshalb steht dort unsere Reservierungsnummer. Für Firmen ist das </a:t>
+              <a:t>Noch nicht verschickt: in der Rechnung unter </a:t>
             </a:r>
             <a:r>
               <a:rPr sz="1300" b="1">
@@ -20300,7 +20117,7 @@
                 </a:solidFill>
                 <a:latin typeface="Trebuchet MS"/>
               </a:rPr>
-              <a:t>in Ordnung</a:t>
+              <a:t>Käuferreferenz</a:t>
             </a:r>
             <a:r>
               <a:rPr sz="1300" b="0">
@@ -20309,7 +20126,7 @@
                 </a:solidFill>
                 <a:latin typeface="Trebuchet MS"/>
               </a:rPr>
-              <a:t>. Für </a:t>
+              <a:t> eintragen. Schon verschickt: an die IT. Für die Zukunft: Empfang trägt sie </a:t>
             </a:r>
             <a:r>
               <a:rPr sz="1300" b="1">
@@ -20318,7 +20135,7 @@
                 </a:solidFill>
                 <a:latin typeface="Trebuchet MS"/>
               </a:rPr>
-              <a:t>Behörden</a:t>
+              <a:t>vor dem Check-out</a:t>
             </a:r>
             <a:r>
               <a:rPr sz="1300" b="0">
@@ -20327,7 +20144,7 @@
                 </a:solidFill>
                 <a:latin typeface="Trebuchet MS"/>
               </a:rPr>
-              <a:t> nicht — die brauchen eine Leitweg-ID: bitte an die Buchhaltung.</a:t>
+              <a:t> in „Buyer Reference1“ ein.</a:t>
             </a:r>
           </a:p>
         </p:txBody>
@@ -20341,7 +20158,7 @@
         <p:spPr>
           <a:xfrm>
             <a:off x="6255867" y="1417320"/>
-            <a:ext cx="5295747" cy="923544"/>
+            <a:ext cx="5295747" cy="1152144"/>
           </a:xfrm>
           <a:prstGeom prst="roundRect">
             <a:avLst>
@@ -20387,7 +20204,7 @@
         <p:spPr>
           <a:xfrm>
             <a:off x="6255867" y="1417320"/>
-            <a:ext cx="82296" cy="923544"/>
+            <a:ext cx="82296" cy="1152144"/>
           </a:xfrm>
           <a:prstGeom prst="rect">
             <a:avLst/>
@@ -20459,7 +20276,7 @@
                 </a:solidFill>
                 <a:latin typeface="Trebuchet MS"/>
               </a:rPr>
-              <a:t>? Die XML-Datei sieht unleserlich aus.</a:t>
+              <a:t>? Der Betrag stimmt nicht.</a:t>
             </a:r>
           </a:p>
         </p:txBody>
@@ -20473,7 +20290,7 @@
         <p:spPr>
           <a:xfrm>
             <a:off x="6511899" y="1828800"/>
-            <a:ext cx="4911699" cy="457200"/>
+            <a:ext cx="4911699" cy="685800"/>
           </a:xfrm>
           <a:prstGeom prst="rect">
             <a:avLst/>
@@ -20501,7 +20318,7 @@
                 </a:solidFill>
                 <a:latin typeface="Trebuchet MS"/>
               </a:rPr>
-              <a:t>Das ist </a:t>
+              <a:t>Das Programm übernimmt die Beträge aus OPERA, es rechnet nichts um. Die Rechnung </a:t>
             </a:r>
             <a:r>
               <a:rPr sz="1300" b="1">
@@ -20510,7 +20327,7 @@
                 </a:solidFill>
                 <a:latin typeface="Trebuchet MS"/>
               </a:rPr>
-              <a:t>richtig so</a:t>
+              <a:t>in OPERA</a:t>
             </a:r>
             <a:r>
               <a:rPr sz="1300" b="0">
@@ -20519,7 +20336,25 @@
                 </a:solidFill>
                 <a:latin typeface="Trebuchet MS"/>
               </a:rPr>
-              <a:t>. Die Datei ist für das Buchhaltungsprogramm des Kunden gemacht, nicht zum Lesen.</a:t>
+              <a:t> korrigieren lassen. Die falsche </a:t>
+            </a:r>
+            <a:r>
+              <a:rPr sz="1300" b="1">
+                <a:solidFill>
+                  <a:srgbClr val="2A2824"/>
+                </a:solidFill>
+                <a:latin typeface="Trebuchet MS"/>
+              </a:rPr>
+              <a:t>nicht</a:t>
+            </a:r>
+            <a:r>
+              <a:rPr sz="1300" b="0">
+                <a:solidFill>
+                  <a:srgbClr val="2A2824"/>
+                </a:solidFill>
+                <a:latin typeface="Trebuchet MS"/>
+              </a:rPr>
+              <a:t> versenden, sondern zurücklegen.</a:t>
             </a:r>
           </a:p>
         </p:txBody>
@@ -20532,8 +20367,8 @@
         </p:nvSpPr>
         <p:spPr>
           <a:xfrm>
-            <a:off x="6255867" y="2468880"/>
-            <a:ext cx="5295747" cy="1152144"/>
+            <a:off x="6255867" y="2697480"/>
+            <a:ext cx="5295747" cy="1380744"/>
           </a:xfrm>
           <a:prstGeom prst="roundRect">
             <a:avLst>
@@ -20578,8 +20413,8 @@
         </p:nvSpPr>
         <p:spPr>
           <a:xfrm>
-            <a:off x="6255867" y="2468880"/>
-            <a:ext cx="82296" cy="1152144"/>
+            <a:off x="6255867" y="2697480"/>
+            <a:ext cx="82296" cy="1380744"/>
           </a:xfrm>
           <a:prstGeom prst="rect">
             <a:avLst/>
@@ -20622,7 +20457,7 @@
         </p:nvSpPr>
         <p:spPr>
           <a:xfrm>
-            <a:off x="6511899" y="2578608"/>
+            <a:off x="6511899" y="2807208"/>
             <a:ext cx="4911699" cy="274320"/>
           </a:xfrm>
           <a:prstGeom prst="rect">
@@ -20651,7 +20486,7 @@
                 </a:solidFill>
                 <a:latin typeface="Trebuchet MS"/>
               </a:rPr>
-              <a:t>? Kann ich etwas kaputt machen?</a:t>
+              <a:t>? Bei einer Gruppe fehlen die Namen der Gäste.</a:t>
             </a:r>
           </a:p>
         </p:txBody>
@@ -20664,8 +20499,8 @@
         </p:nvSpPr>
         <p:spPr>
           <a:xfrm>
-            <a:off x="6511899" y="2880360"/>
-            <a:ext cx="4911699" cy="685800"/>
+            <a:off x="6511899" y="3108960"/>
+            <a:ext cx="4911699" cy="914400"/>
           </a:xfrm>
           <a:prstGeom prst="rect">
             <a:avLst/>
@@ -20693,7 +20528,7 @@
                 </a:solidFill>
                 <a:latin typeface="Trebuchet MS"/>
               </a:rPr>
-              <a:t>In OPERA </a:t>
+              <a:t>Unter </a:t>
             </a:r>
             <a:r>
               <a:rPr sz="1300" b="1">
@@ -20702,7 +20537,7 @@
                 </a:solidFill>
                 <a:latin typeface="Trebuchet MS"/>
               </a:rPr>
-              <a:t>nein</a:t>
+              <a:t>„Positionen“</a:t>
             </a:r>
             <a:r>
               <a:rPr sz="1300" b="0">
@@ -20711,7 +20546,7 @@
                 </a:solidFill>
                 <a:latin typeface="Trebuchet MS"/>
               </a:rPr>
-              <a:t> — das Programm liest dort nur. „XML erzeugen“ und „Jetzt einlesen“ sind immer harmlos. Endgültig sind nur </a:t>
+              <a:t> die Art </a:t>
             </a:r>
             <a:r>
               <a:rPr sz="1300" b="1">
@@ -20720,7 +20555,7 @@
                 </a:solidFill>
                 <a:latin typeface="Trebuchet MS"/>
               </a:rPr>
-              <a:t>Versenden</a:t>
+              <a:t>„Je Gast und Zimmer“</a:t>
             </a:r>
             <a:r>
               <a:rPr sz="1300" b="0">
@@ -20729,25 +20564,7 @@
                 </a:solidFill>
                 <a:latin typeface="Trebuchet MS"/>
               </a:rPr>
-              <a:t> und </a:t>
-            </a:r>
-            <a:r>
-              <a:rPr sz="1300" b="1">
-                <a:solidFill>
-                  <a:srgbClr val="2A2824"/>
-                </a:solidFill>
-                <a:latin typeface="Trebuchet MS"/>
-              </a:rPr>
-              <a:t>Zurücklegen</a:t>
-            </a:r>
-            <a:r>
-              <a:rPr sz="1300" b="0">
-                <a:solidFill>
-                  <a:srgbClr val="2A2824"/>
-                </a:solidFill>
-                <a:latin typeface="Trebuchet MS"/>
-              </a:rPr>
-              <a:t>.</a:t>
+              <a:t> wählen und „Übernehmen“. Das Programm wählt sie normalerweise selbst, sobald mehrere Reservierungen auf der Rechnung sind.</a:t>
             </a:r>
           </a:p>
         </p:txBody>
@@ -20760,7 +20577,7 @@
         </p:nvSpPr>
         <p:spPr>
           <a:xfrm>
-            <a:off x="640080" y="2926080"/>
+            <a:off x="640080" y="3154680"/>
             <a:ext cx="5295747" cy="1152144"/>
           </a:xfrm>
           <a:prstGeom prst="roundRect">
@@ -20806,7 +20623,7 @@
         </p:nvSpPr>
         <p:spPr>
           <a:xfrm>
-            <a:off x="640080" y="2926080"/>
+            <a:off x="640080" y="3154680"/>
             <a:ext cx="82296" cy="1152144"/>
           </a:xfrm>
           <a:prstGeom prst="rect">
@@ -20850,7 +20667,7 @@
         </p:nvSpPr>
         <p:spPr>
           <a:xfrm>
-            <a:off x="896112" y="3035808"/>
+            <a:off x="896112" y="3264408"/>
             <a:ext cx="4911699" cy="274320"/>
           </a:xfrm>
           <a:prstGeom prst="rect">
@@ -20879,7 +20696,7 @@
                 </a:solidFill>
                 <a:latin typeface="Trebuchet MS"/>
               </a:rPr>
-              <a:t>? Oben steht „Testlauf“. Was heißt das?</a:t>
+              <a:t>? Muss ich zusätzlich ein PDF schicken?</a:t>
             </a:r>
           </a:p>
         </p:txBody>
@@ -20892,7 +20709,7 @@
         </p:nvSpPr>
         <p:spPr>
           <a:xfrm>
-            <a:off x="896112" y="3337560"/>
+            <a:off x="896112" y="3566160"/>
             <a:ext cx="4911699" cy="685800"/>
           </a:xfrm>
           <a:prstGeom prst="rect">
@@ -20921,7 +20738,7 @@
                 </a:solidFill>
                 <a:latin typeface="Trebuchet MS"/>
               </a:rPr>
-              <a:t>Das Programm arbeitet im </a:t>
+              <a:t>Die E-Mail enthält die </a:t>
             </a:r>
             <a:r>
               <a:rPr sz="1300" b="1">
@@ -20930,7 +20747,7 @@
                 </a:solidFill>
                 <a:latin typeface="Trebuchet MS"/>
               </a:rPr>
-              <a:t>Probebetrieb</a:t>
+              <a:t>XML-Datei</a:t>
             </a:r>
             <a:r>
               <a:rPr sz="1300" b="0">
@@ -20939,7 +20756,7 @@
                 </a:solidFill>
                 <a:latin typeface="Trebuchet MS"/>
               </a:rPr>
-              <a:t>: Es prüft alles, verschickt aber </a:t>
+              <a:t> — das ist die Rechnung. Ein PDF hängt derzeit </a:t>
             </a:r>
             <a:r>
               <a:rPr sz="1300" b="1">
@@ -20948,7 +20765,7 @@
                 </a:solidFill>
                 <a:latin typeface="Trebuchet MS"/>
               </a:rPr>
-              <a:t>nichts</a:t>
+              <a:t>nicht</a:t>
             </a:r>
             <a:r>
               <a:rPr sz="1300" b="0">
@@ -20957,7 +20774,7 @@
                 </a:solidFill>
                 <a:latin typeface="Trebuchet MS"/>
               </a:rPr>
-              <a:t>. Die Meldung nach „Jetzt versenden“ lautet dann „Testlauf: nicht wirklich versendet“.</a:t>
+              <a:t> mit. Möchte der Kunde eines, schicken Sie es wie gewohnt aus OPERA.</a:t>
             </a:r>
           </a:p>
         </p:txBody>
@@ -20970,8 +20787,8 @@
         </p:nvSpPr>
         <p:spPr>
           <a:xfrm>
-            <a:off x="6255867" y="3749040"/>
-            <a:ext cx="5295747" cy="923544"/>
+            <a:off x="6255867" y="4206240"/>
+            <a:ext cx="5295747" cy="1380744"/>
           </a:xfrm>
           <a:prstGeom prst="roundRect">
             <a:avLst>
@@ -21016,8 +20833,8 @@
         </p:nvSpPr>
         <p:spPr>
           <a:xfrm>
-            <a:off x="6255867" y="3749040"/>
-            <a:ext cx="82296" cy="923544"/>
+            <a:off x="6255867" y="4206240"/>
+            <a:ext cx="82296" cy="1380744"/>
           </a:xfrm>
           <a:prstGeom prst="rect">
             <a:avLst/>
@@ -21060,8 +20877,8 @@
         </p:nvSpPr>
         <p:spPr>
           <a:xfrm>
-            <a:off x="6511899" y="3858768"/>
-            <a:ext cx="4911699" cy="274320"/>
+            <a:off x="6511899" y="4315968"/>
+            <a:ext cx="4911699" cy="548640"/>
           </a:xfrm>
           <a:prstGeom prst="rect">
             <a:avLst/>
@@ -21089,7 +20906,7 @@
                 </a:solidFill>
                 <a:latin typeface="Trebuchet MS"/>
               </a:rPr>
-              <a:t>? Ich sehe „Konfiguration“ im Menü.</a:t>
+              <a:t>? Oben steht „Automatik arbeitet“, die Knöpfe sind grau.</a:t>
             </a:r>
           </a:p>
         </p:txBody>
@@ -21102,8 +20919,8 @@
         </p:nvSpPr>
         <p:spPr>
           <a:xfrm>
-            <a:off x="6511899" y="4160520"/>
-            <a:ext cx="4911699" cy="457200"/>
+            <a:off x="6511899" y="4846320"/>
+            <a:ext cx="4911699" cy="685800"/>
           </a:xfrm>
           <a:prstGeom prst="rect">
             <a:avLst/>
@@ -21131,25 +20948,7 @@
                 </a:solidFill>
                 <a:latin typeface="Trebuchet MS"/>
               </a:rPr>
-              <a:t>Das ist für die IT. Bitte dort </a:t>
-            </a:r>
-            <a:r>
-              <a:rPr sz="1300" b="1">
-                <a:solidFill>
-                  <a:srgbClr val="2A2824"/>
-                </a:solidFill>
-                <a:latin typeface="Trebuchet MS"/>
-              </a:rPr>
-              <a:t>nichts ändern</a:t>
-            </a:r>
-            <a:r>
-              <a:rPr sz="1300" b="0">
-                <a:solidFill>
-                  <a:srgbClr val="2A2824"/>
-                </a:solidFill>
-                <a:latin typeface="Trebuchet MS"/>
-              </a:rPr>
-              <a:t> — Einstellungen wirken auf alle Rechnungen.</a:t>
+              <a:t>Dann läuft gerade ein automatischer Durchlauf; er dauert meist Sekunden. Kurz warten und die Seite neu laden — danach sind Einlesen und Versenden wieder frei.</a:t>
             </a:r>
           </a:p>
         </p:txBody>
@@ -21297,7 +21096,7 @@
                 </a:solidFill>
                 <a:latin typeface="Trebuchet MS"/>
               </a:rPr>
-              <a:t>ZUM AUSDRUCKEN</a:t>
+              <a:t>HÄUFIGE FRAGEN</a:t>
             </a:r>
           </a:p>
         </p:txBody>
@@ -21339,7 +21138,7 @@
                 </a:solidFill>
                 <a:latin typeface="Georgia"/>
               </a:rPr>
-              <a:t>Spickzettel</a:t>
+              <a:t>Fragen, die oft kommen (3/3)</a:t>
             </a:r>
           </a:p>
         </p:txBody>
@@ -21381,7 +21180,7 @@
                 </a:solidFill>
                 <a:latin typeface="Trebuchet MS"/>
               </a:rPr>
-              <a:t>XRechnung · Anleitung für den Alltag · Stand 16.09.2026 · Bilder mit Musterdaten</a:t>
+              <a:t>XRechnung · Anleitung für den Alltag · Stand 30.10.2026 · Bilder mit Musterdaten</a:t>
             </a:r>
           </a:p>
         </p:txBody>
@@ -21424,6 +21223,1312 @@
                 <a:latin typeface="Trebuchet MS"/>
               </a:rPr>
               <a:t>24</a:t>
+            </a:r>
+          </a:p>
+        </p:txBody>
+      </p:sp>
+      <p:sp>
+        <p:nvSpPr>
+          <p:cNvPr id="8" name="Rounded Rectangle 7"/>
+          <p:cNvSpPr/>
+          <p:nvPr/>
+        </p:nvSpPr>
+        <p:spPr>
+          <a:xfrm>
+            <a:off x="640080" y="1417320"/>
+            <a:ext cx="5295747" cy="1380744"/>
+          </a:xfrm>
+          <a:prstGeom prst="roundRect">
+            <a:avLst>
+              <a:gd name="adj" fmla="val 8000"/>
+            </a:avLst>
+          </a:prstGeom>
+          <a:solidFill>
+            <a:srgbClr val="E2EAF4"/>
+          </a:solidFill>
+          <a:ln>
+            <a:noFill/>
+          </a:ln>
+          <a:effectLst/>
+        </p:spPr>
+        <p:style>
+          <a:lnRef idx="1">
+            <a:schemeClr val="accent1"/>
+          </a:lnRef>
+          <a:fillRef idx="3">
+            <a:schemeClr val="accent1"/>
+          </a:fillRef>
+          <a:effectRef idx="2">
+            <a:schemeClr val="accent1"/>
+          </a:effectRef>
+          <a:fontRef idx="minor">
+            <a:schemeClr val="lt1"/>
+          </a:fontRef>
+        </p:style>
+        <p:txBody>
+          <a:bodyPr rtlCol="0" anchor="ctr"/>
+          <a:lstStyle/>
+          <a:p>
+            <a:pPr algn="ctr"/>
+          </a:p>
+        </p:txBody>
+      </p:sp>
+      <p:sp>
+        <p:nvSpPr>
+          <p:cNvPr id="9" name="Rectangle 8"/>
+          <p:cNvSpPr/>
+          <p:nvPr/>
+        </p:nvSpPr>
+        <p:spPr>
+          <a:xfrm>
+            <a:off x="640080" y="1417320"/>
+            <a:ext cx="82296" cy="1380744"/>
+          </a:xfrm>
+          <a:prstGeom prst="rect">
+            <a:avLst/>
+          </a:prstGeom>
+          <a:solidFill>
+            <a:srgbClr val="2E4F7A"/>
+          </a:solidFill>
+          <a:ln>
+            <a:noFill/>
+          </a:ln>
+          <a:effectLst/>
+        </p:spPr>
+        <p:style>
+          <a:lnRef idx="1">
+            <a:schemeClr val="accent1"/>
+          </a:lnRef>
+          <a:fillRef idx="3">
+            <a:schemeClr val="accent1"/>
+          </a:fillRef>
+          <a:effectRef idx="2">
+            <a:schemeClr val="accent1"/>
+          </a:effectRef>
+          <a:fontRef idx="minor">
+            <a:schemeClr val="lt1"/>
+          </a:fontRef>
+        </p:style>
+        <p:txBody>
+          <a:bodyPr rtlCol="0" anchor="ctr"/>
+          <a:lstStyle/>
+          <a:p>
+            <a:pPr algn="ctr"/>
+          </a:p>
+        </p:txBody>
+      </p:sp>
+      <p:sp>
+        <p:nvSpPr>
+          <p:cNvPr id="10" name="TextBox 9"/>
+          <p:cNvSpPr txBox="1"/>
+          <p:nvPr/>
+        </p:nvSpPr>
+        <p:spPr>
+          <a:xfrm>
+            <a:off x="896112" y="1527048"/>
+            <a:ext cx="4911699" cy="274320"/>
+          </a:xfrm>
+          <a:prstGeom prst="rect">
+            <a:avLst/>
+          </a:prstGeom>
+          <a:noFill/>
+        </p:spPr>
+        <p:txBody>
+          <a:bodyPr wrap="square" anchor="t" lIns="0" rIns="0" tIns="0" bIns="0">
+            <a:spAutoFit/>
+          </a:bodyPr>
+          <a:lstStyle/>
+          <a:p>
+            <a:pPr algn="l">
+              <a:lnSpc>
+                <a:spcPct val="120000"/>
+              </a:lnSpc>
+              <a:spcAft>
+                <a:spcPts val="0"/>
+              </a:spcAft>
+            </a:pPr>
+            <a:r>
+              <a:rPr sz="1350" b="1">
+                <a:solidFill>
+                  <a:srgbClr val="2E4F7A"/>
+                </a:solidFill>
+                <a:latin typeface="Trebuchet MS"/>
+              </a:rPr>
+              <a:t>? Was heißt „Ersatzwert“ bei der Käuferreferenz?</a:t>
+            </a:r>
+          </a:p>
+        </p:txBody>
+      </p:sp>
+      <p:sp>
+        <p:nvSpPr>
+          <p:cNvPr id="11" name="TextBox 10"/>
+          <p:cNvSpPr txBox="1"/>
+          <p:nvPr/>
+        </p:nvSpPr>
+        <p:spPr>
+          <a:xfrm>
+            <a:off x="896112" y="1828800"/>
+            <a:ext cx="4911699" cy="914400"/>
+          </a:xfrm>
+          <a:prstGeom prst="rect">
+            <a:avLst/>
+          </a:prstGeom>
+          <a:noFill/>
+        </p:spPr>
+        <p:txBody>
+          <a:bodyPr wrap="square" anchor="t" lIns="0" rIns="0" tIns="0" bIns="0">
+            <a:spAutoFit/>
+          </a:bodyPr>
+          <a:lstStyle/>
+          <a:p>
+            <a:pPr algn="l">
+              <a:lnSpc>
+                <a:spcPct val="120000"/>
+              </a:lnSpc>
+              <a:spcAft>
+                <a:spcPts val="100"/>
+              </a:spcAft>
+            </a:pPr>
+            <a:r>
+              <a:rPr sz="1300" b="0">
+                <a:solidFill>
+                  <a:srgbClr val="2A2824"/>
+                </a:solidFill>
+                <a:latin typeface="Trebuchet MS"/>
+              </a:rPr>
+              <a:t>Der Kunde hat keine Bestellnummer hinterlegt, deshalb steht dort unsere Reservierungsnummer. Für Firmen ist das </a:t>
+            </a:r>
+            <a:r>
+              <a:rPr sz="1300" b="1">
+                <a:solidFill>
+                  <a:srgbClr val="2A2824"/>
+                </a:solidFill>
+                <a:latin typeface="Trebuchet MS"/>
+              </a:rPr>
+              <a:t>in Ordnung</a:t>
+            </a:r>
+            <a:r>
+              <a:rPr sz="1300" b="0">
+                <a:solidFill>
+                  <a:srgbClr val="2A2824"/>
+                </a:solidFill>
+                <a:latin typeface="Trebuchet MS"/>
+              </a:rPr>
+              <a:t>. Für </a:t>
+            </a:r>
+            <a:r>
+              <a:rPr sz="1300" b="1">
+                <a:solidFill>
+                  <a:srgbClr val="2A2824"/>
+                </a:solidFill>
+                <a:latin typeface="Trebuchet MS"/>
+              </a:rPr>
+              <a:t>Behörden</a:t>
+            </a:r>
+            <a:r>
+              <a:rPr sz="1300" b="0">
+                <a:solidFill>
+                  <a:srgbClr val="2A2824"/>
+                </a:solidFill>
+                <a:latin typeface="Trebuchet MS"/>
+              </a:rPr>
+              <a:t> nicht — die brauchen eine Leitweg-ID: bitte an die Buchhaltung.</a:t>
+            </a:r>
+          </a:p>
+        </p:txBody>
+      </p:sp>
+      <p:sp>
+        <p:nvSpPr>
+          <p:cNvPr id="12" name="Rounded Rectangle 11"/>
+          <p:cNvSpPr/>
+          <p:nvPr/>
+        </p:nvSpPr>
+        <p:spPr>
+          <a:xfrm>
+            <a:off x="6255867" y="1417320"/>
+            <a:ext cx="5295747" cy="923544"/>
+          </a:xfrm>
+          <a:prstGeom prst="roundRect">
+            <a:avLst>
+              <a:gd name="adj" fmla="val 8000"/>
+            </a:avLst>
+          </a:prstGeom>
+          <a:solidFill>
+            <a:srgbClr val="E2EAF4"/>
+          </a:solidFill>
+          <a:ln>
+            <a:noFill/>
+          </a:ln>
+          <a:effectLst/>
+        </p:spPr>
+        <p:style>
+          <a:lnRef idx="1">
+            <a:schemeClr val="accent1"/>
+          </a:lnRef>
+          <a:fillRef idx="3">
+            <a:schemeClr val="accent1"/>
+          </a:fillRef>
+          <a:effectRef idx="2">
+            <a:schemeClr val="accent1"/>
+          </a:effectRef>
+          <a:fontRef idx="minor">
+            <a:schemeClr val="lt1"/>
+          </a:fontRef>
+        </p:style>
+        <p:txBody>
+          <a:bodyPr rtlCol="0" anchor="ctr"/>
+          <a:lstStyle/>
+          <a:p>
+            <a:pPr algn="ctr"/>
+          </a:p>
+        </p:txBody>
+      </p:sp>
+      <p:sp>
+        <p:nvSpPr>
+          <p:cNvPr id="13" name="Rectangle 12"/>
+          <p:cNvSpPr/>
+          <p:nvPr/>
+        </p:nvSpPr>
+        <p:spPr>
+          <a:xfrm>
+            <a:off x="6255867" y="1417320"/>
+            <a:ext cx="82296" cy="923544"/>
+          </a:xfrm>
+          <a:prstGeom prst="rect">
+            <a:avLst/>
+          </a:prstGeom>
+          <a:solidFill>
+            <a:srgbClr val="2E4F7A"/>
+          </a:solidFill>
+          <a:ln>
+            <a:noFill/>
+          </a:ln>
+          <a:effectLst/>
+        </p:spPr>
+        <p:style>
+          <a:lnRef idx="1">
+            <a:schemeClr val="accent1"/>
+          </a:lnRef>
+          <a:fillRef idx="3">
+            <a:schemeClr val="accent1"/>
+          </a:fillRef>
+          <a:effectRef idx="2">
+            <a:schemeClr val="accent1"/>
+          </a:effectRef>
+          <a:fontRef idx="minor">
+            <a:schemeClr val="lt1"/>
+          </a:fontRef>
+        </p:style>
+        <p:txBody>
+          <a:bodyPr rtlCol="0" anchor="ctr"/>
+          <a:lstStyle/>
+          <a:p>
+            <a:pPr algn="ctr"/>
+          </a:p>
+        </p:txBody>
+      </p:sp>
+      <p:sp>
+        <p:nvSpPr>
+          <p:cNvPr id="14" name="TextBox 13"/>
+          <p:cNvSpPr txBox="1"/>
+          <p:nvPr/>
+        </p:nvSpPr>
+        <p:spPr>
+          <a:xfrm>
+            <a:off x="6511899" y="1527048"/>
+            <a:ext cx="4911699" cy="274320"/>
+          </a:xfrm>
+          <a:prstGeom prst="rect">
+            <a:avLst/>
+          </a:prstGeom>
+          <a:noFill/>
+        </p:spPr>
+        <p:txBody>
+          <a:bodyPr wrap="square" anchor="t" lIns="0" rIns="0" tIns="0" bIns="0">
+            <a:spAutoFit/>
+          </a:bodyPr>
+          <a:lstStyle/>
+          <a:p>
+            <a:pPr algn="l">
+              <a:lnSpc>
+                <a:spcPct val="120000"/>
+              </a:lnSpc>
+              <a:spcAft>
+                <a:spcPts val="0"/>
+              </a:spcAft>
+            </a:pPr>
+            <a:r>
+              <a:rPr sz="1350" b="1">
+                <a:solidFill>
+                  <a:srgbClr val="2E4F7A"/>
+                </a:solidFill>
+                <a:latin typeface="Trebuchet MS"/>
+              </a:rPr>
+              <a:t>? Die XML-Datei sieht unleserlich aus.</a:t>
+            </a:r>
+          </a:p>
+        </p:txBody>
+      </p:sp>
+      <p:sp>
+        <p:nvSpPr>
+          <p:cNvPr id="15" name="TextBox 14"/>
+          <p:cNvSpPr txBox="1"/>
+          <p:nvPr/>
+        </p:nvSpPr>
+        <p:spPr>
+          <a:xfrm>
+            <a:off x="6511899" y="1828800"/>
+            <a:ext cx="4911699" cy="457200"/>
+          </a:xfrm>
+          <a:prstGeom prst="rect">
+            <a:avLst/>
+          </a:prstGeom>
+          <a:noFill/>
+        </p:spPr>
+        <p:txBody>
+          <a:bodyPr wrap="square" anchor="t" lIns="0" rIns="0" tIns="0" bIns="0">
+            <a:spAutoFit/>
+          </a:bodyPr>
+          <a:lstStyle/>
+          <a:p>
+            <a:pPr algn="l">
+              <a:lnSpc>
+                <a:spcPct val="120000"/>
+              </a:lnSpc>
+              <a:spcAft>
+                <a:spcPts val="100"/>
+              </a:spcAft>
+            </a:pPr>
+            <a:r>
+              <a:rPr sz="1300" b="0">
+                <a:solidFill>
+                  <a:srgbClr val="2A2824"/>
+                </a:solidFill>
+                <a:latin typeface="Trebuchet MS"/>
+              </a:rPr>
+              <a:t>Das ist </a:t>
+            </a:r>
+            <a:r>
+              <a:rPr sz="1300" b="1">
+                <a:solidFill>
+                  <a:srgbClr val="2A2824"/>
+                </a:solidFill>
+                <a:latin typeface="Trebuchet MS"/>
+              </a:rPr>
+              <a:t>richtig so</a:t>
+            </a:r>
+            <a:r>
+              <a:rPr sz="1300" b="0">
+                <a:solidFill>
+                  <a:srgbClr val="2A2824"/>
+                </a:solidFill>
+                <a:latin typeface="Trebuchet MS"/>
+              </a:rPr>
+              <a:t>. Die Datei ist für das Buchhaltungsprogramm des Kunden gemacht, nicht zum Lesen.</a:t>
+            </a:r>
+          </a:p>
+        </p:txBody>
+      </p:sp>
+      <p:sp>
+        <p:nvSpPr>
+          <p:cNvPr id="16" name="Rounded Rectangle 15"/>
+          <p:cNvSpPr/>
+          <p:nvPr/>
+        </p:nvSpPr>
+        <p:spPr>
+          <a:xfrm>
+            <a:off x="6255867" y="2468880"/>
+            <a:ext cx="5295747" cy="1152144"/>
+          </a:xfrm>
+          <a:prstGeom prst="roundRect">
+            <a:avLst>
+              <a:gd name="adj" fmla="val 8000"/>
+            </a:avLst>
+          </a:prstGeom>
+          <a:solidFill>
+            <a:srgbClr val="E2EAF4"/>
+          </a:solidFill>
+          <a:ln>
+            <a:noFill/>
+          </a:ln>
+          <a:effectLst/>
+        </p:spPr>
+        <p:style>
+          <a:lnRef idx="1">
+            <a:schemeClr val="accent1"/>
+          </a:lnRef>
+          <a:fillRef idx="3">
+            <a:schemeClr val="accent1"/>
+          </a:fillRef>
+          <a:effectRef idx="2">
+            <a:schemeClr val="accent1"/>
+          </a:effectRef>
+          <a:fontRef idx="minor">
+            <a:schemeClr val="lt1"/>
+          </a:fontRef>
+        </p:style>
+        <p:txBody>
+          <a:bodyPr rtlCol="0" anchor="ctr"/>
+          <a:lstStyle/>
+          <a:p>
+            <a:pPr algn="ctr"/>
+          </a:p>
+        </p:txBody>
+      </p:sp>
+      <p:sp>
+        <p:nvSpPr>
+          <p:cNvPr id="17" name="Rectangle 16"/>
+          <p:cNvSpPr/>
+          <p:nvPr/>
+        </p:nvSpPr>
+        <p:spPr>
+          <a:xfrm>
+            <a:off x="6255867" y="2468880"/>
+            <a:ext cx="82296" cy="1152144"/>
+          </a:xfrm>
+          <a:prstGeom prst="rect">
+            <a:avLst/>
+          </a:prstGeom>
+          <a:solidFill>
+            <a:srgbClr val="2E4F7A"/>
+          </a:solidFill>
+          <a:ln>
+            <a:noFill/>
+          </a:ln>
+          <a:effectLst/>
+        </p:spPr>
+        <p:style>
+          <a:lnRef idx="1">
+            <a:schemeClr val="accent1"/>
+          </a:lnRef>
+          <a:fillRef idx="3">
+            <a:schemeClr val="accent1"/>
+          </a:fillRef>
+          <a:effectRef idx="2">
+            <a:schemeClr val="accent1"/>
+          </a:effectRef>
+          <a:fontRef idx="minor">
+            <a:schemeClr val="lt1"/>
+          </a:fontRef>
+        </p:style>
+        <p:txBody>
+          <a:bodyPr rtlCol="0" anchor="ctr"/>
+          <a:lstStyle/>
+          <a:p>
+            <a:pPr algn="ctr"/>
+          </a:p>
+        </p:txBody>
+      </p:sp>
+      <p:sp>
+        <p:nvSpPr>
+          <p:cNvPr id="18" name="TextBox 17"/>
+          <p:cNvSpPr txBox="1"/>
+          <p:nvPr/>
+        </p:nvSpPr>
+        <p:spPr>
+          <a:xfrm>
+            <a:off x="6511899" y="2578608"/>
+            <a:ext cx="4911699" cy="274320"/>
+          </a:xfrm>
+          <a:prstGeom prst="rect">
+            <a:avLst/>
+          </a:prstGeom>
+          <a:noFill/>
+        </p:spPr>
+        <p:txBody>
+          <a:bodyPr wrap="square" anchor="t" lIns="0" rIns="0" tIns="0" bIns="0">
+            <a:spAutoFit/>
+          </a:bodyPr>
+          <a:lstStyle/>
+          <a:p>
+            <a:pPr algn="l">
+              <a:lnSpc>
+                <a:spcPct val="120000"/>
+              </a:lnSpc>
+              <a:spcAft>
+                <a:spcPts val="0"/>
+              </a:spcAft>
+            </a:pPr>
+            <a:r>
+              <a:rPr sz="1350" b="1">
+                <a:solidFill>
+                  <a:srgbClr val="2E4F7A"/>
+                </a:solidFill>
+                <a:latin typeface="Trebuchet MS"/>
+              </a:rPr>
+              <a:t>? Kann ich etwas kaputt machen?</a:t>
+            </a:r>
+          </a:p>
+        </p:txBody>
+      </p:sp>
+      <p:sp>
+        <p:nvSpPr>
+          <p:cNvPr id="19" name="TextBox 18"/>
+          <p:cNvSpPr txBox="1"/>
+          <p:nvPr/>
+        </p:nvSpPr>
+        <p:spPr>
+          <a:xfrm>
+            <a:off x="6511899" y="2880360"/>
+            <a:ext cx="4911699" cy="685800"/>
+          </a:xfrm>
+          <a:prstGeom prst="rect">
+            <a:avLst/>
+          </a:prstGeom>
+          <a:noFill/>
+        </p:spPr>
+        <p:txBody>
+          <a:bodyPr wrap="square" anchor="t" lIns="0" rIns="0" tIns="0" bIns="0">
+            <a:spAutoFit/>
+          </a:bodyPr>
+          <a:lstStyle/>
+          <a:p>
+            <a:pPr algn="l">
+              <a:lnSpc>
+                <a:spcPct val="120000"/>
+              </a:lnSpc>
+              <a:spcAft>
+                <a:spcPts val="100"/>
+              </a:spcAft>
+            </a:pPr>
+            <a:r>
+              <a:rPr sz="1300" b="0">
+                <a:solidFill>
+                  <a:srgbClr val="2A2824"/>
+                </a:solidFill>
+                <a:latin typeface="Trebuchet MS"/>
+              </a:rPr>
+              <a:t>In OPERA </a:t>
+            </a:r>
+            <a:r>
+              <a:rPr sz="1300" b="1">
+                <a:solidFill>
+                  <a:srgbClr val="2A2824"/>
+                </a:solidFill>
+                <a:latin typeface="Trebuchet MS"/>
+              </a:rPr>
+              <a:t>nein</a:t>
+            </a:r>
+            <a:r>
+              <a:rPr sz="1300" b="0">
+                <a:solidFill>
+                  <a:srgbClr val="2A2824"/>
+                </a:solidFill>
+                <a:latin typeface="Trebuchet MS"/>
+              </a:rPr>
+              <a:t> — das Programm liest dort nur. „XML erzeugen“ und „Jetzt einlesen“ sind immer harmlos. Endgültig sind nur </a:t>
+            </a:r>
+            <a:r>
+              <a:rPr sz="1300" b="1">
+                <a:solidFill>
+                  <a:srgbClr val="2A2824"/>
+                </a:solidFill>
+                <a:latin typeface="Trebuchet MS"/>
+              </a:rPr>
+              <a:t>Versenden</a:t>
+            </a:r>
+            <a:r>
+              <a:rPr sz="1300" b="0">
+                <a:solidFill>
+                  <a:srgbClr val="2A2824"/>
+                </a:solidFill>
+                <a:latin typeface="Trebuchet MS"/>
+              </a:rPr>
+              <a:t> und </a:t>
+            </a:r>
+            <a:r>
+              <a:rPr sz="1300" b="1">
+                <a:solidFill>
+                  <a:srgbClr val="2A2824"/>
+                </a:solidFill>
+                <a:latin typeface="Trebuchet MS"/>
+              </a:rPr>
+              <a:t>Zurücklegen</a:t>
+            </a:r>
+            <a:r>
+              <a:rPr sz="1300" b="0">
+                <a:solidFill>
+                  <a:srgbClr val="2A2824"/>
+                </a:solidFill>
+                <a:latin typeface="Trebuchet MS"/>
+              </a:rPr>
+              <a:t>.</a:t>
+            </a:r>
+          </a:p>
+        </p:txBody>
+      </p:sp>
+      <p:sp>
+        <p:nvSpPr>
+          <p:cNvPr id="20" name="Rounded Rectangle 19"/>
+          <p:cNvSpPr/>
+          <p:nvPr/>
+        </p:nvSpPr>
+        <p:spPr>
+          <a:xfrm>
+            <a:off x="640080" y="2926080"/>
+            <a:ext cx="5295747" cy="1152144"/>
+          </a:xfrm>
+          <a:prstGeom prst="roundRect">
+            <a:avLst>
+              <a:gd name="adj" fmla="val 8000"/>
+            </a:avLst>
+          </a:prstGeom>
+          <a:solidFill>
+            <a:srgbClr val="E2EAF4"/>
+          </a:solidFill>
+          <a:ln>
+            <a:noFill/>
+          </a:ln>
+          <a:effectLst/>
+        </p:spPr>
+        <p:style>
+          <a:lnRef idx="1">
+            <a:schemeClr val="accent1"/>
+          </a:lnRef>
+          <a:fillRef idx="3">
+            <a:schemeClr val="accent1"/>
+          </a:fillRef>
+          <a:effectRef idx="2">
+            <a:schemeClr val="accent1"/>
+          </a:effectRef>
+          <a:fontRef idx="minor">
+            <a:schemeClr val="lt1"/>
+          </a:fontRef>
+        </p:style>
+        <p:txBody>
+          <a:bodyPr rtlCol="0" anchor="ctr"/>
+          <a:lstStyle/>
+          <a:p>
+            <a:pPr algn="ctr"/>
+          </a:p>
+        </p:txBody>
+      </p:sp>
+      <p:sp>
+        <p:nvSpPr>
+          <p:cNvPr id="21" name="Rectangle 20"/>
+          <p:cNvSpPr/>
+          <p:nvPr/>
+        </p:nvSpPr>
+        <p:spPr>
+          <a:xfrm>
+            <a:off x="640080" y="2926080"/>
+            <a:ext cx="82296" cy="1152144"/>
+          </a:xfrm>
+          <a:prstGeom prst="rect">
+            <a:avLst/>
+          </a:prstGeom>
+          <a:solidFill>
+            <a:srgbClr val="2E4F7A"/>
+          </a:solidFill>
+          <a:ln>
+            <a:noFill/>
+          </a:ln>
+          <a:effectLst/>
+        </p:spPr>
+        <p:style>
+          <a:lnRef idx="1">
+            <a:schemeClr val="accent1"/>
+          </a:lnRef>
+          <a:fillRef idx="3">
+            <a:schemeClr val="accent1"/>
+          </a:fillRef>
+          <a:effectRef idx="2">
+            <a:schemeClr val="accent1"/>
+          </a:effectRef>
+          <a:fontRef idx="minor">
+            <a:schemeClr val="lt1"/>
+          </a:fontRef>
+        </p:style>
+        <p:txBody>
+          <a:bodyPr rtlCol="0" anchor="ctr"/>
+          <a:lstStyle/>
+          <a:p>
+            <a:pPr algn="ctr"/>
+          </a:p>
+        </p:txBody>
+      </p:sp>
+      <p:sp>
+        <p:nvSpPr>
+          <p:cNvPr id="22" name="TextBox 21"/>
+          <p:cNvSpPr txBox="1"/>
+          <p:nvPr/>
+        </p:nvSpPr>
+        <p:spPr>
+          <a:xfrm>
+            <a:off x="896112" y="3035808"/>
+            <a:ext cx="4911699" cy="274320"/>
+          </a:xfrm>
+          <a:prstGeom prst="rect">
+            <a:avLst/>
+          </a:prstGeom>
+          <a:noFill/>
+        </p:spPr>
+        <p:txBody>
+          <a:bodyPr wrap="square" anchor="t" lIns="0" rIns="0" tIns="0" bIns="0">
+            <a:spAutoFit/>
+          </a:bodyPr>
+          <a:lstStyle/>
+          <a:p>
+            <a:pPr algn="l">
+              <a:lnSpc>
+                <a:spcPct val="120000"/>
+              </a:lnSpc>
+              <a:spcAft>
+                <a:spcPts val="0"/>
+              </a:spcAft>
+            </a:pPr>
+            <a:r>
+              <a:rPr sz="1350" b="1">
+                <a:solidFill>
+                  <a:srgbClr val="2E4F7A"/>
+                </a:solidFill>
+                <a:latin typeface="Trebuchet MS"/>
+              </a:rPr>
+              <a:t>? Oben steht „Testlauf“. Was heißt das?</a:t>
+            </a:r>
+          </a:p>
+        </p:txBody>
+      </p:sp>
+      <p:sp>
+        <p:nvSpPr>
+          <p:cNvPr id="23" name="TextBox 22"/>
+          <p:cNvSpPr txBox="1"/>
+          <p:nvPr/>
+        </p:nvSpPr>
+        <p:spPr>
+          <a:xfrm>
+            <a:off x="896112" y="3337560"/>
+            <a:ext cx="4911699" cy="685800"/>
+          </a:xfrm>
+          <a:prstGeom prst="rect">
+            <a:avLst/>
+          </a:prstGeom>
+          <a:noFill/>
+        </p:spPr>
+        <p:txBody>
+          <a:bodyPr wrap="square" anchor="t" lIns="0" rIns="0" tIns="0" bIns="0">
+            <a:spAutoFit/>
+          </a:bodyPr>
+          <a:lstStyle/>
+          <a:p>
+            <a:pPr algn="l">
+              <a:lnSpc>
+                <a:spcPct val="120000"/>
+              </a:lnSpc>
+              <a:spcAft>
+                <a:spcPts val="100"/>
+              </a:spcAft>
+            </a:pPr>
+            <a:r>
+              <a:rPr sz="1300" b="0">
+                <a:solidFill>
+                  <a:srgbClr val="2A2824"/>
+                </a:solidFill>
+                <a:latin typeface="Trebuchet MS"/>
+              </a:rPr>
+              <a:t>Das Programm arbeitet im </a:t>
+            </a:r>
+            <a:r>
+              <a:rPr sz="1300" b="1">
+                <a:solidFill>
+                  <a:srgbClr val="2A2824"/>
+                </a:solidFill>
+                <a:latin typeface="Trebuchet MS"/>
+              </a:rPr>
+              <a:t>Probebetrieb</a:t>
+            </a:r>
+            <a:r>
+              <a:rPr sz="1300" b="0">
+                <a:solidFill>
+                  <a:srgbClr val="2A2824"/>
+                </a:solidFill>
+                <a:latin typeface="Trebuchet MS"/>
+              </a:rPr>
+              <a:t>: Es prüft alles, verschickt aber </a:t>
+            </a:r>
+            <a:r>
+              <a:rPr sz="1300" b="1">
+                <a:solidFill>
+                  <a:srgbClr val="2A2824"/>
+                </a:solidFill>
+                <a:latin typeface="Trebuchet MS"/>
+              </a:rPr>
+              <a:t>nichts</a:t>
+            </a:r>
+            <a:r>
+              <a:rPr sz="1300" b="0">
+                <a:solidFill>
+                  <a:srgbClr val="2A2824"/>
+                </a:solidFill>
+                <a:latin typeface="Trebuchet MS"/>
+              </a:rPr>
+              <a:t>. Die Meldung nach „Jetzt versenden“ lautet dann „Testlauf: nicht wirklich versendet“.</a:t>
+            </a:r>
+          </a:p>
+        </p:txBody>
+      </p:sp>
+      <p:sp>
+        <p:nvSpPr>
+          <p:cNvPr id="24" name="Rounded Rectangle 23"/>
+          <p:cNvSpPr/>
+          <p:nvPr/>
+        </p:nvSpPr>
+        <p:spPr>
+          <a:xfrm>
+            <a:off x="6255867" y="3749040"/>
+            <a:ext cx="5295747" cy="923544"/>
+          </a:xfrm>
+          <a:prstGeom prst="roundRect">
+            <a:avLst>
+              <a:gd name="adj" fmla="val 8000"/>
+            </a:avLst>
+          </a:prstGeom>
+          <a:solidFill>
+            <a:srgbClr val="E2EAF4"/>
+          </a:solidFill>
+          <a:ln>
+            <a:noFill/>
+          </a:ln>
+          <a:effectLst/>
+        </p:spPr>
+        <p:style>
+          <a:lnRef idx="1">
+            <a:schemeClr val="accent1"/>
+          </a:lnRef>
+          <a:fillRef idx="3">
+            <a:schemeClr val="accent1"/>
+          </a:fillRef>
+          <a:effectRef idx="2">
+            <a:schemeClr val="accent1"/>
+          </a:effectRef>
+          <a:fontRef idx="minor">
+            <a:schemeClr val="lt1"/>
+          </a:fontRef>
+        </p:style>
+        <p:txBody>
+          <a:bodyPr rtlCol="0" anchor="ctr"/>
+          <a:lstStyle/>
+          <a:p>
+            <a:pPr algn="ctr"/>
+          </a:p>
+        </p:txBody>
+      </p:sp>
+      <p:sp>
+        <p:nvSpPr>
+          <p:cNvPr id="25" name="Rectangle 24"/>
+          <p:cNvSpPr/>
+          <p:nvPr/>
+        </p:nvSpPr>
+        <p:spPr>
+          <a:xfrm>
+            <a:off x="6255867" y="3749040"/>
+            <a:ext cx="82296" cy="923544"/>
+          </a:xfrm>
+          <a:prstGeom prst="rect">
+            <a:avLst/>
+          </a:prstGeom>
+          <a:solidFill>
+            <a:srgbClr val="2E4F7A"/>
+          </a:solidFill>
+          <a:ln>
+            <a:noFill/>
+          </a:ln>
+          <a:effectLst/>
+        </p:spPr>
+        <p:style>
+          <a:lnRef idx="1">
+            <a:schemeClr val="accent1"/>
+          </a:lnRef>
+          <a:fillRef idx="3">
+            <a:schemeClr val="accent1"/>
+          </a:fillRef>
+          <a:effectRef idx="2">
+            <a:schemeClr val="accent1"/>
+          </a:effectRef>
+          <a:fontRef idx="minor">
+            <a:schemeClr val="lt1"/>
+          </a:fontRef>
+        </p:style>
+        <p:txBody>
+          <a:bodyPr rtlCol="0" anchor="ctr"/>
+          <a:lstStyle/>
+          <a:p>
+            <a:pPr algn="ctr"/>
+          </a:p>
+        </p:txBody>
+      </p:sp>
+      <p:sp>
+        <p:nvSpPr>
+          <p:cNvPr id="26" name="TextBox 25"/>
+          <p:cNvSpPr txBox="1"/>
+          <p:nvPr/>
+        </p:nvSpPr>
+        <p:spPr>
+          <a:xfrm>
+            <a:off x="6511899" y="3858768"/>
+            <a:ext cx="4911699" cy="274320"/>
+          </a:xfrm>
+          <a:prstGeom prst="rect">
+            <a:avLst/>
+          </a:prstGeom>
+          <a:noFill/>
+        </p:spPr>
+        <p:txBody>
+          <a:bodyPr wrap="square" anchor="t" lIns="0" rIns="0" tIns="0" bIns="0">
+            <a:spAutoFit/>
+          </a:bodyPr>
+          <a:lstStyle/>
+          <a:p>
+            <a:pPr algn="l">
+              <a:lnSpc>
+                <a:spcPct val="120000"/>
+              </a:lnSpc>
+              <a:spcAft>
+                <a:spcPts val="0"/>
+              </a:spcAft>
+            </a:pPr>
+            <a:r>
+              <a:rPr sz="1350" b="1">
+                <a:solidFill>
+                  <a:srgbClr val="2E4F7A"/>
+                </a:solidFill>
+                <a:latin typeface="Trebuchet MS"/>
+              </a:rPr>
+              <a:t>? Ich sehe „Konfiguration“ im Menü.</a:t>
+            </a:r>
+          </a:p>
+        </p:txBody>
+      </p:sp>
+      <p:sp>
+        <p:nvSpPr>
+          <p:cNvPr id="27" name="TextBox 26"/>
+          <p:cNvSpPr txBox="1"/>
+          <p:nvPr/>
+        </p:nvSpPr>
+        <p:spPr>
+          <a:xfrm>
+            <a:off x="6511899" y="4160520"/>
+            <a:ext cx="4911699" cy="457200"/>
+          </a:xfrm>
+          <a:prstGeom prst="rect">
+            <a:avLst/>
+          </a:prstGeom>
+          <a:noFill/>
+        </p:spPr>
+        <p:txBody>
+          <a:bodyPr wrap="square" anchor="t" lIns="0" rIns="0" tIns="0" bIns="0">
+            <a:spAutoFit/>
+          </a:bodyPr>
+          <a:lstStyle/>
+          <a:p>
+            <a:pPr algn="l">
+              <a:lnSpc>
+                <a:spcPct val="120000"/>
+              </a:lnSpc>
+              <a:spcAft>
+                <a:spcPts val="100"/>
+              </a:spcAft>
+            </a:pPr>
+            <a:r>
+              <a:rPr sz="1300" b="0">
+                <a:solidFill>
+                  <a:srgbClr val="2A2824"/>
+                </a:solidFill>
+                <a:latin typeface="Trebuchet MS"/>
+              </a:rPr>
+              <a:t>Das ist für die IT. Bitte dort </a:t>
+            </a:r>
+            <a:r>
+              <a:rPr sz="1300" b="1">
+                <a:solidFill>
+                  <a:srgbClr val="2A2824"/>
+                </a:solidFill>
+                <a:latin typeface="Trebuchet MS"/>
+              </a:rPr>
+              <a:t>nichts ändern</a:t>
+            </a:r>
+            <a:r>
+              <a:rPr sz="1300" b="0">
+                <a:solidFill>
+                  <a:srgbClr val="2A2824"/>
+                </a:solidFill>
+                <a:latin typeface="Trebuchet MS"/>
+              </a:rPr>
+              <a:t> — Einstellungen wirken auf alle Rechnungen.</a:t>
+            </a:r>
+          </a:p>
+        </p:txBody>
+      </p:sp>
+    </p:spTree>
+  </p:cSld>
+  <p:clrMapOvr>
+    <a:masterClrMapping/>
+  </p:clrMapOvr>
+</p:sld>
+</file>
+
+<file path=ppt/slides/slide26.xml><?xml version="1.0" encoding="utf-8"?>
+<p:sld xmlns:a="http://schemas.openxmlformats.org/drawingml/2006/main" xmlns:p="http://schemas.openxmlformats.org/presentationml/2006/main" xmlns:r="http://schemas.openxmlformats.org/officeDocument/2006/relationships">
+  <p:cSld>
+    <p:spTree>
+      <p:nvGrpSpPr>
+        <p:cNvPr id="1" name=""/>
+        <p:cNvGrpSpPr/>
+        <p:nvPr/>
+      </p:nvGrpSpPr>
+      <p:grpSpPr/>
+      <p:sp>
+        <p:nvSpPr>
+          <p:cNvPr id="2" name="Rectangle 1"/>
+          <p:cNvSpPr/>
+          <p:nvPr/>
+        </p:nvSpPr>
+        <p:spPr>
+          <a:xfrm>
+            <a:off x="0" y="0"/>
+            <a:ext cx="12191695" cy="6858000"/>
+          </a:xfrm>
+          <a:prstGeom prst="rect">
+            <a:avLst/>
+          </a:prstGeom>
+          <a:solidFill>
+            <a:srgbClr val="F6F4F0"/>
+          </a:solidFill>
+          <a:ln>
+            <a:noFill/>
+          </a:ln>
+          <a:effectLst/>
+        </p:spPr>
+        <p:style>
+          <a:lnRef idx="1">
+            <a:schemeClr val="accent1"/>
+          </a:lnRef>
+          <a:fillRef idx="3">
+            <a:schemeClr val="accent1"/>
+          </a:fillRef>
+          <a:effectRef idx="2">
+            <a:schemeClr val="accent1"/>
+          </a:effectRef>
+          <a:fontRef idx="minor">
+            <a:schemeClr val="lt1"/>
+          </a:fontRef>
+        </p:style>
+        <p:txBody>
+          <a:bodyPr rtlCol="0" anchor="ctr"/>
+          <a:lstStyle/>
+          <a:p>
+            <a:pPr algn="ctr"/>
+          </a:p>
+        </p:txBody>
+      </p:sp>
+      <p:sp>
+        <p:nvSpPr>
+          <p:cNvPr id="3" name="Rectangle 2"/>
+          <p:cNvSpPr/>
+          <p:nvPr/>
+        </p:nvSpPr>
+        <p:spPr>
+          <a:xfrm>
+            <a:off x="0" y="0"/>
+            <a:ext cx="12191695" cy="109728"/>
+          </a:xfrm>
+          <a:prstGeom prst="rect">
+            <a:avLst/>
+          </a:prstGeom>
+          <a:solidFill>
+            <a:srgbClr val="AD9260"/>
+          </a:solidFill>
+          <a:ln>
+            <a:noFill/>
+          </a:ln>
+          <a:effectLst/>
+        </p:spPr>
+        <p:style>
+          <a:lnRef idx="1">
+            <a:schemeClr val="accent1"/>
+          </a:lnRef>
+          <a:fillRef idx="3">
+            <a:schemeClr val="accent1"/>
+          </a:fillRef>
+          <a:effectRef idx="2">
+            <a:schemeClr val="accent1"/>
+          </a:effectRef>
+          <a:fontRef idx="minor">
+            <a:schemeClr val="lt1"/>
+          </a:fontRef>
+        </p:style>
+        <p:txBody>
+          <a:bodyPr rtlCol="0" anchor="ctr"/>
+          <a:lstStyle/>
+          <a:p>
+            <a:pPr algn="ctr"/>
+          </a:p>
+        </p:txBody>
+      </p:sp>
+      <p:sp>
+        <p:nvSpPr>
+          <p:cNvPr id="4" name="TextBox 3"/>
+          <p:cNvSpPr txBox="1"/>
+          <p:nvPr/>
+        </p:nvSpPr>
+        <p:spPr>
+          <a:xfrm>
+            <a:off x="640080" y="347472"/>
+            <a:ext cx="10058400" cy="274320"/>
+          </a:xfrm>
+          <a:prstGeom prst="rect">
+            <a:avLst/>
+          </a:prstGeom>
+          <a:noFill/>
+        </p:spPr>
+        <p:txBody>
+          <a:bodyPr wrap="square" anchor="t" lIns="0" rIns="0" tIns="0" bIns="0">
+            <a:spAutoFit/>
+          </a:bodyPr>
+          <a:lstStyle/>
+          <a:p>
+            <a:pPr algn="l">
+              <a:lnSpc>
+                <a:spcPct val="120000"/>
+              </a:lnSpc>
+              <a:spcAft>
+                <a:spcPts val="400"/>
+              </a:spcAft>
+            </a:pPr>
+            <a:r>
+              <a:rPr sz="1100" b="1">
+                <a:solidFill>
+                  <a:srgbClr val="745B2F"/>
+                </a:solidFill>
+                <a:latin typeface="Trebuchet MS"/>
+              </a:rPr>
+              <a:t>ZUM AUSDRUCKEN</a:t>
+            </a:r>
+          </a:p>
+        </p:txBody>
+      </p:sp>
+      <p:sp>
+        <p:nvSpPr>
+          <p:cNvPr id="5" name="TextBox 4"/>
+          <p:cNvSpPr txBox="1"/>
+          <p:nvPr/>
+        </p:nvSpPr>
+        <p:spPr>
+          <a:xfrm>
+            <a:off x="640080" y="603504"/>
+            <a:ext cx="10972800" cy="640080"/>
+          </a:xfrm>
+          <a:prstGeom prst="rect">
+            <a:avLst/>
+          </a:prstGeom>
+          <a:noFill/>
+        </p:spPr>
+        <p:txBody>
+          <a:bodyPr wrap="square" anchor="t" lIns="0" rIns="0" tIns="0" bIns="0">
+            <a:spAutoFit/>
+          </a:bodyPr>
+          <a:lstStyle/>
+          <a:p>
+            <a:pPr algn="l">
+              <a:lnSpc>
+                <a:spcPct val="120000"/>
+              </a:lnSpc>
+              <a:spcAft>
+                <a:spcPts val="400"/>
+              </a:spcAft>
+            </a:pPr>
+            <a:r>
+              <a:rPr sz="2800" b="0">
+                <a:solidFill>
+                  <a:srgbClr val="1A1A1A"/>
+                </a:solidFill>
+                <a:latin typeface="Georgia"/>
+              </a:rPr>
+              <a:t>Spickzettel</a:t>
+            </a:r>
+          </a:p>
+        </p:txBody>
+      </p:sp>
+      <p:sp>
+        <p:nvSpPr>
+          <p:cNvPr id="6" name="TextBox 5"/>
+          <p:cNvSpPr txBox="1"/>
+          <p:nvPr/>
+        </p:nvSpPr>
+        <p:spPr>
+          <a:xfrm>
+            <a:off x="640080" y="6473952"/>
+            <a:ext cx="8229600" cy="274320"/>
+          </a:xfrm>
+          <a:prstGeom prst="rect">
+            <a:avLst/>
+          </a:prstGeom>
+          <a:noFill/>
+        </p:spPr>
+        <p:txBody>
+          <a:bodyPr wrap="square" anchor="t" lIns="0" rIns="0" tIns="0" bIns="0">
+            <a:spAutoFit/>
+          </a:bodyPr>
+          <a:lstStyle/>
+          <a:p>
+            <a:pPr algn="l">
+              <a:lnSpc>
+                <a:spcPct val="120000"/>
+              </a:lnSpc>
+              <a:spcAft>
+                <a:spcPts val="400"/>
+              </a:spcAft>
+            </a:pPr>
+            <a:r>
+              <a:rPr sz="950" b="0">
+                <a:solidFill>
+                  <a:srgbClr val="7A746C"/>
+                </a:solidFill>
+                <a:latin typeface="Trebuchet MS"/>
+              </a:rPr>
+              <a:t>XRechnung · Anleitung für den Alltag · Stand 30.10.2026 · Bilder mit Musterdaten</a:t>
+            </a:r>
+          </a:p>
+        </p:txBody>
+      </p:sp>
+      <p:sp>
+        <p:nvSpPr>
+          <p:cNvPr id="7" name="TextBox 6"/>
+          <p:cNvSpPr txBox="1"/>
+          <p:nvPr/>
+        </p:nvSpPr>
+        <p:spPr>
+          <a:xfrm>
+            <a:off x="10637215" y="6473952"/>
+            <a:ext cx="914400" cy="274320"/>
+          </a:xfrm>
+          <a:prstGeom prst="rect">
+            <a:avLst/>
+          </a:prstGeom>
+          <a:noFill/>
+        </p:spPr>
+        <p:txBody>
+          <a:bodyPr wrap="square" anchor="t" lIns="0" rIns="0" tIns="0" bIns="0">
+            <a:spAutoFit/>
+          </a:bodyPr>
+          <a:lstStyle/>
+          <a:p>
+            <a:pPr algn="r">
+              <a:lnSpc>
+                <a:spcPct val="120000"/>
+              </a:lnSpc>
+              <a:spcAft>
+                <a:spcPts val="400"/>
+              </a:spcAft>
+            </a:pPr>
+            <a:r>
+              <a:rPr sz="1000" b="0">
+                <a:solidFill>
+                  <a:srgbClr val="7A746C"/>
+                </a:solidFill>
+                <a:latin typeface="Trebuchet MS"/>
+              </a:rPr>
+              <a:t>25</a:t>
             </a:r>
           </a:p>
         </p:txBody>
@@ -21639,7 +22744,7 @@
                 </a:solidFill>
                 <a:latin typeface="Trebuchet MS"/>
               </a:rPr>
-              <a:t>2.  „Firma an der Reservierung“? → auf </a:t>
+              <a:t>2.  Firma an der Reservierung oder </a:t>
             </a:r>
             <a:r>
               <a:rPr sz="1500" b="1">
@@ -21648,7 +22753,7 @@
                 </a:solidFill>
                 <a:latin typeface="Trebuchet MS"/>
               </a:rPr>
-              <a:t>„Bezahlt über“</a:t>
+              <a:t>Gutschrift</a:t>
             </a:r>
             <a:r>
               <a:rPr sz="1500" b="0">
@@ -21657,7 +22762,7 @@
                 </a:solidFill>
                 <a:latin typeface="Trebuchet MS"/>
               </a:rPr>
-              <a:t> schauen.</a:t>
+              <a:t>? → Hinweis oben lesen.</a:t>
             </a:r>
           </a:p>
         </p:txBody>
@@ -21765,25 +22870,7 @@
                 </a:solidFill>
                 <a:latin typeface="Trebuchet MS"/>
               </a:rPr>
-              <a:t> prüfen, </a:t>
-            </a:r>
-            <a:r>
-              <a:rPr sz="1500" b="1">
-                <a:solidFill>
-                  <a:srgbClr val="2A2824"/>
-                </a:solidFill>
-                <a:latin typeface="Trebuchet MS"/>
-              </a:rPr>
-              <a:t>„Empfänger übernehmen“</a:t>
-            </a:r>
-            <a:r>
-              <a:rPr sz="1500" b="0">
-                <a:solidFill>
-                  <a:srgbClr val="2A2824"/>
-                </a:solidFill>
-                <a:latin typeface="Trebuchet MS"/>
-              </a:rPr>
-              <a:t>, in Prüfung dazu </a:t>
+              <a:t> übernehmen, in Prüfung dazu </a:t>
             </a:r>
             <a:r>
               <a:rPr sz="1500" b="1">
@@ -23049,7 +24136,7 @@
                 </a:solidFill>
                 <a:latin typeface="Trebuchet MS"/>
               </a:rPr>
-              <a:t>XRechnung · Anleitung für den Alltag · Stand 16.09.2026 · Bilder mit Musterdaten</a:t>
+              <a:t>XRechnung · Anleitung für den Alltag · Stand 30.10.2026 · Bilder mit Musterdaten</a:t>
             </a:r>
           </a:p>
         </p:txBody>
@@ -25116,7 +26203,7 @@
                 </a:solidFill>
                 <a:latin typeface="Trebuchet MS"/>
               </a:rPr>
-              <a:t>XRechnung · Anleitung für den Alltag · Stand 16.09.2026 · Bilder mit Musterdaten</a:t>
+              <a:t>XRechnung · Anleitung für den Alltag · Stand 30.10.2026 · Bilder mit Musterdaten</a:t>
             </a:r>
           </a:p>
         </p:txBody>
@@ -25172,7 +26259,7 @@
         <p:spPr>
           <a:xfrm>
             <a:off x="6290310" y="1398270"/>
-            <a:ext cx="4987076" cy="3970020"/>
+            <a:ext cx="4973914" cy="3970020"/>
           </a:xfrm>
           <a:prstGeom prst="rect">
             <a:avLst/>
@@ -25224,7 +26311,7 @@
         <p:spPr>
           <a:xfrm>
             <a:off x="6309360" y="1417320"/>
-            <a:ext cx="4948976" cy="3931920"/>
+            <a:ext cx="4935814" cy="3931920"/>
           </a:xfrm>
           <a:prstGeom prst="rect">
             <a:avLst/>
@@ -25870,8 +26957,8 @@
         </p:nvSpPr>
         <p:spPr>
           <a:xfrm>
-            <a:off x="6309360" y="5486400"/>
-            <a:ext cx="5242255" cy="658368"/>
+            <a:off x="6309360" y="5440680"/>
+            <a:ext cx="5242255" cy="914400"/>
           </a:xfrm>
           <a:prstGeom prst="roundRect">
             <a:avLst>
@@ -25916,8 +27003,8 @@
         </p:nvSpPr>
         <p:spPr>
           <a:xfrm>
-            <a:off x="6309360" y="5486400"/>
-            <a:ext cx="82296" cy="658368"/>
+            <a:off x="6309360" y="5440680"/>
+            <a:ext cx="82296" cy="914400"/>
           </a:xfrm>
           <a:prstGeom prst="rect">
             <a:avLst/>
@@ -25960,7 +27047,7 @@
         </p:nvSpPr>
         <p:spPr>
           <a:xfrm>
-            <a:off x="6565392" y="5596128"/>
+            <a:off x="6565392" y="5550408"/>
             <a:ext cx="4876495" cy="274320"/>
           </a:xfrm>
           <a:prstGeom prst="rect">
@@ -26002,8 +27089,8 @@
         </p:nvSpPr>
         <p:spPr>
           <a:xfrm>
-            <a:off x="6565392" y="5852160"/>
-            <a:ext cx="4830775" cy="246888"/>
+            <a:off x="6565392" y="5806440"/>
+            <a:ext cx="4830775" cy="502920"/>
           </a:xfrm>
           <a:prstGeom prst="rect">
             <a:avLst/>
@@ -26031,7 +27118,43 @@
                 </a:solidFill>
                 <a:latin typeface="Trebuchet MS"/>
               </a:rPr>
-              <a:t>Passwort vergessen? Das kann die IT zurücksetzen.</a:t>
+              <a:t>Passwort vergessen? Wer </a:t>
+            </a:r>
+            <a:r>
+              <a:rPr sz="1350" b="1">
+                <a:solidFill>
+                  <a:srgbClr val="2A2824"/>
+                </a:solidFill>
+                <a:latin typeface="Trebuchet MS"/>
+              </a:rPr>
+              <a:t>verwalten</a:t>
+            </a:r>
+            <a:r>
+              <a:rPr sz="1350" b="0">
+                <a:solidFill>
+                  <a:srgbClr val="2A2824"/>
+                </a:solidFill>
+                <a:latin typeface="Trebuchet MS"/>
+              </a:rPr>
+              <a:t> darf, setzt es unter </a:t>
+            </a:r>
+            <a:r>
+              <a:rPr sz="1350" b="1">
+                <a:solidFill>
+                  <a:srgbClr val="2A2824"/>
+                </a:solidFill>
+                <a:latin typeface="Trebuchet MS"/>
+              </a:rPr>
+              <a:t>„Benutzer“</a:t>
+            </a:r>
+            <a:r>
+              <a:rPr sz="1350" b="0">
+                <a:solidFill>
+                  <a:srgbClr val="2A2824"/>
+                </a:solidFill>
+                <a:latin typeface="Trebuchet MS"/>
+              </a:rPr>
+              <a:t> neu — sonst die IT.</a:t>
             </a:r>
           </a:p>
         </p:txBody>
@@ -26263,7 +27386,7 @@
                 </a:solidFill>
                 <a:latin typeface="Trebuchet MS"/>
               </a:rPr>
-              <a:t>XRechnung · Anleitung für den Alltag · Stand 16.09.2026 · Bilder mit Musterdaten</a:t>
+              <a:t>XRechnung · Anleitung für den Alltag · Stand 30.10.2026 · Bilder mit Musterdaten</a:t>
             </a:r>
           </a:p>
         </p:txBody>
@@ -27352,7 +28475,7 @@
                 </a:solidFill>
                 <a:latin typeface="Trebuchet MS"/>
               </a:rPr>
-              <a:t>XRechnung · Anleitung für den Alltag · Stand 16.09.2026 · Bilder mit Musterdaten</a:t>
+              <a:t>XRechnung · Anleitung für den Alltag · Stand 30.10.2026 · Bilder mit Musterdaten</a:t>
             </a:r>
           </a:p>
         </p:txBody>
@@ -29182,7 +30305,7 @@
                 </a:solidFill>
                 <a:latin typeface="Trebuchet MS"/>
               </a:rPr>
-              <a:t>XRechnung · Anleitung für den Alltag · Stand 16.09.2026 · Bilder mit Musterdaten</a:t>
+              <a:t>XRechnung · Anleitung für den Alltag · Stand 30.10.2026 · Bilder mit Musterdaten</a:t>
             </a:r>
           </a:p>
         </p:txBody>
@@ -30241,7 +31364,7 @@
                 </a:solidFill>
                 <a:latin typeface="Trebuchet MS"/>
               </a:rPr>
-              <a:t>XRechnung · Anleitung für den Alltag · Stand 16.09.2026 · Bilder mit Musterdaten</a:t>
+              <a:t>XRechnung · Anleitung für den Alltag · Stand 30.10.2026 · Bilder mit Musterdaten</a:t>
             </a:r>
           </a:p>
         </p:txBody>
@@ -31126,7 +32249,7 @@
                 </a:solidFill>
                 <a:latin typeface="Trebuchet MS"/>
               </a:rPr>
-              <a:t>XRechnung · Anleitung für den Alltag · Stand 16.09.2026 · Bilder mit Musterdaten</a:t>
+              <a:t>XRechnung · Anleitung für den Alltag · Stand 30.10.2026 · Bilder mit Musterdaten</a:t>
             </a:r>
           </a:p>
         </p:txBody>
@@ -31182,7 +32305,7 @@
         <p:spPr>
           <a:xfrm>
             <a:off x="4827270" y="1398270"/>
-            <a:ext cx="6743395" cy="4294099"/>
+            <a:ext cx="6743395" cy="4405854"/>
           </a:xfrm>
           <a:prstGeom prst="rect">
             <a:avLst/>
@@ -31234,7 +32357,7 @@
         <p:spPr>
           <a:xfrm>
             <a:off x="4846320" y="1417320"/>
-            <a:ext cx="6705295" cy="4255999"/>
+            <a:ext cx="6705295" cy="4367754"/>
           </a:xfrm>
           <a:prstGeom prst="rect">
             <a:avLst/>
